--- a/Project Assignment - Regression Analysis.pptx
+++ b/Project Assignment - Regression Analysis.pptx
@@ -182,10 +182,86 @@
 <file path=ppt/revisionInfo.xml><?xml version="1.0" encoding="utf-8"?>
 <p1510:revInfo xmlns:a="http://schemas.openxmlformats.org/drawingml/2006/main" xmlns:r="http://schemas.openxmlformats.org/officeDocument/2006/relationships" xmlns:p1510="http://schemas.microsoft.com/office/powerpoint/2015/10/main">
   <p1510:revLst>
-    <p1510:client id="{19F4C7BE-D3A6-E1AB-9EF1-1D95187F52DF}" v="201" dt="2025-04-11T11:06:27.594"/>
-    <p1510:client id="{1E06C9D2-DBB7-4CD2-A800-2F010F4405AC}" v="477" dt="2025-04-11T12:12:46.007"/>
+    <p1510:client id="{A619CA5E-E594-4877-815E-1FCD708D4E4D}" v="3" dt="2025-04-21T11:45:34.584"/>
   </p1510:revLst>
 </p1510:revInfo>
+</file>
+
+<file path=ppt/changesInfos/changesInfo1.xml><?xml version="1.0" encoding="utf-8"?>
+<pc:chgInfo xmlns:a="http://schemas.openxmlformats.org/drawingml/2006/main" xmlns:r="http://schemas.openxmlformats.org/officeDocument/2006/relationships" xmlns:ac="http://schemas.microsoft.com/office/drawing/2013/main/command" xmlns:pc="http://schemas.microsoft.com/office/powerpoint/2013/main/command">
+  <pc:docChgLst>
+    <pc:chgData name="David Lienkamp0088" userId="84b9d127-8837-4ea9-8dd5-c266d6988ad7" providerId="ADAL" clId="{A619CA5E-E594-4877-815E-1FCD708D4E4D}"/>
+    <pc:docChg chg="custSel modSld">
+      <pc:chgData name="David Lienkamp0088" userId="84b9d127-8837-4ea9-8dd5-c266d6988ad7" providerId="ADAL" clId="{A619CA5E-E594-4877-815E-1FCD708D4E4D}" dt="2025-04-21T11:46:03.015" v="698" actId="20577"/>
+      <pc:docMkLst>
+        <pc:docMk/>
+      </pc:docMkLst>
+      <pc:sldChg chg="modNotesTx">
+        <pc:chgData name="David Lienkamp0088" userId="84b9d127-8837-4ea9-8dd5-c266d6988ad7" providerId="ADAL" clId="{A619CA5E-E594-4877-815E-1FCD708D4E4D}" dt="2025-04-21T11:32:56.229" v="203" actId="20577"/>
+        <pc:sldMkLst>
+          <pc:docMk/>
+          <pc:sldMk cId="1549259780" sldId="424"/>
+        </pc:sldMkLst>
+      </pc:sldChg>
+      <pc:sldChg chg="modNotesTx">
+        <pc:chgData name="David Lienkamp0088" userId="84b9d127-8837-4ea9-8dd5-c266d6988ad7" providerId="ADAL" clId="{A619CA5E-E594-4877-815E-1FCD708D4E4D}" dt="2025-04-21T11:44:03.219" v="460" actId="20577"/>
+        <pc:sldMkLst>
+          <pc:docMk/>
+          <pc:sldMk cId="862845047" sldId="425"/>
+        </pc:sldMkLst>
+      </pc:sldChg>
+      <pc:sldChg chg="modNotesTx">
+        <pc:chgData name="David Lienkamp0088" userId="84b9d127-8837-4ea9-8dd5-c266d6988ad7" providerId="ADAL" clId="{A619CA5E-E594-4877-815E-1FCD708D4E4D}" dt="2025-04-21T11:45:45.193" v="671" actId="20577"/>
+        <pc:sldMkLst>
+          <pc:docMk/>
+          <pc:sldMk cId="168019384" sldId="436"/>
+        </pc:sldMkLst>
+      </pc:sldChg>
+      <pc:sldChg chg="modNotesTx">
+        <pc:chgData name="David Lienkamp0088" userId="84b9d127-8837-4ea9-8dd5-c266d6988ad7" providerId="ADAL" clId="{A619CA5E-E594-4877-815E-1FCD708D4E4D}" dt="2025-04-21T11:44:29.027" v="464" actId="20577"/>
+        <pc:sldMkLst>
+          <pc:docMk/>
+          <pc:sldMk cId="3349641183" sldId="437"/>
+        </pc:sldMkLst>
+      </pc:sldChg>
+      <pc:sldChg chg="modNotesTx">
+        <pc:chgData name="David Lienkamp0088" userId="84b9d127-8837-4ea9-8dd5-c266d6988ad7" providerId="ADAL" clId="{A619CA5E-E594-4877-815E-1FCD708D4E4D}" dt="2025-04-21T11:45:55.499" v="690" actId="20577"/>
+        <pc:sldMkLst>
+          <pc:docMk/>
+          <pc:sldMk cId="1563258918" sldId="438"/>
+        </pc:sldMkLst>
+      </pc:sldChg>
+      <pc:sldChg chg="modNotesTx">
+        <pc:chgData name="David Lienkamp0088" userId="84b9d127-8837-4ea9-8dd5-c266d6988ad7" providerId="ADAL" clId="{A619CA5E-E594-4877-815E-1FCD708D4E4D}" dt="2025-04-21T11:44:33.168" v="466" actId="20577"/>
+        <pc:sldMkLst>
+          <pc:docMk/>
+          <pc:sldMk cId="2771524720" sldId="439"/>
+        </pc:sldMkLst>
+      </pc:sldChg>
+      <pc:sldChg chg="modNotesTx">
+        <pc:chgData name="David Lienkamp0088" userId="84b9d127-8837-4ea9-8dd5-c266d6988ad7" providerId="ADAL" clId="{A619CA5E-E594-4877-815E-1FCD708D4E4D}" dt="2025-04-21T11:46:03.015" v="698" actId="20577"/>
+        <pc:sldMkLst>
+          <pc:docMk/>
+          <pc:sldMk cId="11417239" sldId="440"/>
+        </pc:sldMkLst>
+      </pc:sldChg>
+      <pc:sldChg chg="modNotesTx">
+        <pc:chgData name="David Lienkamp0088" userId="84b9d127-8837-4ea9-8dd5-c266d6988ad7" providerId="ADAL" clId="{A619CA5E-E594-4877-815E-1FCD708D4E4D}" dt="2025-04-21T11:44:37.039" v="468" actId="20577"/>
+        <pc:sldMkLst>
+          <pc:docMk/>
+          <pc:sldMk cId="1317131025" sldId="441"/>
+        </pc:sldMkLst>
+      </pc:sldChg>
+      <pc:sldChg chg="modNotesTx">
+        <pc:chgData name="David Lienkamp0088" userId="84b9d127-8837-4ea9-8dd5-c266d6988ad7" providerId="ADAL" clId="{A619CA5E-E594-4877-815E-1FCD708D4E4D}" dt="2025-04-21T11:45:23.906" v="641" actId="20577"/>
+        <pc:sldMkLst>
+          <pc:docMk/>
+          <pc:sldMk cId="1483355194" sldId="442"/>
+        </pc:sldMkLst>
+      </pc:sldChg>
+    </pc:docChg>
+  </pc:docChgLst>
+</pc:chgInfo>
 </file>
 
 <file path=ppt/handoutMasters/handoutMaster1.xml><?xml version="1.0" encoding="utf-8"?>
@@ -290,7 +366,7 @@
             <a:fld id="{BE2E8362-7B74-CD41-BED9-51C895E0F26E}" type="datetime1">
               <a:rPr lang="sv-SE"/>
               <a:pPr/>
-              <a:t>2025-04-16</a:t>
+              <a:t>2025-04-21</a:t>
             </a:fld>
             <a:endParaRPr lang="sv-SE"/>
           </a:p>
@@ -376,7 +452,7 @@
             <a:fld id="{6D9D900B-F64A-7D40-A107-5788E4736ED6}" type="slidenum">
               <a:rPr lang="sv-SE"/>
               <a:pPr/>
-              <a:t>‹#›</a:t>
+              <a:t>‹Nr.›</a:t>
             </a:fld>
             <a:endParaRPr lang="sv-SE"/>
           </a:p>
@@ -496,7 +572,7 @@
             <a:fld id="{42B30327-357F-3343-805F-CF1F05C4CF93}" type="datetime1">
               <a:rPr lang="sv-SE"/>
               <a:pPr/>
-              <a:t>2025-04-16</a:t>
+              <a:t>2025-04-21</a:t>
             </a:fld>
             <a:endParaRPr lang="sv-SE"/>
           </a:p>
@@ -677,7 +753,7 @@
             <a:fld id="{E2B1B8E9-9BE0-194F-B3CF-D6D0B7B1DAE8}" type="slidenum">
               <a:rPr lang="sv-SE"/>
               <a:pPr/>
-              <a:t>‹#›</a:t>
+              <a:t>‹Nr.›</a:t>
             </a:fld>
             <a:endParaRPr lang="sv-SE"/>
           </a:p>
@@ -902,6 +978,387 @@
 </p:notes>
 </file>
 
+<file path=ppt/notesSlides/notesSlide10.xml><?xml version="1.0" encoding="utf-8"?>
+<p:notes xmlns:a="http://schemas.openxmlformats.org/drawingml/2006/main" xmlns:r="http://schemas.openxmlformats.org/officeDocument/2006/relationships" xmlns:p="http://schemas.openxmlformats.org/presentationml/2006/main">
+  <p:cSld>
+    <p:spTree>
+      <p:nvGrpSpPr>
+        <p:cNvPr id="1" name="">
+          <a:extLst>
+            <a:ext uri="{FF2B5EF4-FFF2-40B4-BE49-F238E27FC236}">
+              <a16:creationId xmlns:a16="http://schemas.microsoft.com/office/drawing/2014/main" id="{60F5E7B7-5D28-5030-D7FE-E3E024832551}"/>
+            </a:ext>
+          </a:extLst>
+        </p:cNvPr>
+        <p:cNvGrpSpPr/>
+        <p:nvPr/>
+      </p:nvGrpSpPr>
+      <p:grpSpPr>
+        <a:xfrm>
+          <a:off x="0" y="0"/>
+          <a:ext cx="0" cy="0"/>
+          <a:chOff x="0" y="0"/>
+          <a:chExt cx="0" cy="0"/>
+        </a:xfrm>
+      </p:grpSpPr>
+      <p:sp>
+        <p:nvSpPr>
+          <p:cNvPr id="2" name="Platshållare för bildobjekt 1">
+            <a:extLst>
+              <a:ext uri="{FF2B5EF4-FFF2-40B4-BE49-F238E27FC236}">
+                <a16:creationId xmlns:a16="http://schemas.microsoft.com/office/drawing/2014/main" id="{14A585F4-D6A0-0135-E1B2-497CAE58907C}"/>
+              </a:ext>
+            </a:extLst>
+          </p:cNvPr>
+          <p:cNvSpPr>
+            <a:spLocks noGrp="1" noRot="1" noChangeAspect="1"/>
+          </p:cNvSpPr>
+          <p:nvPr>
+            <p:ph type="sldImg"/>
+          </p:nvPr>
+        </p:nvSpPr>
+        <p:spPr/>
+      </p:sp>
+      <p:sp>
+        <p:nvSpPr>
+          <p:cNvPr id="3" name="Platshållare för anteckningar 2">
+            <a:extLst>
+              <a:ext uri="{FF2B5EF4-FFF2-40B4-BE49-F238E27FC236}">
+                <a16:creationId xmlns:a16="http://schemas.microsoft.com/office/drawing/2014/main" id="{8C4421F4-6E0F-3996-A765-32D1957F3333}"/>
+              </a:ext>
+            </a:extLst>
+          </p:cNvPr>
+          <p:cNvSpPr>
+            <a:spLocks noGrp="1"/>
+          </p:cNvSpPr>
+          <p:nvPr>
+            <p:ph type="body" idx="1"/>
+          </p:nvPr>
+        </p:nvSpPr>
+        <p:spPr/>
+        <p:txBody>
+          <a:bodyPr/>
+          <a:lstStyle/>
+          <a:p>
+            <a:pPr marL="0" marR="0" lvl="0" indent="0" algn="l" defTabSz="457200" rtl="0" eaLnBrk="0" fontAlgn="base" latinLnBrk="0" hangingPunct="0">
+              <a:lnSpc>
+                <a:spcPct val="100000"/>
+              </a:lnSpc>
+              <a:spcBef>
+                <a:spcPct val="30000"/>
+              </a:spcBef>
+              <a:spcAft>
+                <a:spcPct val="0"/>
+              </a:spcAft>
+              <a:buClrTx/>
+              <a:buSzTx/>
+              <a:buFontTx/>
+              <a:buNone/>
+              <a:tabLst/>
+              <a:defRPr/>
+            </a:pPr>
+            <a:r>
+              <a:rPr lang="en-US" dirty="0">
+                <a:ea typeface="Calibri"/>
+                <a:cs typeface="Calibri"/>
+              </a:rPr>
+              <a:t>This slide provides further information on the used values and shows different parameters displaying the quality of the model and its ability to predict.</a:t>
+            </a:r>
+          </a:p>
+        </p:txBody>
+      </p:sp>
+      <p:sp>
+        <p:nvSpPr>
+          <p:cNvPr id="4" name="Platshållare för bildnummer 3">
+            <a:extLst>
+              <a:ext uri="{FF2B5EF4-FFF2-40B4-BE49-F238E27FC236}">
+                <a16:creationId xmlns:a16="http://schemas.microsoft.com/office/drawing/2014/main" id="{411B4FDB-8D5F-33CC-F641-54148EA995A5}"/>
+              </a:ext>
+            </a:extLst>
+          </p:cNvPr>
+          <p:cNvSpPr>
+            <a:spLocks noGrp="1"/>
+          </p:cNvSpPr>
+          <p:nvPr>
+            <p:ph type="sldNum" sz="quarter" idx="5"/>
+          </p:nvPr>
+        </p:nvSpPr>
+        <p:spPr/>
+        <p:txBody>
+          <a:bodyPr/>
+          <a:lstStyle/>
+          <a:p>
+            <a:fld id="{E2B1B8E9-9BE0-194F-B3CF-D6D0B7B1DAE8}" type="slidenum">
+              <a:rPr lang="sv-SE"/>
+              <a:pPr/>
+              <a:t>10</a:t>
+            </a:fld>
+            <a:endParaRPr lang="sv-SE"/>
+          </a:p>
+        </p:txBody>
+      </p:sp>
+    </p:spTree>
+    <p:extLst>
+      <p:ext uri="{BB962C8B-B14F-4D97-AF65-F5344CB8AC3E}">
+        <p14:creationId xmlns:p14="http://schemas.microsoft.com/office/powerpoint/2010/main" val="2699443482"/>
+      </p:ext>
+    </p:extLst>
+  </p:cSld>
+  <p:clrMapOvr>
+    <a:masterClrMapping/>
+  </p:clrMapOvr>
+</p:notes>
+</file>
+
+<file path=ppt/notesSlides/notesSlide11.xml><?xml version="1.0" encoding="utf-8"?>
+<p:notes xmlns:a="http://schemas.openxmlformats.org/drawingml/2006/main" xmlns:r="http://schemas.openxmlformats.org/officeDocument/2006/relationships" xmlns:p="http://schemas.openxmlformats.org/presentationml/2006/main">
+  <p:cSld>
+    <p:spTree>
+      <p:nvGrpSpPr>
+        <p:cNvPr id="1" name=""/>
+        <p:cNvGrpSpPr/>
+        <p:nvPr/>
+      </p:nvGrpSpPr>
+      <p:grpSpPr>
+        <a:xfrm>
+          <a:off x="0" y="0"/>
+          <a:ext cx="0" cy="0"/>
+          <a:chOff x="0" y="0"/>
+          <a:chExt cx="0" cy="0"/>
+        </a:xfrm>
+      </p:grpSpPr>
+      <p:sp>
+        <p:nvSpPr>
+          <p:cNvPr id="2" name="Folienbildplatzhalter 1"/>
+          <p:cNvSpPr>
+            <a:spLocks noGrp="1" noRot="1" noChangeAspect="1"/>
+          </p:cNvSpPr>
+          <p:nvPr>
+            <p:ph type="sldImg"/>
+          </p:nvPr>
+        </p:nvSpPr>
+        <p:spPr/>
+      </p:sp>
+      <p:sp>
+        <p:nvSpPr>
+          <p:cNvPr id="3" name="Notizenplatzhalter 2"/>
+          <p:cNvSpPr>
+            <a:spLocks noGrp="1"/>
+          </p:cNvSpPr>
+          <p:nvPr>
+            <p:ph type="body" idx="1"/>
+          </p:nvPr>
+        </p:nvSpPr>
+        <p:spPr/>
+        <p:txBody>
+          <a:bodyPr/>
+          <a:lstStyle/>
+          <a:p>
+            <a:r>
+              <a:rPr lang="de-DE" dirty="0"/>
+              <a:t>This final </a:t>
+            </a:r>
+            <a:r>
+              <a:rPr lang="de-DE" dirty="0" err="1"/>
+              <a:t>slide</a:t>
+            </a:r>
+            <a:r>
+              <a:rPr lang="de-DE" dirty="0"/>
+              <a:t> </a:t>
+            </a:r>
+            <a:r>
+              <a:rPr lang="de-DE" dirty="0" err="1"/>
+              <a:t>contains</a:t>
+            </a:r>
+            <a:r>
+              <a:rPr lang="de-DE" dirty="0"/>
+              <a:t> </a:t>
+            </a:r>
+            <a:r>
+              <a:rPr lang="de-DE" dirty="0" err="1"/>
+              <a:t>the</a:t>
+            </a:r>
+            <a:r>
+              <a:rPr lang="de-DE" dirty="0"/>
+              <a:t> </a:t>
+            </a:r>
+            <a:r>
+              <a:rPr lang="de-DE" dirty="0" err="1"/>
+              <a:t>predicted</a:t>
+            </a:r>
+            <a:r>
+              <a:rPr lang="de-DE" dirty="0"/>
+              <a:t> </a:t>
+            </a:r>
+            <a:r>
+              <a:rPr lang="de-DE" dirty="0" err="1"/>
+              <a:t>values</a:t>
+            </a:r>
+            <a:r>
+              <a:rPr lang="de-DE" dirty="0"/>
+              <a:t> </a:t>
+            </a:r>
+            <a:r>
+              <a:rPr lang="de-DE" dirty="0" err="1"/>
+              <a:t>for</a:t>
+            </a:r>
+            <a:r>
+              <a:rPr lang="de-DE" dirty="0"/>
+              <a:t> </a:t>
+            </a:r>
+            <a:r>
+              <a:rPr lang="de-DE" dirty="0" err="1"/>
+              <a:t>the</a:t>
+            </a:r>
+            <a:r>
+              <a:rPr lang="de-DE" dirty="0"/>
+              <a:t> </a:t>
+            </a:r>
+            <a:r>
+              <a:rPr lang="de-DE" dirty="0" err="1"/>
+              <a:t>five</a:t>
+            </a:r>
+            <a:r>
+              <a:rPr lang="de-DE" dirty="0"/>
+              <a:t> </a:t>
+            </a:r>
+            <a:r>
+              <a:rPr lang="de-DE" dirty="0" err="1"/>
+              <a:t>unknown</a:t>
+            </a:r>
+            <a:r>
+              <a:rPr lang="de-DE" dirty="0"/>
+              <a:t> </a:t>
+            </a:r>
+            <a:r>
+              <a:rPr lang="de-DE" dirty="0" err="1"/>
+              <a:t>cars</a:t>
+            </a:r>
+            <a:r>
+              <a:rPr lang="de-DE" dirty="0"/>
+              <a:t>, </a:t>
+            </a:r>
+            <a:r>
+              <a:rPr lang="de-DE" dirty="0" err="1"/>
+              <a:t>resulting</a:t>
+            </a:r>
+            <a:r>
+              <a:rPr lang="de-DE" dirty="0"/>
+              <a:t> </a:t>
+            </a:r>
+            <a:r>
+              <a:rPr lang="de-DE" dirty="0" err="1"/>
+              <a:t>from</a:t>
+            </a:r>
+            <a:r>
+              <a:rPr lang="de-DE" dirty="0"/>
+              <a:t> </a:t>
+            </a:r>
+            <a:r>
+              <a:rPr lang="de-DE" dirty="0" err="1"/>
+              <a:t>the</a:t>
+            </a:r>
+            <a:r>
+              <a:rPr lang="de-DE" dirty="0"/>
+              <a:t> </a:t>
+            </a:r>
+            <a:r>
+              <a:rPr lang="de-DE" dirty="0" err="1"/>
+              <a:t>application</a:t>
+            </a:r>
+            <a:r>
+              <a:rPr lang="de-DE" dirty="0"/>
+              <a:t> </a:t>
+            </a:r>
+            <a:r>
+              <a:rPr lang="de-DE" dirty="0" err="1"/>
+              <a:t>of</a:t>
+            </a:r>
+            <a:r>
+              <a:rPr lang="de-DE" dirty="0"/>
+              <a:t> </a:t>
+            </a:r>
+            <a:r>
+              <a:rPr lang="de-DE" dirty="0" err="1"/>
+              <a:t>our</a:t>
+            </a:r>
+            <a:r>
+              <a:rPr lang="de-DE" dirty="0"/>
+              <a:t> </a:t>
+            </a:r>
+            <a:r>
+              <a:rPr lang="de-DE" dirty="0" err="1"/>
+              <a:t>previously</a:t>
+            </a:r>
+            <a:r>
+              <a:rPr lang="de-DE" dirty="0"/>
+              <a:t> </a:t>
+            </a:r>
+            <a:r>
+              <a:rPr lang="de-DE" dirty="0" err="1"/>
+              <a:t>explained</a:t>
+            </a:r>
+            <a:r>
+              <a:rPr lang="de-DE" dirty="0"/>
+              <a:t> </a:t>
+            </a:r>
+            <a:r>
+              <a:rPr lang="de-DE" dirty="0" err="1"/>
+              <a:t>regression</a:t>
+            </a:r>
+            <a:r>
+              <a:rPr lang="de-DE" dirty="0"/>
+              <a:t> </a:t>
+            </a:r>
+            <a:r>
+              <a:rPr lang="de-DE" dirty="0" err="1"/>
+              <a:t>models</a:t>
+            </a:r>
+            <a:r>
+              <a:rPr lang="de-DE" dirty="0"/>
+              <a:t>.</a:t>
+            </a:r>
+            <a:endParaRPr lang="en-GB" dirty="0"/>
+          </a:p>
+        </p:txBody>
+      </p:sp>
+      <p:sp>
+        <p:nvSpPr>
+          <p:cNvPr id="4" name="Foliennummernplatzhalter 3"/>
+          <p:cNvSpPr>
+            <a:spLocks noGrp="1"/>
+          </p:cNvSpPr>
+          <p:nvPr>
+            <p:ph type="sldNum" sz="quarter" idx="5"/>
+          </p:nvPr>
+        </p:nvSpPr>
+        <p:spPr/>
+        <p:txBody>
+          <a:bodyPr/>
+          <a:lstStyle/>
+          <a:p>
+            <a:fld id="{E2B1B8E9-9BE0-194F-B3CF-D6D0B7B1DAE8}" type="slidenum">
+              <a:rPr lang="sv-SE" smtClean="0"/>
+              <a:pPr/>
+              <a:t>11</a:t>
+            </a:fld>
+            <a:endParaRPr lang="sv-SE"/>
+          </a:p>
+        </p:txBody>
+      </p:sp>
+    </p:spTree>
+    <p:extLst>
+      <p:ext uri="{BB962C8B-B14F-4D97-AF65-F5344CB8AC3E}">
+        <p14:creationId xmlns:p14="http://schemas.microsoft.com/office/powerpoint/2010/main" val="2550731484"/>
+      </p:ext>
+    </p:extLst>
+  </p:cSld>
+  <p:clrMapOvr>
+    <a:masterClrMapping/>
+  </p:clrMapOvr>
+</p:notes>
+</file>
+
 <file path=ppt/notesSlides/notesSlide2.xml><?xml version="1.0" encoding="utf-8"?>
 <p:notes xmlns:a="http://schemas.openxmlformats.org/drawingml/2006/main" xmlns:r="http://schemas.openxmlformats.org/officeDocument/2006/relationships" xmlns:p="http://schemas.openxmlformats.org/presentationml/2006/main">
   <p:cSld>
@@ -921,7 +1378,7 @@
       </p:grpSpPr>
       <p:sp>
         <p:nvSpPr>
-          <p:cNvPr id="2" name="Platshållare för bildobjekt 1"/>
+          <p:cNvPr id="2" name="Folienbildplatzhalter 1"/>
           <p:cNvSpPr>
             <a:spLocks noGrp="1" noRot="1" noChangeAspect="1"/>
           </p:cNvSpPr>
@@ -933,7 +1390,7 @@
       </p:sp>
       <p:sp>
         <p:nvSpPr>
-          <p:cNvPr id="3" name="Platshållare för anteckningar 2"/>
+          <p:cNvPr id="3" name="Notizenplatzhalter 2"/>
           <p:cNvSpPr>
             <a:spLocks noGrp="1"/>
           </p:cNvSpPr>
@@ -947,18 +1404,248 @@
           <a:lstStyle/>
           <a:p>
             <a:r>
-              <a:rPr lang="en-US" dirty="0">
-                <a:ea typeface="Calibri"/>
-                <a:cs typeface="Calibri"/>
-              </a:rPr>
-              <a:t>The bar chart shows a comparison of the median tank volume between conventional and hybrid electric cars. Conclusion: Hybrid electric cars tend to have a slightly larger median tank volume than conventional cars.</a:t>
-            </a:r>
+              <a:rPr lang="de-DE" dirty="0"/>
+              <a:t>This </a:t>
+            </a:r>
+            <a:r>
+              <a:rPr lang="de-DE" dirty="0" err="1"/>
+              <a:t>table</a:t>
+            </a:r>
+            <a:r>
+              <a:rPr lang="de-DE" dirty="0"/>
+              <a:t> </a:t>
+            </a:r>
+            <a:r>
+              <a:rPr lang="de-DE" dirty="0" err="1"/>
+              <a:t>shows</a:t>
+            </a:r>
+            <a:r>
+              <a:rPr lang="de-DE" dirty="0"/>
+              <a:t> </a:t>
+            </a:r>
+            <a:r>
+              <a:rPr lang="de-DE" dirty="0" err="1"/>
+              <a:t>the</a:t>
+            </a:r>
+            <a:r>
+              <a:rPr lang="de-DE" dirty="0"/>
+              <a:t> relevant </a:t>
+            </a:r>
+            <a:r>
+              <a:rPr lang="de-DE" dirty="0" err="1"/>
+              <a:t>parameters</a:t>
+            </a:r>
+            <a:r>
+              <a:rPr lang="de-DE" dirty="0"/>
+              <a:t> </a:t>
+            </a:r>
+            <a:r>
+              <a:rPr lang="de-DE" dirty="0" err="1"/>
+              <a:t>for</a:t>
+            </a:r>
+            <a:r>
+              <a:rPr lang="de-DE" dirty="0"/>
+              <a:t> </a:t>
+            </a:r>
+            <a:r>
+              <a:rPr lang="de-DE" dirty="0" err="1"/>
+              <a:t>the</a:t>
+            </a:r>
+            <a:r>
+              <a:rPr lang="de-DE" dirty="0"/>
+              <a:t> </a:t>
+            </a:r>
+            <a:r>
+              <a:rPr lang="de-DE" dirty="0" err="1"/>
+              <a:t>regression</a:t>
+            </a:r>
+            <a:r>
+              <a:rPr lang="de-DE" dirty="0"/>
+              <a:t> </a:t>
+            </a:r>
+            <a:r>
+              <a:rPr lang="de-DE" dirty="0" err="1"/>
+              <a:t>analysis</a:t>
+            </a:r>
+            <a:r>
+              <a:rPr lang="de-DE" dirty="0"/>
+              <a:t> </a:t>
+            </a:r>
+            <a:r>
+              <a:rPr lang="de-DE" dirty="0" err="1"/>
+              <a:t>of</a:t>
+            </a:r>
+            <a:r>
+              <a:rPr lang="de-DE" dirty="0"/>
+              <a:t> </a:t>
+            </a:r>
+            <a:r>
+              <a:rPr lang="de-DE" dirty="0" err="1"/>
+              <a:t>the</a:t>
+            </a:r>
+            <a:r>
+              <a:rPr lang="de-DE" dirty="0"/>
+              <a:t> </a:t>
+            </a:r>
+            <a:r>
+              <a:rPr lang="de-DE" dirty="0" err="1"/>
+              <a:t>missing</a:t>
+            </a:r>
+            <a:r>
+              <a:rPr lang="de-DE" dirty="0"/>
+              <a:t> </a:t>
+            </a:r>
+            <a:r>
+              <a:rPr lang="de-DE" dirty="0" err="1"/>
+              <a:t>values</a:t>
+            </a:r>
+            <a:r>
+              <a:rPr lang="de-DE" dirty="0"/>
+              <a:t> (i.e. </a:t>
+            </a:r>
+            <a:r>
+              <a:rPr lang="de-DE" dirty="0" err="1"/>
+              <a:t>acceleration</a:t>
+            </a:r>
+            <a:r>
+              <a:rPr lang="de-DE" dirty="0"/>
+              <a:t>, top </a:t>
+            </a:r>
+            <a:r>
+              <a:rPr lang="de-DE" dirty="0" err="1"/>
+              <a:t>speed</a:t>
+            </a:r>
+            <a:r>
+              <a:rPr lang="de-DE" dirty="0"/>
+              <a:t>, </a:t>
+            </a:r>
+            <a:r>
+              <a:rPr lang="de-DE" dirty="0" err="1"/>
+              <a:t>fuel</a:t>
+            </a:r>
+            <a:r>
+              <a:rPr lang="de-DE" dirty="0"/>
+              <a:t> </a:t>
+            </a:r>
+            <a:r>
+              <a:rPr lang="de-DE" dirty="0" err="1"/>
+              <a:t>consumption</a:t>
+            </a:r>
+            <a:r>
+              <a:rPr lang="de-DE" dirty="0"/>
+              <a:t> and </a:t>
+            </a:r>
+            <a:r>
+              <a:rPr lang="de-DE" dirty="0" err="1"/>
+              <a:t>price</a:t>
+            </a:r>
+            <a:r>
+              <a:rPr lang="de-DE" dirty="0"/>
+              <a:t>). The </a:t>
+            </a:r>
+            <a:r>
+              <a:rPr lang="de-DE" dirty="0" err="1"/>
+              <a:t>parameters</a:t>
+            </a:r>
+            <a:r>
+              <a:rPr lang="de-DE" dirty="0"/>
+              <a:t> </a:t>
+            </a:r>
+            <a:r>
+              <a:rPr lang="de-DE" dirty="0" err="1"/>
+              <a:t>valves</a:t>
+            </a:r>
+            <a:r>
+              <a:rPr lang="de-DE" dirty="0"/>
+              <a:t>/</a:t>
+            </a:r>
+            <a:r>
+              <a:rPr lang="de-DE" dirty="0" err="1"/>
+              <a:t>cylinder</a:t>
+            </a:r>
+            <a:r>
+              <a:rPr lang="de-DE" dirty="0"/>
+              <a:t>, </a:t>
+            </a:r>
+            <a:r>
+              <a:rPr lang="de-DE" dirty="0" err="1"/>
+              <a:t>max</a:t>
+            </a:r>
+            <a:r>
+              <a:rPr lang="de-DE" dirty="0"/>
+              <a:t> </a:t>
+            </a:r>
+            <a:r>
+              <a:rPr lang="de-DE" dirty="0" err="1"/>
+              <a:t>torque</a:t>
+            </a:r>
+            <a:r>
+              <a:rPr lang="de-DE" dirty="0"/>
+              <a:t> and </a:t>
+            </a:r>
+            <a:r>
+              <a:rPr lang="de-DE" dirty="0" err="1"/>
+              <a:t>width</a:t>
+            </a:r>
+            <a:r>
+              <a:rPr lang="de-DE" dirty="0"/>
+              <a:t> </a:t>
+            </a:r>
+            <a:r>
+              <a:rPr lang="de-DE" dirty="0" err="1"/>
+              <a:t>were</a:t>
+            </a:r>
+            <a:r>
+              <a:rPr lang="de-DE" dirty="0"/>
+              <a:t> not </a:t>
+            </a:r>
+            <a:r>
+              <a:rPr lang="de-DE" dirty="0" err="1"/>
+              <a:t>used</a:t>
+            </a:r>
+            <a:r>
+              <a:rPr lang="de-DE" dirty="0"/>
+              <a:t> </a:t>
+            </a:r>
+            <a:r>
+              <a:rPr lang="de-DE" dirty="0" err="1"/>
+              <a:t>for</a:t>
+            </a:r>
+            <a:r>
+              <a:rPr lang="de-DE" dirty="0"/>
+              <a:t> </a:t>
+            </a:r>
+            <a:r>
+              <a:rPr lang="de-DE" dirty="0" err="1"/>
+              <a:t>the</a:t>
+            </a:r>
+            <a:r>
+              <a:rPr lang="de-DE" dirty="0"/>
+              <a:t> </a:t>
+            </a:r>
+            <a:r>
+              <a:rPr lang="de-DE" dirty="0" err="1"/>
+              <a:t>regression</a:t>
+            </a:r>
+            <a:r>
+              <a:rPr lang="de-DE" dirty="0"/>
+              <a:t> </a:t>
+            </a:r>
+            <a:r>
+              <a:rPr lang="de-DE" dirty="0" err="1"/>
+              <a:t>models</a:t>
+            </a:r>
+            <a:r>
+              <a:rPr lang="de-DE" dirty="0"/>
+              <a:t>.</a:t>
+            </a:r>
+            <a:endParaRPr lang="en-GB" dirty="0"/>
           </a:p>
         </p:txBody>
       </p:sp>
       <p:sp>
         <p:nvSpPr>
-          <p:cNvPr id="4" name="Platshållare för bildnummer 3"/>
+          <p:cNvPr id="4" name="Foliennummernplatzhalter 3"/>
           <p:cNvSpPr>
             <a:spLocks noGrp="1"/>
           </p:cNvSpPr>
@@ -972,9 +1659,9 @@
           <a:lstStyle/>
           <a:p>
             <a:fld id="{E2B1B8E9-9BE0-194F-B3CF-D6D0B7B1DAE8}" type="slidenum">
-              <a:rPr lang="sv-SE"/>
+              <a:rPr lang="sv-SE" smtClean="0"/>
               <a:pPr/>
-              <a:t>3</a:t>
+              <a:t>2</a:t>
             </a:fld>
             <a:endParaRPr lang="sv-SE"/>
           </a:p>
@@ -983,7 +1670,7 @@
     </p:spTree>
     <p:extLst>
       <p:ext uri="{BB962C8B-B14F-4D97-AF65-F5344CB8AC3E}">
-        <p14:creationId xmlns:p14="http://schemas.microsoft.com/office/powerpoint/2010/main" val="703507916"/>
+        <p14:creationId xmlns:p14="http://schemas.microsoft.com/office/powerpoint/2010/main" val="1436368593"/>
       </p:ext>
     </p:extLst>
   </p:cSld>
@@ -1042,7 +1729,98 @@
                 <a:ea typeface="Calibri"/>
                 <a:cs typeface="Calibri"/>
               </a:rPr>
-              <a:t>The histogram shows the distribution of the length between conventional and electric cars. Conclusion: Electric cars tend to be longer than conventional cars, with their lengths more consistently clustered around a higher average.</a:t>
+              <a:t>This slide shows the final model equation for the acceleration. The bar charts underline the impact of the used parameters on the accuracy of the model.</a:t>
+            </a:r>
+          </a:p>
+        </p:txBody>
+      </p:sp>
+      <p:sp>
+        <p:nvSpPr>
+          <p:cNvPr id="4" name="Platshållare för bildnummer 3"/>
+          <p:cNvSpPr>
+            <a:spLocks noGrp="1"/>
+          </p:cNvSpPr>
+          <p:nvPr>
+            <p:ph type="sldNum" sz="quarter" idx="5"/>
+          </p:nvPr>
+        </p:nvSpPr>
+        <p:spPr/>
+        <p:txBody>
+          <a:bodyPr/>
+          <a:lstStyle/>
+          <a:p>
+            <a:fld id="{E2B1B8E9-9BE0-194F-B3CF-D6D0B7B1DAE8}" type="slidenum">
+              <a:rPr lang="sv-SE"/>
+              <a:pPr/>
+              <a:t>3</a:t>
+            </a:fld>
+            <a:endParaRPr lang="sv-SE"/>
+          </a:p>
+        </p:txBody>
+      </p:sp>
+    </p:spTree>
+    <p:extLst>
+      <p:ext uri="{BB962C8B-B14F-4D97-AF65-F5344CB8AC3E}">
+        <p14:creationId xmlns:p14="http://schemas.microsoft.com/office/powerpoint/2010/main" val="703507916"/>
+      </p:ext>
+    </p:extLst>
+  </p:cSld>
+  <p:clrMapOvr>
+    <a:masterClrMapping/>
+  </p:clrMapOvr>
+</p:notes>
+</file>
+
+<file path=ppt/notesSlides/notesSlide4.xml><?xml version="1.0" encoding="utf-8"?>
+<p:notes xmlns:a="http://schemas.openxmlformats.org/drawingml/2006/main" xmlns:r="http://schemas.openxmlformats.org/officeDocument/2006/relationships" xmlns:p="http://schemas.openxmlformats.org/presentationml/2006/main">
+  <p:cSld>
+    <p:spTree>
+      <p:nvGrpSpPr>
+        <p:cNvPr id="1" name=""/>
+        <p:cNvGrpSpPr/>
+        <p:nvPr/>
+      </p:nvGrpSpPr>
+      <p:grpSpPr>
+        <a:xfrm>
+          <a:off x="0" y="0"/>
+          <a:ext cx="0" cy="0"/>
+          <a:chOff x="0" y="0"/>
+          <a:chExt cx="0" cy="0"/>
+        </a:xfrm>
+      </p:grpSpPr>
+      <p:sp>
+        <p:nvSpPr>
+          <p:cNvPr id="2" name="Platshållare för bildobjekt 1"/>
+          <p:cNvSpPr>
+            <a:spLocks noGrp="1" noRot="1" noChangeAspect="1"/>
+          </p:cNvSpPr>
+          <p:nvPr>
+            <p:ph type="sldImg"/>
+          </p:nvPr>
+        </p:nvSpPr>
+        <p:spPr/>
+      </p:sp>
+      <p:sp>
+        <p:nvSpPr>
+          <p:cNvPr id="3" name="Platshållare för anteckningar 2"/>
+          <p:cNvSpPr>
+            <a:spLocks noGrp="1"/>
+          </p:cNvSpPr>
+          <p:nvPr>
+            <p:ph type="body" idx="1"/>
+          </p:nvPr>
+        </p:nvSpPr>
+        <p:spPr/>
+        <p:txBody>
+          <a:bodyPr/>
+          <a:lstStyle/>
+          <a:p>
+            <a:r>
+              <a:rPr lang="en-US" dirty="0">
+                <a:ea typeface="Calibri"/>
+                <a:cs typeface="Calibri"/>
+              </a:rPr>
+              <a:t>This slide provides further information on the used values and shows different parameters displaying the quality of the model and its ability to predict.</a:t>
             </a:r>
           </a:p>
         </p:txBody>
@@ -1084,7 +1862,7 @@
 </p:notes>
 </file>
 
-<file path=ppt/notesSlides/notesSlide4.xml><?xml version="1.0" encoding="utf-8"?>
+<file path=ppt/notesSlides/notesSlide5.xml><?xml version="1.0" encoding="utf-8"?>
 <p:notes xmlns:a="http://schemas.openxmlformats.org/drawingml/2006/main" xmlns:r="http://schemas.openxmlformats.org/officeDocument/2006/relationships" xmlns:p="http://schemas.openxmlformats.org/presentationml/2006/main">
   <p:cSld>
     <p:spTree>
@@ -1146,13 +1924,36 @@
           <a:bodyPr/>
           <a:lstStyle/>
           <a:p>
+            <a:pPr marL="0" marR="0" lvl="0" indent="0" algn="l" defTabSz="457200" rtl="0" eaLnBrk="0" fontAlgn="base" latinLnBrk="0" hangingPunct="0">
+              <a:lnSpc>
+                <a:spcPct val="100000"/>
+              </a:lnSpc>
+              <a:spcBef>
+                <a:spcPct val="30000"/>
+              </a:spcBef>
+              <a:spcAft>
+                <a:spcPct val="0"/>
+              </a:spcAft>
+              <a:buClrTx/>
+              <a:buSzTx/>
+              <a:buFontTx/>
+              <a:buNone/>
+              <a:tabLst/>
+              <a:defRPr/>
+            </a:pPr>
             <a:r>
               <a:rPr lang="en-US" dirty="0">
                 <a:ea typeface="Calibri"/>
                 <a:cs typeface="Calibri"/>
               </a:rPr>
-              <a:t>The bar chart shows a comparison of the median tank volume between conventional and hybrid electric cars. Conclusion: Hybrid electric cars tend to have a slightly larger median tank volume than conventional cars.</a:t>
-            </a:r>
+              <a:t>This slide shows the final model equation for the maximum speed. The bar charts underline the impact of the used parameters on the accuracy of the model.</a:t>
+            </a:r>
+          </a:p>
+          <a:p>
+            <a:endParaRPr lang="en-US" dirty="0">
+              <a:ea typeface="Calibri"/>
+              <a:cs typeface="Calibri"/>
+            </a:endParaRPr>
           </a:p>
         </p:txBody>
       </p:sp>
@@ -1199,7 +2000,7 @@
 </p:notes>
 </file>
 
-<file path=ppt/notesSlides/notesSlide5.xml><?xml version="1.0" encoding="utf-8"?>
+<file path=ppt/notesSlides/notesSlide6.xml><?xml version="1.0" encoding="utf-8"?>
 <p:notes xmlns:a="http://schemas.openxmlformats.org/drawingml/2006/main" xmlns:r="http://schemas.openxmlformats.org/officeDocument/2006/relationships" xmlns:p="http://schemas.openxmlformats.org/presentationml/2006/main">
   <p:cSld>
     <p:spTree>
@@ -1261,12 +2062,29 @@
           <a:bodyPr/>
           <a:lstStyle/>
           <a:p>
+            <a:pPr marL="0" marR="0" lvl="0" indent="0" algn="l" defTabSz="457200" rtl="0" eaLnBrk="0" fontAlgn="base" latinLnBrk="0" hangingPunct="0">
+              <a:lnSpc>
+                <a:spcPct val="100000"/>
+              </a:lnSpc>
+              <a:spcBef>
+                <a:spcPct val="30000"/>
+              </a:spcBef>
+              <a:spcAft>
+                <a:spcPct val="0"/>
+              </a:spcAft>
+              <a:buClrTx/>
+              <a:buSzTx/>
+              <a:buFontTx/>
+              <a:buNone/>
+              <a:tabLst/>
+              <a:defRPr/>
+            </a:pPr>
             <a:r>
               <a:rPr lang="en-US" dirty="0">
                 <a:ea typeface="Calibri"/>
                 <a:cs typeface="Calibri"/>
               </a:rPr>
-              <a:t>The histogram shows the distribution of the length between conventional and electric cars. Conclusion: Electric cars tend to be longer than conventional cars, with their lengths more consistently clustered around a higher average.</a:t>
+              <a:t>This slide provides further information on the used values and shows different parameters displaying the quality of the model and its ability to predict.</a:t>
             </a:r>
           </a:p>
         </p:txBody>
@@ -1314,7 +2132,7 @@
 </p:notes>
 </file>
 
-<file path=ppt/notesSlides/notesSlide6.xml><?xml version="1.0" encoding="utf-8"?>
+<file path=ppt/notesSlides/notesSlide7.xml><?xml version="1.0" encoding="utf-8"?>
 <p:notes xmlns:a="http://schemas.openxmlformats.org/drawingml/2006/main" xmlns:r="http://schemas.openxmlformats.org/officeDocument/2006/relationships" xmlns:p="http://schemas.openxmlformats.org/presentationml/2006/main">
   <p:cSld>
     <p:spTree>
@@ -1376,13 +2194,36 @@
           <a:bodyPr/>
           <a:lstStyle/>
           <a:p>
+            <a:pPr marL="0" marR="0" lvl="0" indent="0" algn="l" defTabSz="457200" rtl="0" eaLnBrk="0" fontAlgn="base" latinLnBrk="0" hangingPunct="0">
+              <a:lnSpc>
+                <a:spcPct val="100000"/>
+              </a:lnSpc>
+              <a:spcBef>
+                <a:spcPct val="30000"/>
+              </a:spcBef>
+              <a:spcAft>
+                <a:spcPct val="0"/>
+              </a:spcAft>
+              <a:buClrTx/>
+              <a:buSzTx/>
+              <a:buFontTx/>
+              <a:buNone/>
+              <a:tabLst/>
+              <a:defRPr/>
+            </a:pPr>
             <a:r>
               <a:rPr lang="en-US" dirty="0">
                 <a:ea typeface="Calibri"/>
                 <a:cs typeface="Calibri"/>
               </a:rPr>
-              <a:t>The bar chart shows a comparison of the median tank volume between conventional and hybrid electric cars. Conclusion: Hybrid electric cars tend to have a slightly larger median tank volume than conventional cars.</a:t>
-            </a:r>
+              <a:t>This slide shows the final model equation for the fuel consumption. The bar charts underline the impact of the used parameters on the accuracy of the model.</a:t>
+            </a:r>
+          </a:p>
+          <a:p>
+            <a:endParaRPr lang="en-US" dirty="0">
+              <a:ea typeface="Calibri"/>
+              <a:cs typeface="Calibri"/>
+            </a:endParaRPr>
           </a:p>
         </p:txBody>
       </p:sp>
@@ -1429,7 +2270,7 @@
 </p:notes>
 </file>
 
-<file path=ppt/notesSlides/notesSlide7.xml><?xml version="1.0" encoding="utf-8"?>
+<file path=ppt/notesSlides/notesSlide8.xml><?xml version="1.0" encoding="utf-8"?>
 <p:notes xmlns:a="http://schemas.openxmlformats.org/drawingml/2006/main" xmlns:r="http://schemas.openxmlformats.org/officeDocument/2006/relationships" xmlns:p="http://schemas.openxmlformats.org/presentationml/2006/main">
   <p:cSld>
     <p:spTree>
@@ -1491,12 +2332,29 @@
           <a:bodyPr/>
           <a:lstStyle/>
           <a:p>
+            <a:pPr marL="0" marR="0" lvl="0" indent="0" algn="l" defTabSz="457200" rtl="0" eaLnBrk="0" fontAlgn="base" latinLnBrk="0" hangingPunct="0">
+              <a:lnSpc>
+                <a:spcPct val="100000"/>
+              </a:lnSpc>
+              <a:spcBef>
+                <a:spcPct val="30000"/>
+              </a:spcBef>
+              <a:spcAft>
+                <a:spcPct val="0"/>
+              </a:spcAft>
+              <a:buClrTx/>
+              <a:buSzTx/>
+              <a:buFontTx/>
+              <a:buNone/>
+              <a:tabLst/>
+              <a:defRPr/>
+            </a:pPr>
             <a:r>
               <a:rPr lang="en-US" dirty="0">
                 <a:ea typeface="Calibri"/>
                 <a:cs typeface="Calibri"/>
               </a:rPr>
-              <a:t>The histogram shows the distribution of the length between conventional and electric cars. Conclusion: Electric cars tend to be longer than conventional cars, with their lengths more consistently clustered around a higher average.</a:t>
+              <a:t>This slide provides further information on the used values and shows different parameters displaying the quality of the model and its ability to predict.</a:t>
             </a:r>
           </a:p>
         </p:txBody>
@@ -1544,7 +2402,7 @@
 </p:notes>
 </file>
 
-<file path=ppt/notesSlides/notesSlide8.xml><?xml version="1.0" encoding="utf-8"?>
+<file path=ppt/notesSlides/notesSlide9.xml><?xml version="1.0" encoding="utf-8"?>
 <p:notes xmlns:a="http://schemas.openxmlformats.org/drawingml/2006/main" xmlns:r="http://schemas.openxmlformats.org/officeDocument/2006/relationships" xmlns:p="http://schemas.openxmlformats.org/presentationml/2006/main">
   <p:cSld>
     <p:spTree>
@@ -1606,13 +2464,36 @@
           <a:bodyPr/>
           <a:lstStyle/>
           <a:p>
+            <a:pPr marL="0" marR="0" lvl="0" indent="0" algn="l" defTabSz="457200" rtl="0" eaLnBrk="0" fontAlgn="base" latinLnBrk="0" hangingPunct="0">
+              <a:lnSpc>
+                <a:spcPct val="100000"/>
+              </a:lnSpc>
+              <a:spcBef>
+                <a:spcPct val="30000"/>
+              </a:spcBef>
+              <a:spcAft>
+                <a:spcPct val="0"/>
+              </a:spcAft>
+              <a:buClrTx/>
+              <a:buSzTx/>
+              <a:buFontTx/>
+              <a:buNone/>
+              <a:tabLst/>
+              <a:defRPr/>
+            </a:pPr>
             <a:r>
               <a:rPr lang="en-US" dirty="0">
                 <a:ea typeface="Calibri"/>
                 <a:cs typeface="Calibri"/>
               </a:rPr>
-              <a:t>The bar chart shows a comparison of the median tank volume between conventional and hybrid electric cars. Conclusion: Hybrid electric cars tend to have a slightly larger median tank volume than conventional cars.</a:t>
-            </a:r>
+              <a:t>This slide shows the final model equation for the price. The bar charts underline the impact of the used parameters on the accuracy of the model.</a:t>
+            </a:r>
+          </a:p>
+          <a:p>
+            <a:endParaRPr lang="en-US" dirty="0">
+              <a:ea typeface="Calibri"/>
+              <a:cs typeface="Calibri"/>
+            </a:endParaRPr>
           </a:p>
         </p:txBody>
       </p:sp>
@@ -1650,121 +2531,6 @@
     <p:extLst>
       <p:ext uri="{BB962C8B-B14F-4D97-AF65-F5344CB8AC3E}">
         <p14:creationId xmlns:p14="http://schemas.microsoft.com/office/powerpoint/2010/main" val="1876836454"/>
-      </p:ext>
-    </p:extLst>
-  </p:cSld>
-  <p:clrMapOvr>
-    <a:masterClrMapping/>
-  </p:clrMapOvr>
-</p:notes>
-</file>
-
-<file path=ppt/notesSlides/notesSlide9.xml><?xml version="1.0" encoding="utf-8"?>
-<p:notes xmlns:a="http://schemas.openxmlformats.org/drawingml/2006/main" xmlns:r="http://schemas.openxmlformats.org/officeDocument/2006/relationships" xmlns:p="http://schemas.openxmlformats.org/presentationml/2006/main">
-  <p:cSld>
-    <p:spTree>
-      <p:nvGrpSpPr>
-        <p:cNvPr id="1" name="">
-          <a:extLst>
-            <a:ext uri="{FF2B5EF4-FFF2-40B4-BE49-F238E27FC236}">
-              <a16:creationId xmlns:a16="http://schemas.microsoft.com/office/drawing/2014/main" id="{60F5E7B7-5D28-5030-D7FE-E3E024832551}"/>
-            </a:ext>
-          </a:extLst>
-        </p:cNvPr>
-        <p:cNvGrpSpPr/>
-        <p:nvPr/>
-      </p:nvGrpSpPr>
-      <p:grpSpPr>
-        <a:xfrm>
-          <a:off x="0" y="0"/>
-          <a:ext cx="0" cy="0"/>
-          <a:chOff x="0" y="0"/>
-          <a:chExt cx="0" cy="0"/>
-        </a:xfrm>
-      </p:grpSpPr>
-      <p:sp>
-        <p:nvSpPr>
-          <p:cNvPr id="2" name="Platshållare för bildobjekt 1">
-            <a:extLst>
-              <a:ext uri="{FF2B5EF4-FFF2-40B4-BE49-F238E27FC236}">
-                <a16:creationId xmlns:a16="http://schemas.microsoft.com/office/drawing/2014/main" id="{14A585F4-D6A0-0135-E1B2-497CAE58907C}"/>
-              </a:ext>
-            </a:extLst>
-          </p:cNvPr>
-          <p:cNvSpPr>
-            <a:spLocks noGrp="1" noRot="1" noChangeAspect="1"/>
-          </p:cNvSpPr>
-          <p:nvPr>
-            <p:ph type="sldImg"/>
-          </p:nvPr>
-        </p:nvSpPr>
-        <p:spPr/>
-      </p:sp>
-      <p:sp>
-        <p:nvSpPr>
-          <p:cNvPr id="3" name="Platshållare för anteckningar 2">
-            <a:extLst>
-              <a:ext uri="{FF2B5EF4-FFF2-40B4-BE49-F238E27FC236}">
-                <a16:creationId xmlns:a16="http://schemas.microsoft.com/office/drawing/2014/main" id="{8C4421F4-6E0F-3996-A765-32D1957F3333}"/>
-              </a:ext>
-            </a:extLst>
-          </p:cNvPr>
-          <p:cNvSpPr>
-            <a:spLocks noGrp="1"/>
-          </p:cNvSpPr>
-          <p:nvPr>
-            <p:ph type="body" idx="1"/>
-          </p:nvPr>
-        </p:nvSpPr>
-        <p:spPr/>
-        <p:txBody>
-          <a:bodyPr/>
-          <a:lstStyle/>
-          <a:p>
-            <a:r>
-              <a:rPr lang="en-US" dirty="0">
-                <a:ea typeface="Calibri"/>
-                <a:cs typeface="Calibri"/>
-              </a:rPr>
-              <a:t>The histogram shows the distribution of the length between conventional and electric cars. Conclusion: Electric cars tend to be longer than conventional cars, with their lengths more consistently clustered around a higher average.</a:t>
-            </a:r>
-          </a:p>
-        </p:txBody>
-      </p:sp>
-      <p:sp>
-        <p:nvSpPr>
-          <p:cNvPr id="4" name="Platshållare för bildnummer 3">
-            <a:extLst>
-              <a:ext uri="{FF2B5EF4-FFF2-40B4-BE49-F238E27FC236}">
-                <a16:creationId xmlns:a16="http://schemas.microsoft.com/office/drawing/2014/main" id="{411B4FDB-8D5F-33CC-F641-54148EA995A5}"/>
-              </a:ext>
-            </a:extLst>
-          </p:cNvPr>
-          <p:cNvSpPr>
-            <a:spLocks noGrp="1"/>
-          </p:cNvSpPr>
-          <p:nvPr>
-            <p:ph type="sldNum" sz="quarter" idx="5"/>
-          </p:nvPr>
-        </p:nvSpPr>
-        <p:spPr/>
-        <p:txBody>
-          <a:bodyPr/>
-          <a:lstStyle/>
-          <a:p>
-            <a:fld id="{E2B1B8E9-9BE0-194F-B3CF-D6D0B7B1DAE8}" type="slidenum">
-              <a:rPr lang="sv-SE"/>
-              <a:pPr/>
-              <a:t>10</a:t>
-            </a:fld>
-            <a:endParaRPr lang="sv-SE"/>
-          </a:p>
-        </p:txBody>
-      </p:sp>
-    </p:spTree>
-    <p:extLst>
-      <p:ext uri="{BB962C8B-B14F-4D97-AF65-F5344CB8AC3E}">
-        <p14:creationId xmlns:p14="http://schemas.microsoft.com/office/powerpoint/2010/main" val="2699443482"/>
       </p:ext>
     </p:extLst>
   </p:cSld>
@@ -2093,7 +2859,7 @@
             <a:fld id="{610C4E4B-DC7F-8F40-B47C-DF522102C54B}" type="slidenum">
               <a:rPr lang="sv-SE" smtClean="0"/>
               <a:pPr/>
-              <a:t>‹#›</a:t>
+              <a:t>‹Nr.›</a:t>
             </a:fld>
             <a:endParaRPr lang="sv-SE" dirty="0"/>
           </a:p>
@@ -2146,7 +2912,7 @@
             </a:pPr>
             <a:fld id="{78286638-E000-784D-B9E7-19A664CA2261}" type="datetime1">
               <a:rPr lang="sv-SE" smtClean="0"/>
-              <a:t>2025-04-16</a:t>
+              <a:t>2025-04-21</a:t>
             </a:fld>
             <a:endParaRPr lang="sv-SE" dirty="0"/>
           </a:p>
@@ -2476,7 +3242,7 @@
             <a:fld id="{610C4E4B-DC7F-8F40-B47C-DF522102C54B}" type="slidenum">
               <a:rPr lang="sv-SE" smtClean="0"/>
               <a:pPr/>
-              <a:t>‹#›</a:t>
+              <a:t>‹Nr.›</a:t>
             </a:fld>
             <a:endParaRPr lang="sv-SE" dirty="0"/>
           </a:p>
@@ -2529,7 +3295,7 @@
             </a:pPr>
             <a:fld id="{78286638-E000-784D-B9E7-19A664CA2261}" type="datetime1">
               <a:rPr lang="sv-SE" smtClean="0"/>
-              <a:t>2025-04-16</a:t>
+              <a:t>2025-04-21</a:t>
             </a:fld>
             <a:endParaRPr lang="sv-SE" dirty="0"/>
           </a:p>
@@ -2648,7 +3414,7 @@
             <a:fld id="{610C4E4B-DC7F-8F40-B47C-DF522102C54B}" type="slidenum">
               <a:rPr lang="sv-SE" smtClean="0"/>
               <a:pPr/>
-              <a:t>‹#›</a:t>
+              <a:t>‹Nr.›</a:t>
             </a:fld>
             <a:endParaRPr lang="sv-SE" dirty="0"/>
           </a:p>
@@ -2875,7 +3641,7 @@
             <a:fld id="{610C4E4B-DC7F-8F40-B47C-DF522102C54B}" type="slidenum">
               <a:rPr lang="sv-SE" smtClean="0"/>
               <a:pPr/>
-              <a:t>‹#›</a:t>
+              <a:t>‹Nr.›</a:t>
             </a:fld>
             <a:endParaRPr lang="sv-SE" dirty="0"/>
           </a:p>
@@ -2928,7 +3694,7 @@
             </a:pPr>
             <a:fld id="{78286638-E000-784D-B9E7-19A664CA2261}" type="datetime1">
               <a:rPr lang="sv-SE" smtClean="0"/>
-              <a:t>2025-04-16</a:t>
+              <a:t>2025-04-21</a:t>
             </a:fld>
             <a:endParaRPr lang="sv-SE" dirty="0"/>
           </a:p>
@@ -3151,7 +3917,7 @@
             <a:fld id="{610C4E4B-DC7F-8F40-B47C-DF522102C54B}" type="slidenum">
               <a:rPr lang="sv-SE" smtClean="0"/>
               <a:pPr/>
-              <a:t>‹#›</a:t>
+              <a:t>‹Nr.›</a:t>
             </a:fld>
             <a:endParaRPr lang="sv-SE" dirty="0"/>
           </a:p>
@@ -3204,7 +3970,7 @@
             </a:pPr>
             <a:fld id="{78286638-E000-784D-B9E7-19A664CA2261}" type="datetime1">
               <a:rPr lang="sv-SE" smtClean="0"/>
-              <a:t>2025-04-16</a:t>
+              <a:t>2025-04-21</a:t>
             </a:fld>
             <a:endParaRPr lang="sv-SE" dirty="0"/>
           </a:p>
@@ -3507,7 +4273,7 @@
             <a:fld id="{610C4E4B-DC7F-8F40-B47C-DF522102C54B}" type="slidenum">
               <a:rPr lang="sv-SE" smtClean="0"/>
               <a:pPr/>
-              <a:t>‹#›</a:t>
+              <a:t>‹Nr.›</a:t>
             </a:fld>
             <a:endParaRPr lang="sv-SE" dirty="0"/>
           </a:p>
@@ -3560,7 +4326,7 @@
             </a:pPr>
             <a:fld id="{78286638-E000-784D-B9E7-19A664CA2261}" type="datetime1">
               <a:rPr lang="sv-SE" smtClean="0"/>
-              <a:t>2025-04-16</a:t>
+              <a:t>2025-04-21</a:t>
             </a:fld>
             <a:endParaRPr lang="sv-SE" dirty="0"/>
           </a:p>
@@ -3723,7 +4489,7 @@
             <a:fld id="{610C4E4B-DC7F-8F40-B47C-DF522102C54B}" type="slidenum">
               <a:rPr lang="sv-SE" smtClean="0"/>
               <a:pPr/>
-              <a:t>‹#›</a:t>
+              <a:t>‹Nr.›</a:t>
             </a:fld>
             <a:endParaRPr lang="sv-SE" dirty="0"/>
           </a:p>
@@ -3776,7 +4542,7 @@
             </a:pPr>
             <a:fld id="{78286638-E000-784D-B9E7-19A664CA2261}" type="datetime1">
               <a:rPr lang="sv-SE" smtClean="0"/>
-              <a:t>2025-04-16</a:t>
+              <a:t>2025-04-21</a:t>
             </a:fld>
             <a:endParaRPr lang="sv-SE" dirty="0"/>
           </a:p>
@@ -3917,7 +4683,7 @@
             <a:fld id="{610C4E4B-DC7F-8F40-B47C-DF522102C54B}" type="slidenum">
               <a:rPr lang="sv-SE" smtClean="0"/>
               <a:pPr/>
-              <a:t>‹#›</a:t>
+              <a:t>‹Nr.›</a:t>
             </a:fld>
             <a:endParaRPr lang="sv-SE" dirty="0"/>
           </a:p>
@@ -3970,7 +4736,7 @@
             </a:pPr>
             <a:fld id="{78286638-E000-784D-B9E7-19A664CA2261}" type="datetime1">
               <a:rPr lang="sv-SE" smtClean="0"/>
-              <a:t>2025-04-16</a:t>
+              <a:t>2025-04-21</a:t>
             </a:fld>
             <a:endParaRPr lang="sv-SE" dirty="0"/>
           </a:p>
@@ -4152,7 +4918,7 @@
             <a:fld id="{610C4E4B-DC7F-8F40-B47C-DF522102C54B}" type="slidenum">
               <a:rPr lang="sv-SE" smtClean="0"/>
               <a:pPr/>
-              <a:t>‹#›</a:t>
+              <a:t>‹Nr.›</a:t>
             </a:fld>
             <a:endParaRPr lang="sv-SE" dirty="0"/>
           </a:p>
@@ -4205,7 +4971,7 @@
             </a:pPr>
             <a:fld id="{78286638-E000-784D-B9E7-19A664CA2261}" type="datetime1">
               <a:rPr lang="sv-SE" smtClean="0"/>
-              <a:t>2025-04-16</a:t>
+              <a:t>2025-04-21</a:t>
             </a:fld>
             <a:endParaRPr lang="sv-SE" dirty="0"/>
           </a:p>
@@ -4473,7 +5239,7 @@
             <a:fld id="{610C4E4B-DC7F-8F40-B47C-DF522102C54B}" type="slidenum">
               <a:rPr lang="sv-SE" smtClean="0"/>
               <a:pPr/>
-              <a:t>‹#›</a:t>
+              <a:t>‹Nr.›</a:t>
             </a:fld>
             <a:endParaRPr lang="sv-SE" dirty="0"/>
           </a:p>
@@ -4526,7 +5292,7 @@
             </a:pPr>
             <a:fld id="{78286638-E000-784D-B9E7-19A664CA2261}" type="datetime1">
               <a:rPr lang="sv-SE" smtClean="0"/>
-              <a:t>2025-04-16</a:t>
+              <a:t>2025-04-21</a:t>
             </a:fld>
             <a:endParaRPr lang="sv-SE" dirty="0"/>
           </a:p>
@@ -4712,7 +5478,7 @@
             <a:fld id="{610C4E4B-DC7F-8F40-B47C-DF522102C54B}" type="slidenum">
               <a:rPr lang="sv-SE" smtClean="0"/>
               <a:pPr/>
-              <a:t>‹#›</a:t>
+              <a:t>‹Nr.›</a:t>
             </a:fld>
             <a:endParaRPr lang="sv-SE" dirty="0"/>
           </a:p>
@@ -4765,7 +5531,7 @@
             </a:pPr>
             <a:fld id="{78286638-E000-784D-B9E7-19A664CA2261}" type="datetime1">
               <a:rPr lang="sv-SE" smtClean="0"/>
-              <a:t>2025-04-16</a:t>
+              <a:t>2025-04-21</a:t>
             </a:fld>
             <a:endParaRPr lang="sv-SE" dirty="0"/>
           </a:p>
@@ -4889,14 +5655,14 @@
           </a:ln>
           <a:extLst>
             <a:ext uri="{909E8E84-426E-40dd-AFC4-6F175D3DCCD1}">
-              <a14:hiddenFill xmlns:a14="http://schemas.microsoft.com/office/drawing/2010/main" xmlns="">
+              <a14:hiddenFill xmlns="" xmlns:a14="http://schemas.microsoft.com/office/drawing/2010/main">
                 <a:solidFill>
                   <a:srgbClr val="FFFFFF"/>
                 </a:solidFill>
               </a14:hiddenFill>
             </a:ext>
             <a:ext uri="{91240B29-F687-4f45-9708-019B960494DF}">
-              <a14:hiddenLine xmlns:a14="http://schemas.microsoft.com/office/drawing/2010/main" xmlns="" w="9525">
+              <a14:hiddenLine xmlns="" xmlns:a14="http://schemas.microsoft.com/office/drawing/2010/main" w="9525">
                 <a:solidFill>
                   <a:srgbClr val="000000"/>
                 </a:solidFill>
@@ -4906,7 +5672,7 @@
               </a14:hiddenLine>
             </a:ext>
             <a:ext uri="{FAA26D3D-D897-4be2-8F04-BA451C77F1D7}">
-              <ma14:placeholderFlag xmlns:ma14="http://schemas.microsoft.com/office/mac/drawingml/2011/main" xmlns="" val="1"/>
+              <ma14:placeholderFlag xmlns="" xmlns:ma14="http://schemas.microsoft.com/office/mac/drawingml/2011/main" val="1"/>
             </a:ext>
           </a:extLst>
         </p:spPr>
@@ -4950,14 +5716,14 @@
           </a:ln>
           <a:extLst>
             <a:ext uri="{909E8E84-426E-40dd-AFC4-6F175D3DCCD1}">
-              <a14:hiddenFill xmlns:a14="http://schemas.microsoft.com/office/drawing/2010/main" xmlns="">
+              <a14:hiddenFill xmlns="" xmlns:a14="http://schemas.microsoft.com/office/drawing/2010/main">
                 <a:solidFill>
                   <a:srgbClr val="FFFFFF"/>
                 </a:solidFill>
               </a14:hiddenFill>
             </a:ext>
             <a:ext uri="{91240B29-F687-4f45-9708-019B960494DF}">
-              <a14:hiddenLine xmlns:a14="http://schemas.microsoft.com/office/drawing/2010/main" xmlns="" w="9525">
+              <a14:hiddenLine xmlns="" xmlns:a14="http://schemas.microsoft.com/office/drawing/2010/main" w="9525">
                 <a:solidFill>
                   <a:srgbClr val="000000"/>
                 </a:solidFill>
@@ -4967,7 +5733,7 @@
               </a14:hiddenLine>
             </a:ext>
             <a:ext uri="{FAA26D3D-D897-4be2-8F04-BA451C77F1D7}">
-              <ma14:placeholderFlag xmlns:ma14="http://schemas.microsoft.com/office/mac/drawingml/2011/main" xmlns="" val="1"/>
+              <ma14:placeholderFlag xmlns="" xmlns:ma14="http://schemas.microsoft.com/office/mac/drawingml/2011/main" val="1"/>
             </a:ext>
           </a:extLst>
         </p:spPr>
@@ -5133,7 +5899,7 @@
             <a:fld id="{610C4E4B-DC7F-8F40-B47C-DF522102C54B}" type="slidenum">
               <a:rPr lang="sv-SE" smtClean="0"/>
               <a:pPr/>
-              <a:t>‹#›</a:t>
+              <a:t>‹Nr.›</a:t>
             </a:fld>
             <a:endParaRPr lang="sv-SE" dirty="0"/>
           </a:p>
@@ -5598,14 +6364,9 @@
           <a:lstStyle/>
           <a:p>
             <a:r>
-              <a:rPr lang="sv-SE" dirty="0"/>
-              <a:t>Project Assignment – Regression </a:t>
-            </a:r>
-            <a:r>
-              <a:rPr lang="sv-SE" dirty="0" err="1"/>
-              <a:t>Analysis</a:t>
-            </a:r>
-            <a:endParaRPr lang="sv-SE" dirty="0"/>
+              <a:rPr lang="en-US" noProof="0" dirty="0"/>
+              <a:t>Project Assignment – Regression Analysis</a:t>
+            </a:r>
           </a:p>
         </p:txBody>
       </p:sp>
@@ -5625,38 +6386,37 @@
             <p:ph type="subTitle" idx="1"/>
           </p:nvPr>
         </p:nvSpPr>
-        <p:spPr/>
+        <p:spPr>
+          <a:xfrm>
+            <a:off x="1371600" y="3886201"/>
+            <a:ext cx="6400800" cy="797308"/>
+          </a:xfrm>
+        </p:spPr>
         <p:txBody>
           <a:bodyPr/>
           <a:lstStyle/>
           <a:p>
             <a:r>
-              <a:rPr lang="sv-SE" dirty="0"/>
+              <a:rPr lang="en-US" noProof="0" dirty="0"/>
               <a:t>David </a:t>
             </a:r>
             <a:r>
-              <a:rPr lang="sv-SE" dirty="0" err="1"/>
+              <a:rPr lang="en-US" noProof="0" dirty="0" err="1"/>
               <a:t>Lienkamp</a:t>
             </a:r>
             <a:r>
-              <a:rPr lang="sv-SE" dirty="0"/>
-              <a:t>, </a:t>
-            </a:r>
-            <a:r>
-              <a:rPr lang="sv-SE" dirty="0" err="1"/>
-              <a:t>Sevval</a:t>
-            </a:r>
-            <a:r>
-              <a:rPr lang="sv-SE" dirty="0"/>
+              <a:rPr lang="en-US" noProof="0" dirty="0"/>
+              <a:t>, Sevval Sagir, Raphael Sommer</a:t>
+            </a:r>
+          </a:p>
+          <a:p>
+            <a:r>
+              <a:rPr lang="en-US" dirty="0"/>
+              <a:t>Group 1</a:t>
+            </a:r>
+            <a:r>
+              <a:rPr lang="en-US" noProof="0" dirty="0"/>
               <a:t> </a:t>
-            </a:r>
-            <a:r>
-              <a:rPr lang="sv-SE" dirty="0" err="1"/>
-              <a:t>Sagir</a:t>
-            </a:r>
-            <a:r>
-              <a:rPr lang="sv-SE" dirty="0"/>
-              <a:t>, Raphael Sommer </a:t>
             </a:r>
           </a:p>
         </p:txBody>
@@ -5746,7 +6506,7 @@
           <a:lstStyle/>
           <a:p>
             <a:pPr algn="ctr"/>
-            <a:endParaRPr lang="en-GB"/>
+            <a:endParaRPr lang="en-US" noProof="0" dirty="0"/>
           </a:p>
         </p:txBody>
       </p:sp>
@@ -5772,11 +6532,11 @@
           <a:lstStyle/>
           <a:p>
             <a:fld id="{610C4E4B-DC7F-8F40-B47C-DF522102C54B}" type="slidenum">
-              <a:rPr lang="sv-SE" smtClean="0"/>
+              <a:rPr lang="en-US" noProof="0" smtClean="0"/>
               <a:pPr/>
               <a:t>10</a:t>
             </a:fld>
-            <a:endParaRPr lang="sv-SE" dirty="0"/>
+            <a:endParaRPr lang="en-US" noProof="0" dirty="0"/>
           </a:p>
         </p:txBody>
       </p:sp>
@@ -5829,7 +6589,7 @@
           <a:lstStyle/>
           <a:p>
             <a:pPr algn="ctr"/>
-            <a:endParaRPr lang="en-GB"/>
+            <a:endParaRPr lang="en-US" noProof="0" dirty="0"/>
           </a:p>
         </p:txBody>
       </p:sp>
@@ -5949,11 +6709,11 @@
           <a:lstStyle/>
           <a:p>
             <a:fld id="{610C4E4B-DC7F-8F40-B47C-DF522102C54B}" type="slidenum">
-              <a:rPr lang="sv-SE" smtClean="0"/>
+              <a:rPr lang="en-US" noProof="0" smtClean="0"/>
               <a:pPr/>
               <a:t>11</a:t>
             </a:fld>
-            <a:endParaRPr lang="sv-SE" dirty="0"/>
+            <a:endParaRPr lang="en-US" noProof="0" dirty="0"/>
           </a:p>
         </p:txBody>
       </p:sp>
@@ -5972,7 +6732,7 @@
           <p:nvPr>
             <p:extLst>
               <p:ext uri="{D42A27DB-BD31-4B8C-83A1-F6EECF244321}">
-                <p14:modId xmlns:p14="http://schemas.microsoft.com/office/powerpoint/2010/main" val="93559264"/>
+                <p14:modId xmlns:p14="http://schemas.microsoft.com/office/powerpoint/2010/main" val="2826487565"/>
               </p:ext>
             </p:extLst>
           </p:nvPr>
@@ -6030,7 +6790,7 @@
                     <a:bodyPr/>
                     <a:lstStyle/>
                     <a:p>
-                      <a:endParaRPr lang="en-DE" sz="1100"/>
+                      <a:endParaRPr lang="en-US" sz="1100" noProof="0" dirty="0"/>
                     </a:p>
                   </a:txBody>
                   <a:tcPr/>
@@ -6042,14 +6802,14 @@
                     <a:p>
                       <a:pPr algn="r"/>
                       <a:r>
-                        <a:rPr lang="en-DE" sz="1100" dirty="0"/>
+                        <a:rPr lang="en-US" sz="1100" noProof="0" dirty="0"/>
                         <a:t>Acceleration </a:t>
                       </a:r>
                       <a:br>
-                        <a:rPr lang="en-DE" sz="1100" dirty="0"/>
+                        <a:rPr lang="en-US" sz="1100" noProof="0" dirty="0"/>
                       </a:br>
                       <a:r>
-                        <a:rPr lang="en-DE" sz="1100" dirty="0"/>
+                        <a:rPr lang="en-US" sz="1100" noProof="0" dirty="0"/>
                         <a:t>[sec.]</a:t>
                       </a:r>
                     </a:p>
@@ -6063,7 +6823,7 @@
                     <a:p>
                       <a:pPr algn="r"/>
                       <a:r>
-                        <a:rPr lang="en-DE" sz="1100" dirty="0"/>
+                        <a:rPr lang="en-US" sz="1100" noProof="0" dirty="0"/>
                         <a:t>Maximum Speed [km/h]</a:t>
                       </a:r>
                     </a:p>
@@ -6077,7 +6837,7 @@
                     <a:p>
                       <a:pPr algn="r"/>
                       <a:r>
-                        <a:rPr lang="en-DE" sz="1100" dirty="0"/>
+                        <a:rPr lang="en-US" sz="1100" noProof="0" dirty="0"/>
                         <a:t>Fuel Consumption [l/100km]</a:t>
                       </a:r>
                     </a:p>
@@ -6091,14 +6851,14 @@
                     <a:p>
                       <a:pPr algn="r"/>
                       <a:r>
-                        <a:rPr lang="en-DE" sz="1100" dirty="0"/>
+                        <a:rPr lang="en-US" sz="1100" noProof="0" dirty="0"/>
                         <a:t>Price </a:t>
                       </a:r>
                       <a:br>
-                        <a:rPr lang="en-DE" sz="1100" dirty="0"/>
+                        <a:rPr lang="en-US" sz="1100" noProof="0" dirty="0"/>
                       </a:br>
                       <a:r>
-                        <a:rPr lang="en-DE" sz="1100" dirty="0"/>
+                        <a:rPr lang="en-US" sz="1100" noProof="0" dirty="0"/>
                         <a:t>[€]</a:t>
                       </a:r>
                     </a:p>
@@ -6118,7 +6878,7 @@
                     <a:lstStyle/>
                     <a:p>
                       <a:r>
-                        <a:rPr lang="en-DE" sz="1100" dirty="0"/>
+                        <a:rPr lang="en-US" sz="1100" noProof="0" dirty="0"/>
                         <a:t>Car #1</a:t>
                       </a:r>
                     </a:p>
@@ -6132,7 +6892,7 @@
                     <a:p>
                       <a:pPr algn="r"/>
                       <a:r>
-                        <a:rPr lang="en-DE" sz="1100" dirty="0"/>
+                        <a:rPr lang="en-US" sz="1100" noProof="0" dirty="0"/>
                         <a:t>12.7</a:t>
                       </a:r>
                     </a:p>
@@ -6150,7 +6910,7 @@
                     <a:p>
                       <a:pPr algn="r"/>
                       <a:r>
-                        <a:rPr lang="en-DE" sz="1100" dirty="0"/>
+                        <a:rPr lang="en-US" sz="1100" noProof="0" dirty="0"/>
                         <a:t>186</a:t>
                       </a:r>
                     </a:p>
@@ -6168,7 +6928,7 @@
                     <a:p>
                       <a:pPr algn="r"/>
                       <a:r>
-                        <a:rPr lang="en-DE" sz="1100" dirty="0"/>
+                        <a:rPr lang="en-US" sz="1100" noProof="0" dirty="0"/>
                         <a:t>6.2</a:t>
                       </a:r>
                     </a:p>
@@ -6186,7 +6946,7 @@
                     <a:p>
                       <a:pPr algn="r"/>
                       <a:r>
-                        <a:rPr lang="en-DE" sz="1100" dirty="0"/>
+                        <a:rPr lang="en-US" sz="1100" noProof="0" dirty="0"/>
                         <a:t>18220</a:t>
                       </a:r>
                     </a:p>
@@ -6210,7 +6970,7 @@
                     <a:lstStyle/>
                     <a:p>
                       <a:r>
-                        <a:rPr lang="en-DE" sz="1100" dirty="0"/>
+                        <a:rPr lang="en-US" sz="1100" noProof="0" dirty="0"/>
                         <a:t>Car #2</a:t>
                       </a:r>
                     </a:p>
@@ -6228,7 +6988,7 @@
                     <a:p>
                       <a:pPr algn="r"/>
                       <a:r>
-                        <a:rPr lang="en-DE" sz="1100" dirty="0"/>
+                        <a:rPr lang="en-US" sz="1100" noProof="0" dirty="0"/>
                         <a:t>3.8</a:t>
                       </a:r>
                     </a:p>
@@ -6246,7 +7006,7 @@
                     <a:p>
                       <a:pPr algn="r"/>
                       <a:r>
-                        <a:rPr lang="en-DE" sz="1100" dirty="0"/>
+                        <a:rPr lang="en-US" sz="1100" noProof="0" dirty="0"/>
                         <a:t>332</a:t>
                       </a:r>
                     </a:p>
@@ -6264,7 +7024,7 @@
                     <a:p>
                       <a:pPr algn="r"/>
                       <a:r>
-                        <a:rPr lang="en-DE" sz="1100" dirty="0"/>
+                        <a:rPr lang="en-US" sz="1100" noProof="0" dirty="0"/>
                         <a:t>22.4</a:t>
                       </a:r>
                     </a:p>
@@ -6282,7 +7042,7 @@
                     <a:p>
                       <a:pPr algn="r"/>
                       <a:r>
-                        <a:rPr lang="en-DE" sz="1100" dirty="0"/>
+                        <a:rPr lang="en-US" sz="1100" noProof="0" dirty="0"/>
                         <a:t>264971</a:t>
                       </a:r>
                     </a:p>
@@ -6306,7 +7066,7 @@
                     <a:lstStyle/>
                     <a:p>
                       <a:r>
-                        <a:rPr lang="en-DE" sz="1100" dirty="0"/>
+                        <a:rPr lang="en-US" sz="1100" noProof="0" dirty="0"/>
                         <a:t>Car #3</a:t>
                       </a:r>
                     </a:p>
@@ -6320,7 +7080,7 @@
                     <a:p>
                       <a:pPr algn="r"/>
                       <a:r>
-                        <a:rPr lang="en-DE" sz="1100" dirty="0"/>
+                        <a:rPr lang="en-US" sz="1100" noProof="0" dirty="0"/>
                         <a:t>11.6</a:t>
                       </a:r>
                     </a:p>
@@ -6338,7 +7098,7 @@
                     <a:p>
                       <a:pPr algn="r"/>
                       <a:r>
-                        <a:rPr lang="en-DE" sz="1100" dirty="0"/>
+                        <a:rPr lang="en-US" sz="1100" noProof="0" dirty="0"/>
                         <a:t>187</a:t>
                       </a:r>
                     </a:p>
@@ -6356,7 +7116,7 @@
                     <a:p>
                       <a:pPr algn="r"/>
                       <a:r>
-                        <a:rPr lang="en-DE" sz="1100" dirty="0"/>
+                        <a:rPr lang="en-US" sz="1100" noProof="0" dirty="0"/>
                         <a:t>7.2</a:t>
                       </a:r>
                     </a:p>
@@ -6374,7 +7134,7 @@
                     <a:p>
                       <a:pPr algn="r"/>
                       <a:r>
-                        <a:rPr lang="en-DE" sz="1100" dirty="0"/>
+                        <a:rPr lang="en-US" sz="1100" noProof="0" dirty="0"/>
                         <a:t>12812</a:t>
                       </a:r>
                     </a:p>
@@ -6398,7 +7158,7 @@
                     <a:lstStyle/>
                     <a:p>
                       <a:r>
-                        <a:rPr lang="en-DE" sz="1100" dirty="0"/>
+                        <a:rPr lang="en-US" sz="1100" noProof="0" dirty="0"/>
                         <a:t>Car #4</a:t>
                       </a:r>
                     </a:p>
@@ -6412,7 +7172,7 @@
                     <a:p>
                       <a:pPr algn="r"/>
                       <a:r>
-                        <a:rPr lang="en-DE" sz="1100" dirty="0"/>
+                        <a:rPr lang="en-US" sz="1100" noProof="0" dirty="0"/>
                         <a:t>12.8</a:t>
                       </a:r>
                     </a:p>
@@ -6430,7 +7190,7 @@
                     <a:p>
                       <a:pPr algn="r"/>
                       <a:r>
-                        <a:rPr lang="en-DE" sz="1100" dirty="0"/>
+                        <a:rPr lang="en-US" sz="1100" noProof="0" dirty="0"/>
                         <a:t>184</a:t>
                       </a:r>
                     </a:p>
@@ -6448,7 +7208,7 @@
                     <a:p>
                       <a:pPr algn="r"/>
                       <a:r>
-                        <a:rPr lang="en-DE" sz="1100" dirty="0"/>
+                        <a:rPr lang="en-US" sz="1100" noProof="0" dirty="0"/>
                         <a:t>6.6</a:t>
                       </a:r>
                     </a:p>
@@ -6466,7 +7226,7 @@
                     <a:p>
                       <a:pPr algn="r"/>
                       <a:r>
-                        <a:rPr lang="en-DE" sz="1100" dirty="0"/>
+                        <a:rPr lang="en-US" sz="1100" noProof="0" dirty="0"/>
                         <a:t>15769</a:t>
                       </a:r>
                     </a:p>
@@ -6490,7 +7250,7 @@
                     <a:lstStyle/>
                     <a:p>
                       <a:r>
-                        <a:rPr lang="en-DE" sz="1100" dirty="0"/>
+                        <a:rPr lang="en-US" sz="1100" noProof="0" dirty="0"/>
                         <a:t>Car #5</a:t>
                       </a:r>
                     </a:p>
@@ -6504,7 +7264,7 @@
                     <a:p>
                       <a:pPr algn="r"/>
                       <a:r>
-                        <a:rPr lang="en-DE" sz="1100" dirty="0"/>
+                        <a:rPr lang="en-US" sz="1100" noProof="0" dirty="0"/>
                         <a:t>9.2</a:t>
                       </a:r>
                     </a:p>
@@ -6518,7 +7278,7 @@
                     <a:p>
                       <a:pPr algn="r"/>
                       <a:r>
-                        <a:rPr lang="en-DE" sz="1100" dirty="0"/>
+                        <a:rPr lang="en-US" sz="1100" noProof="0" dirty="0"/>
                         <a:t>210</a:t>
                       </a:r>
                     </a:p>
@@ -6532,7 +7292,7 @@
                     <a:p>
                       <a:pPr algn="r"/>
                       <a:r>
-                        <a:rPr lang="en-DE" sz="1100" dirty="0"/>
+                        <a:rPr lang="en-US" sz="1100" noProof="0" dirty="0"/>
                         <a:t>6.3</a:t>
                       </a:r>
                     </a:p>
@@ -6546,7 +7306,7 @@
                     <a:p>
                       <a:pPr algn="r"/>
                       <a:r>
-                        <a:rPr lang="en-DE" sz="1100" dirty="0"/>
+                        <a:rPr lang="en-US" sz="1100" noProof="0" dirty="0"/>
                         <a:t>23797</a:t>
                       </a:r>
                     </a:p>
@@ -6591,18 +7351,9 @@
           <a:p>
             <a:pPr algn="ctr"/>
             <a:r>
-              <a:rPr lang="de-DE" sz="3200" dirty="0" err="1"/>
-              <a:t>Model‘s</a:t>
-            </a:r>
-            <a:r>
-              <a:rPr lang="de-DE" sz="3200" dirty="0"/>
-              <a:t> </a:t>
-            </a:r>
-            <a:r>
-              <a:rPr lang="de-DE" sz="3200" dirty="0" err="1"/>
-              <a:t>predictions</a:t>
-            </a:r>
-            <a:endParaRPr lang="en-GB" sz="3200" dirty="0"/>
+              <a:rPr lang="en-US" sz="3200" noProof="0" dirty="0"/>
+              <a:t>Model‘s predictions</a:t>
+            </a:r>
           </a:p>
         </p:txBody>
       </p:sp>
@@ -6664,11 +7415,11 @@
           <a:lstStyle/>
           <a:p>
             <a:fld id="{610C4E4B-DC7F-8F40-B47C-DF522102C54B}" type="slidenum">
-              <a:rPr lang="sv-SE" smtClean="0"/>
+              <a:rPr lang="en-US" noProof="0" smtClean="0"/>
               <a:pPr/>
               <a:t>2</a:t>
             </a:fld>
-            <a:endParaRPr lang="sv-SE" dirty="0"/>
+            <a:endParaRPr lang="en-US" noProof="0" dirty="0"/>
           </a:p>
         </p:txBody>
       </p:sp>
@@ -6687,7 +7438,7 @@
           <p:nvPr>
             <p:extLst>
               <p:ext uri="{D42A27DB-BD31-4B8C-83A1-F6EECF244321}">
-                <p14:modId xmlns:p14="http://schemas.microsoft.com/office/powerpoint/2010/main" val="1610799107"/>
+                <p14:modId xmlns:p14="http://schemas.microsoft.com/office/powerpoint/2010/main" val="1073283362"/>
               </p:ext>
             </p:extLst>
           </p:nvPr>
@@ -6745,7 +7496,7 @@
                     <a:bodyPr/>
                     <a:lstStyle/>
                     <a:p>
-                      <a:endParaRPr lang="en-DE" sz="1100"/>
+                      <a:endParaRPr lang="en-US" sz="1100" noProof="0" dirty="0"/>
                     </a:p>
                   </a:txBody>
                   <a:tcPr/>
@@ -6757,14 +7508,14 @@
                     <a:p>
                       <a:pPr algn="r"/>
                       <a:r>
-                        <a:rPr lang="en-DE" sz="1100" dirty="0"/>
+                        <a:rPr lang="en-US" sz="1100" noProof="0" dirty="0"/>
                         <a:t>Acceleration </a:t>
                       </a:r>
                       <a:br>
-                        <a:rPr lang="en-DE" sz="1100" dirty="0"/>
+                        <a:rPr lang="en-US" sz="1100" noProof="0" dirty="0"/>
                       </a:br>
                       <a:r>
-                        <a:rPr lang="en-DE" sz="1100" dirty="0"/>
+                        <a:rPr lang="en-US" sz="1100" noProof="0" dirty="0"/>
                         <a:t>[sec.]</a:t>
                       </a:r>
                     </a:p>
@@ -6778,7 +7529,7 @@
                     <a:p>
                       <a:pPr algn="r"/>
                       <a:r>
-                        <a:rPr lang="en-DE" sz="1100" dirty="0"/>
+                        <a:rPr lang="en-US" sz="1100" noProof="0" dirty="0"/>
                         <a:t>Maximum Speed [km/h]</a:t>
                       </a:r>
                     </a:p>
@@ -6792,7 +7543,7 @@
                     <a:p>
                       <a:pPr algn="r"/>
                       <a:r>
-                        <a:rPr lang="en-DE" sz="1100" dirty="0"/>
+                        <a:rPr lang="en-US" sz="1100" noProof="0" dirty="0"/>
                         <a:t>Fuel Consumption [l/100km]</a:t>
                       </a:r>
                     </a:p>
@@ -6806,14 +7557,14 @@
                     <a:p>
                       <a:pPr algn="r"/>
                       <a:r>
-                        <a:rPr lang="en-DE" sz="1100" dirty="0"/>
+                        <a:rPr lang="en-US" sz="1100" noProof="0" dirty="0"/>
                         <a:t>Price </a:t>
                       </a:r>
                       <a:br>
-                        <a:rPr lang="en-DE" sz="1100" dirty="0"/>
+                        <a:rPr lang="en-US" sz="1100" noProof="0" dirty="0"/>
                       </a:br>
                       <a:r>
-                        <a:rPr lang="en-DE" sz="1100" dirty="0"/>
+                        <a:rPr lang="en-US" sz="1100" noProof="0" dirty="0"/>
                         <a:t>[€]</a:t>
                       </a:r>
                     </a:p>
@@ -6833,7 +7584,7 @@
                     <a:lstStyle/>
                     <a:p>
                       <a:r>
-                        <a:rPr lang="en-DE" sz="1100" dirty="0"/>
+                        <a:rPr lang="en-US" sz="1100" noProof="0" dirty="0"/>
                         <a:t>Cylinders</a:t>
                       </a:r>
                     </a:p>
@@ -6845,7 +7596,7 @@
                     <a:bodyPr/>
                     <a:lstStyle/>
                     <a:p>
-                      <a:endParaRPr lang="en-DE" sz="1100" dirty="0"/>
+                      <a:endParaRPr lang="en-US" sz="1100" noProof="0" dirty="0"/>
                     </a:p>
                   </a:txBody>
                   <a:tcPr/>
@@ -6855,7 +7606,7 @@
                     <a:bodyPr/>
                     <a:lstStyle/>
                     <a:p>
-                      <a:endParaRPr lang="en-DE" sz="1100" dirty="0"/>
+                      <a:endParaRPr lang="en-US" sz="1100" noProof="0" dirty="0"/>
                     </a:p>
                   </a:txBody>
                   <a:tcPr/>
@@ -6865,7 +7616,7 @@
                     <a:bodyPr/>
                     <a:lstStyle/>
                     <a:p>
-                      <a:endParaRPr lang="en-DE" sz="1100" dirty="0"/>
+                      <a:endParaRPr lang="en-US" sz="1100" noProof="0" dirty="0"/>
                     </a:p>
                   </a:txBody>
                   <a:tcPr/>
@@ -6875,7 +7626,7 @@
                     <a:bodyPr/>
                     <a:lstStyle/>
                     <a:p>
-                      <a:endParaRPr lang="en-DE" sz="1100" dirty="0"/>
+                      <a:endParaRPr lang="en-US" sz="1100" noProof="0" dirty="0"/>
                     </a:p>
                   </a:txBody>
                   <a:tcPr>
@@ -6897,7 +7648,7 @@
                     <a:lstStyle/>
                     <a:p>
                       <a:r>
-                        <a:rPr lang="en-DE" sz="1100" dirty="0"/>
+                        <a:rPr lang="en-US" sz="1100" noProof="0" dirty="0"/>
                         <a:t>Valves/Cylinder</a:t>
                       </a:r>
                     </a:p>
@@ -6913,7 +7664,7 @@
                     <a:bodyPr/>
                     <a:lstStyle/>
                     <a:p>
-                      <a:endParaRPr lang="en-DE" sz="1100" dirty="0"/>
+                      <a:endParaRPr lang="en-US" sz="1100" noProof="0" dirty="0"/>
                     </a:p>
                   </a:txBody>
                   <a:tcPr>
@@ -6927,7 +7678,7 @@
                     <a:bodyPr/>
                     <a:lstStyle/>
                     <a:p>
-                      <a:endParaRPr lang="en-DE" sz="1100"/>
+                      <a:endParaRPr lang="en-US" sz="1100" noProof="0" dirty="0"/>
                     </a:p>
                   </a:txBody>
                   <a:tcPr>
@@ -6941,7 +7692,7 @@
                     <a:bodyPr/>
                     <a:lstStyle/>
                     <a:p>
-                      <a:endParaRPr lang="en-DE" sz="1100"/>
+                      <a:endParaRPr lang="en-US" sz="1100" noProof="0" dirty="0"/>
                     </a:p>
                   </a:txBody>
                   <a:tcPr>
@@ -6955,7 +7706,7 @@
                     <a:bodyPr/>
                     <a:lstStyle/>
                     <a:p>
-                      <a:endParaRPr lang="en-DE" sz="1100" dirty="0"/>
+                      <a:endParaRPr lang="en-US" sz="1100" noProof="0" dirty="0"/>
                     </a:p>
                   </a:txBody>
                   <a:tcPr>
@@ -6977,7 +7728,7 @@
                     <a:lstStyle/>
                     <a:p>
                       <a:r>
-                        <a:rPr lang="en-DE" sz="1100" dirty="0"/>
+                        <a:rPr lang="en-US" sz="1100" noProof="0" dirty="0"/>
                         <a:t>Displacement [cc]</a:t>
                       </a:r>
                     </a:p>
@@ -6989,7 +7740,7 @@
                     <a:bodyPr/>
                     <a:lstStyle/>
                     <a:p>
-                      <a:endParaRPr lang="en-DE" sz="1100" dirty="0"/>
+                      <a:endParaRPr lang="en-US" sz="1100" noProof="0" dirty="0"/>
                     </a:p>
                   </a:txBody>
                   <a:tcPr>
@@ -7003,7 +7754,7 @@
                     <a:bodyPr/>
                     <a:lstStyle/>
                     <a:p>
-                      <a:endParaRPr lang="en-DE" sz="1100" dirty="0"/>
+                      <a:endParaRPr lang="en-US" sz="1100" noProof="0" dirty="0"/>
                     </a:p>
                   </a:txBody>
                   <a:tcPr>
@@ -7017,7 +7768,7 @@
                     <a:bodyPr/>
                     <a:lstStyle/>
                     <a:p>
-                      <a:endParaRPr lang="en-DE" sz="1100" dirty="0"/>
+                      <a:endParaRPr lang="en-US" sz="1100" noProof="0" dirty="0"/>
                     </a:p>
                   </a:txBody>
                   <a:tcPr>
@@ -7031,7 +7782,7 @@
                     <a:bodyPr/>
                     <a:lstStyle/>
                     <a:p>
-                      <a:endParaRPr lang="en-DE" sz="1100" dirty="0"/>
+                      <a:endParaRPr lang="en-US" sz="1100" noProof="0" dirty="0"/>
                     </a:p>
                   </a:txBody>
                   <a:tcPr/>
@@ -7049,7 +7800,7 @@
                     <a:lstStyle/>
                     <a:p>
                       <a:r>
-                        <a:rPr lang="en-DE" sz="1100" dirty="0"/>
+                        <a:rPr lang="en-US" sz="1100" noProof="0" dirty="0"/>
                         <a:t>Turbo</a:t>
                       </a:r>
                     </a:p>
@@ -7061,7 +7812,7 @@
                     <a:bodyPr/>
                     <a:lstStyle/>
                     <a:p>
-                      <a:endParaRPr lang="en-DE" sz="1100" dirty="0"/>
+                      <a:endParaRPr lang="en-US" sz="1100" noProof="0" dirty="0"/>
                     </a:p>
                   </a:txBody>
                   <a:tcPr>
@@ -7075,7 +7826,7 @@
                     <a:bodyPr/>
                     <a:lstStyle/>
                     <a:p>
-                      <a:endParaRPr lang="en-DE" sz="1100" dirty="0"/>
+                      <a:endParaRPr lang="en-US" sz="1100" noProof="0" dirty="0"/>
                     </a:p>
                   </a:txBody>
                   <a:tcPr>
@@ -7089,7 +7840,7 @@
                     <a:bodyPr/>
                     <a:lstStyle/>
                     <a:p>
-                      <a:endParaRPr lang="en-DE" sz="1100" dirty="0"/>
+                      <a:endParaRPr lang="en-US" sz="1100" noProof="0" dirty="0"/>
                     </a:p>
                   </a:txBody>
                   <a:tcPr>
@@ -7103,7 +7854,7 @@
                     <a:bodyPr/>
                     <a:lstStyle/>
                     <a:p>
-                      <a:endParaRPr lang="en-DE" sz="1100" dirty="0"/>
+                      <a:endParaRPr lang="en-US" sz="1100" noProof="0" dirty="0"/>
                     </a:p>
                   </a:txBody>
                   <a:tcPr>
@@ -7125,7 +7876,7 @@
                     <a:lstStyle/>
                     <a:p>
                       <a:r>
-                        <a:rPr lang="en-DE" sz="1100" dirty="0"/>
+                        <a:rPr lang="en-US" sz="1100" noProof="0" dirty="0"/>
                         <a:t>Power [hp]</a:t>
                       </a:r>
                     </a:p>
@@ -7137,7 +7888,7 @@
                     <a:bodyPr/>
                     <a:lstStyle/>
                     <a:p>
-                      <a:endParaRPr lang="en-DE" sz="1100" dirty="0"/>
+                      <a:endParaRPr lang="en-US" sz="1100" noProof="0" dirty="0"/>
                     </a:p>
                   </a:txBody>
                   <a:tcPr/>
@@ -7147,7 +7898,7 @@
                     <a:bodyPr/>
                     <a:lstStyle/>
                     <a:p>
-                      <a:endParaRPr lang="en-DE" sz="1100" dirty="0"/>
+                      <a:endParaRPr lang="en-US" sz="1100" noProof="0" dirty="0"/>
                     </a:p>
                   </a:txBody>
                   <a:tcPr/>
@@ -7157,7 +7908,7 @@
                     <a:bodyPr/>
                     <a:lstStyle/>
                     <a:p>
-                      <a:endParaRPr lang="en-DE" sz="1100" dirty="0"/>
+                      <a:endParaRPr lang="en-US" sz="1100" noProof="0" dirty="0"/>
                     </a:p>
                   </a:txBody>
                   <a:tcPr/>
@@ -7167,7 +7918,7 @@
                     <a:bodyPr/>
                     <a:lstStyle/>
                     <a:p>
-                      <a:endParaRPr lang="en-DE" sz="1100" dirty="0"/>
+                      <a:endParaRPr lang="en-US" sz="1100" noProof="0" dirty="0"/>
                     </a:p>
                   </a:txBody>
                   <a:tcPr/>
@@ -7185,7 +7936,7 @@
                     <a:lstStyle/>
                     <a:p>
                       <a:r>
-                        <a:rPr lang="en-DE" sz="1100" dirty="0"/>
+                        <a:rPr lang="en-US" sz="1100" noProof="0" dirty="0"/>
                         <a:t>Max Torque [nm]</a:t>
                       </a:r>
                     </a:p>
@@ -7201,7 +7952,7 @@
                     <a:bodyPr/>
                     <a:lstStyle/>
                     <a:p>
-                      <a:endParaRPr lang="en-DE" sz="1100" dirty="0"/>
+                      <a:endParaRPr lang="en-US" sz="1100" noProof="0" dirty="0"/>
                     </a:p>
                   </a:txBody>
                   <a:tcPr>
@@ -7215,7 +7966,7 @@
                     <a:bodyPr/>
                     <a:lstStyle/>
                     <a:p>
-                      <a:endParaRPr lang="en-DE" sz="1100" dirty="0"/>
+                      <a:endParaRPr lang="en-US" sz="1100" noProof="0" dirty="0"/>
                     </a:p>
                   </a:txBody>
                   <a:tcPr>
@@ -7229,7 +7980,7 @@
                     <a:bodyPr/>
                     <a:lstStyle/>
                     <a:p>
-                      <a:endParaRPr lang="en-DE" sz="1100" dirty="0"/>
+                      <a:endParaRPr lang="en-US" sz="1100" noProof="0" dirty="0"/>
                     </a:p>
                   </a:txBody>
                   <a:tcPr>
@@ -7243,7 +7994,7 @@
                     <a:bodyPr/>
                     <a:lstStyle/>
                     <a:p>
-                      <a:endParaRPr lang="en-DE" sz="1100" dirty="0"/>
+                      <a:endParaRPr lang="en-US" sz="1100" noProof="0" dirty="0"/>
                     </a:p>
                   </a:txBody>
                   <a:tcPr>
@@ -7265,7 +8016,7 @@
                     <a:lstStyle/>
                     <a:p>
                       <a:r>
-                        <a:rPr lang="en-DE" sz="1100" dirty="0"/>
+                        <a:rPr lang="en-US" sz="1100" noProof="0" dirty="0"/>
                         <a:t>Length [mm]</a:t>
                       </a:r>
                     </a:p>
@@ -7277,7 +8028,7 @@
                     <a:bodyPr/>
                     <a:lstStyle/>
                     <a:p>
-                      <a:endParaRPr lang="en-DE" sz="1100" dirty="0"/>
+                      <a:endParaRPr lang="en-US" sz="1100" noProof="0" dirty="0"/>
                     </a:p>
                   </a:txBody>
                   <a:tcPr>
@@ -7291,7 +8042,7 @@
                     <a:bodyPr/>
                     <a:lstStyle/>
                     <a:p>
-                      <a:endParaRPr lang="en-DE" sz="1100" dirty="0"/>
+                      <a:endParaRPr lang="en-US" sz="1100" noProof="0" dirty="0"/>
                     </a:p>
                   </a:txBody>
                   <a:tcPr>
@@ -7305,7 +8056,7 @@
                     <a:bodyPr/>
                     <a:lstStyle/>
                     <a:p>
-                      <a:endParaRPr lang="en-DE" sz="1100" dirty="0"/>
+                      <a:endParaRPr lang="en-US" sz="1100" noProof="0" dirty="0"/>
                     </a:p>
                   </a:txBody>
                   <a:tcPr/>
@@ -7315,7 +8066,7 @@
                     <a:bodyPr/>
                     <a:lstStyle/>
                     <a:p>
-                      <a:endParaRPr lang="en-DE" sz="1100" dirty="0"/>
+                      <a:endParaRPr lang="en-US" sz="1100" noProof="0" dirty="0"/>
                     </a:p>
                   </a:txBody>
                   <a:tcPr>
@@ -7337,7 +8088,7 @@
                     <a:lstStyle/>
                     <a:p>
                       <a:r>
-                        <a:rPr lang="en-DE" sz="1100" dirty="0"/>
+                        <a:rPr lang="en-US" sz="1100" noProof="0" dirty="0"/>
                         <a:t>Width [mm]</a:t>
                       </a:r>
                     </a:p>
@@ -7353,7 +8104,7 @@
                     <a:bodyPr/>
                     <a:lstStyle/>
                     <a:p>
-                      <a:endParaRPr lang="en-DE" sz="1100" dirty="0"/>
+                      <a:endParaRPr lang="en-US" sz="1100" noProof="0" dirty="0"/>
                     </a:p>
                   </a:txBody>
                   <a:tcPr>
@@ -7367,7 +8118,7 @@
                     <a:bodyPr/>
                     <a:lstStyle/>
                     <a:p>
-                      <a:endParaRPr lang="en-DE" sz="1100" dirty="0"/>
+                      <a:endParaRPr lang="en-US" sz="1100" noProof="0" dirty="0"/>
                     </a:p>
                   </a:txBody>
                   <a:tcPr>
@@ -7381,7 +8132,7 @@
                     <a:bodyPr/>
                     <a:lstStyle/>
                     <a:p>
-                      <a:endParaRPr lang="en-DE" sz="1100" dirty="0"/>
+                      <a:endParaRPr lang="en-US" sz="1100" noProof="0" dirty="0"/>
                     </a:p>
                   </a:txBody>
                   <a:tcPr>
@@ -7395,7 +8146,7 @@
                     <a:bodyPr/>
                     <a:lstStyle/>
                     <a:p>
-                      <a:endParaRPr lang="en-DE" sz="1100" dirty="0"/>
+                      <a:endParaRPr lang="en-US" sz="1100" noProof="0" dirty="0"/>
                     </a:p>
                   </a:txBody>
                   <a:tcPr>
@@ -7417,7 +8168,7 @@
                     <a:lstStyle/>
                     <a:p>
                       <a:r>
-                        <a:rPr lang="en-DE" sz="1100" dirty="0"/>
+                        <a:rPr lang="en-US" sz="1100" noProof="0" dirty="0"/>
                         <a:t>Height [mm]</a:t>
                       </a:r>
                     </a:p>
@@ -7429,7 +8180,7 @@
                     <a:bodyPr/>
                     <a:lstStyle/>
                     <a:p>
-                      <a:endParaRPr lang="en-DE" sz="1100" dirty="0"/>
+                      <a:endParaRPr lang="en-US" sz="1100" noProof="0" dirty="0"/>
                     </a:p>
                   </a:txBody>
                   <a:tcPr>
@@ -7443,7 +8194,7 @@
                     <a:bodyPr/>
                     <a:lstStyle/>
                     <a:p>
-                      <a:endParaRPr lang="en-DE" sz="1100" dirty="0"/>
+                      <a:endParaRPr lang="en-US" sz="1100" noProof="0" dirty="0"/>
                     </a:p>
                   </a:txBody>
                   <a:tcPr/>
@@ -7453,7 +8204,7 @@
                     <a:bodyPr/>
                     <a:lstStyle/>
                     <a:p>
-                      <a:endParaRPr lang="en-DE" sz="1100" dirty="0"/>
+                      <a:endParaRPr lang="en-US" sz="1100" noProof="0" dirty="0"/>
                     </a:p>
                   </a:txBody>
                   <a:tcPr>
@@ -7467,7 +8218,7 @@
                     <a:bodyPr/>
                     <a:lstStyle/>
                     <a:p>
-                      <a:endParaRPr lang="en-DE" sz="1100" dirty="0"/>
+                      <a:endParaRPr lang="en-US" sz="1100" noProof="0" dirty="0"/>
                     </a:p>
                   </a:txBody>
                   <a:tcPr>
@@ -7489,7 +8240,7 @@
                     <a:lstStyle/>
                     <a:p>
                       <a:r>
-                        <a:rPr lang="en-DE" sz="1100" dirty="0"/>
+                        <a:rPr lang="en-US" sz="1100" noProof="0" dirty="0"/>
                         <a:t>Weight [kg]</a:t>
                       </a:r>
                     </a:p>
@@ -7501,7 +8252,7 @@
                     <a:bodyPr/>
                     <a:lstStyle/>
                     <a:p>
-                      <a:endParaRPr lang="en-DE" sz="1100" dirty="0"/>
+                      <a:endParaRPr lang="en-US" sz="1100" noProof="0" dirty="0"/>
                     </a:p>
                   </a:txBody>
                   <a:tcPr>
@@ -7515,7 +8266,7 @@
                     <a:bodyPr/>
                     <a:lstStyle/>
                     <a:p>
-                      <a:endParaRPr lang="en-DE" sz="1100" dirty="0"/>
+                      <a:endParaRPr lang="en-US" sz="1100" noProof="0" dirty="0"/>
                     </a:p>
                   </a:txBody>
                   <a:tcPr>
@@ -7529,7 +8280,7 @@
                     <a:bodyPr/>
                     <a:lstStyle/>
                     <a:p>
-                      <a:endParaRPr lang="en-DE" sz="1100" dirty="0"/>
+                      <a:endParaRPr lang="en-US" sz="1100" noProof="0" dirty="0"/>
                     </a:p>
                   </a:txBody>
                   <a:tcPr>
@@ -7543,7 +8294,7 @@
                     <a:bodyPr/>
                     <a:lstStyle/>
                     <a:p>
-                      <a:endParaRPr lang="en-DE" sz="1100" dirty="0"/>
+                      <a:endParaRPr lang="en-US" sz="1100" noProof="0" dirty="0"/>
                     </a:p>
                   </a:txBody>
                   <a:tcPr>
@@ -7565,7 +8316,7 @@
                     <a:lstStyle/>
                     <a:p>
                       <a:r>
-                        <a:rPr lang="en-DE" sz="1100" dirty="0"/>
+                        <a:rPr lang="en-US" sz="1100" noProof="0" dirty="0"/>
                         <a:t>Trunk Volume [l]</a:t>
                       </a:r>
                     </a:p>
@@ -7577,7 +8328,7 @@
                     <a:bodyPr/>
                     <a:lstStyle/>
                     <a:p>
-                      <a:endParaRPr lang="en-DE" sz="1100" dirty="0"/>
+                      <a:endParaRPr lang="en-US" sz="1100" noProof="0" dirty="0"/>
                     </a:p>
                   </a:txBody>
                   <a:tcPr/>
@@ -7587,7 +8338,7 @@
                     <a:bodyPr/>
                     <a:lstStyle/>
                     <a:p>
-                      <a:endParaRPr lang="en-DE" sz="1100" dirty="0"/>
+                      <a:endParaRPr lang="en-US" sz="1100" noProof="0" dirty="0"/>
                     </a:p>
                   </a:txBody>
                   <a:tcPr>
@@ -7601,7 +8352,7 @@
                     <a:bodyPr/>
                     <a:lstStyle/>
                     <a:p>
-                      <a:endParaRPr lang="en-DE" sz="1100" dirty="0"/>
+                      <a:endParaRPr lang="en-US" sz="1100" noProof="0" dirty="0"/>
                     </a:p>
                   </a:txBody>
                   <a:tcPr/>
@@ -7611,7 +8362,7 @@
                     <a:bodyPr/>
                     <a:lstStyle/>
                     <a:p>
-                      <a:endParaRPr lang="en-DE" sz="1100" dirty="0"/>
+                      <a:endParaRPr lang="en-US" sz="1100" noProof="0" dirty="0"/>
                     </a:p>
                   </a:txBody>
                   <a:tcPr>
@@ -7633,7 +8384,7 @@
                     <a:lstStyle/>
                     <a:p>
                       <a:r>
-                        <a:rPr lang="en-DE" sz="1100" dirty="0"/>
+                        <a:rPr lang="en-US" sz="1100" noProof="0" dirty="0"/>
                         <a:t>Maximum Speed [km/h]</a:t>
                       </a:r>
                     </a:p>
@@ -7645,7 +8396,7 @@
                     <a:bodyPr/>
                     <a:lstStyle/>
                     <a:p>
-                      <a:endParaRPr lang="en-DE" sz="1100" dirty="0"/>
+                      <a:endParaRPr lang="en-US" sz="1100" noProof="0" dirty="0"/>
                     </a:p>
                   </a:txBody>
                   <a:tcPr>
@@ -7659,7 +8410,7 @@
                     <a:bodyPr/>
                     <a:lstStyle/>
                     <a:p>
-                      <a:endParaRPr lang="en-DE" sz="1100" dirty="0"/>
+                      <a:endParaRPr lang="en-US" sz="1100" noProof="0" dirty="0"/>
                     </a:p>
                   </a:txBody>
                   <a:tcPr>
@@ -7673,7 +8424,7 @@
                     <a:bodyPr/>
                     <a:lstStyle/>
                     <a:p>
-                      <a:endParaRPr lang="en-DE" sz="1100" dirty="0"/>
+                      <a:endParaRPr lang="en-US" sz="1100" noProof="0" dirty="0"/>
                     </a:p>
                   </a:txBody>
                   <a:tcPr>
@@ -7687,7 +8438,7 @@
                     <a:bodyPr/>
                     <a:lstStyle/>
                     <a:p>
-                      <a:endParaRPr lang="en-DE" sz="1100" dirty="0"/>
+                      <a:endParaRPr lang="en-US" sz="1100" noProof="0" dirty="0"/>
                     </a:p>
                   </a:txBody>
                   <a:tcPr>
@@ -7734,14 +8485,9 @@
           <a:p>
             <a:pPr algn="ctr"/>
             <a:r>
-              <a:rPr lang="de-DE" sz="3200" dirty="0"/>
-              <a:t>Relevant </a:t>
-            </a:r>
-            <a:r>
-              <a:rPr lang="de-DE" sz="3200" dirty="0" err="1"/>
-              <a:t>parameters</a:t>
-            </a:r>
-            <a:endParaRPr lang="en-GB" sz="3200" dirty="0"/>
+              <a:rPr lang="en-US" sz="3200" noProof="0" dirty="0"/>
+              <a:t>Relevant parameters</a:t>
+            </a:r>
           </a:p>
         </p:txBody>
       </p:sp>
@@ -7824,7 +8570,7 @@
           <a:lstStyle/>
           <a:p>
             <a:pPr algn="ctr"/>
-            <a:endParaRPr lang="en-GB"/>
+            <a:endParaRPr lang="en-US" noProof="0" dirty="0"/>
           </a:p>
         </p:txBody>
       </p:sp>
@@ -7850,11 +8596,11 @@
           <a:lstStyle/>
           <a:p>
             <a:fld id="{610C4E4B-DC7F-8F40-B47C-DF522102C54B}" type="slidenum">
-              <a:rPr lang="sv-SE" smtClean="0"/>
+              <a:rPr lang="en-US" noProof="0" smtClean="0"/>
               <a:pPr/>
               <a:t>3</a:t>
             </a:fld>
-            <a:endParaRPr lang="sv-SE" dirty="0"/>
+            <a:endParaRPr lang="en-US" noProof="0" dirty="0"/>
           </a:p>
         </p:txBody>
       </p:sp>
@@ -7967,7 +8713,7 @@
           <a:lstStyle/>
           <a:p>
             <a:pPr algn="ctr"/>
-            <a:endParaRPr lang="en-GB"/>
+            <a:endParaRPr lang="en-US" noProof="0" dirty="0"/>
           </a:p>
         </p:txBody>
       </p:sp>
@@ -7993,11 +8739,11 @@
           <a:lstStyle/>
           <a:p>
             <a:fld id="{610C4E4B-DC7F-8F40-B47C-DF522102C54B}" type="slidenum">
-              <a:rPr lang="sv-SE" smtClean="0"/>
+              <a:rPr lang="en-US" noProof="0" smtClean="0"/>
               <a:pPr/>
               <a:t>4</a:t>
             </a:fld>
-            <a:endParaRPr lang="sv-SE" dirty="0"/>
+            <a:endParaRPr lang="en-US" noProof="0" dirty="0"/>
           </a:p>
         </p:txBody>
       </p:sp>
@@ -8050,7 +8796,7 @@
           <a:lstStyle/>
           <a:p>
             <a:pPr algn="ctr"/>
-            <a:endParaRPr lang="en-GB"/>
+            <a:endParaRPr lang="en-US" noProof="0" dirty="0"/>
           </a:p>
         </p:txBody>
       </p:sp>
@@ -8199,7 +8945,7 @@
           <a:lstStyle/>
           <a:p>
             <a:pPr algn="ctr"/>
-            <a:endParaRPr lang="en-GB"/>
+            <a:endParaRPr lang="en-US" noProof="0" dirty="0"/>
           </a:p>
         </p:txBody>
       </p:sp>
@@ -8225,11 +8971,11 @@
           <a:lstStyle/>
           <a:p>
             <a:fld id="{610C4E4B-DC7F-8F40-B47C-DF522102C54B}" type="slidenum">
-              <a:rPr lang="sv-SE" smtClean="0"/>
+              <a:rPr lang="en-US" noProof="0" smtClean="0"/>
               <a:pPr/>
               <a:t>5</a:t>
             </a:fld>
-            <a:endParaRPr lang="sv-SE" dirty="0"/>
+            <a:endParaRPr lang="en-US" noProof="0" dirty="0"/>
           </a:p>
         </p:txBody>
       </p:sp>
@@ -8347,7 +9093,7 @@
           <a:lstStyle/>
           <a:p>
             <a:pPr algn="ctr"/>
-            <a:endParaRPr lang="en-GB"/>
+            <a:endParaRPr lang="en-US" noProof="0" dirty="0"/>
           </a:p>
         </p:txBody>
       </p:sp>
@@ -8373,11 +9119,11 @@
           <a:lstStyle/>
           <a:p>
             <a:fld id="{610C4E4B-DC7F-8F40-B47C-DF522102C54B}" type="slidenum">
-              <a:rPr lang="sv-SE" smtClean="0"/>
+              <a:rPr lang="en-US" noProof="0" smtClean="0"/>
               <a:pPr/>
               <a:t>6</a:t>
             </a:fld>
-            <a:endParaRPr lang="sv-SE" dirty="0"/>
+            <a:endParaRPr lang="en-US" noProof="0" dirty="0"/>
           </a:p>
         </p:txBody>
       </p:sp>
@@ -8430,7 +9176,7 @@
           <a:lstStyle/>
           <a:p>
             <a:pPr algn="ctr"/>
-            <a:endParaRPr lang="en-GB"/>
+            <a:endParaRPr lang="en-US" noProof="0" dirty="0"/>
           </a:p>
         </p:txBody>
       </p:sp>
@@ -8577,7 +9323,7 @@
           <a:lstStyle/>
           <a:p>
             <a:pPr algn="ctr"/>
-            <a:endParaRPr lang="en-GB"/>
+            <a:endParaRPr lang="en-US" noProof="0" dirty="0"/>
           </a:p>
         </p:txBody>
       </p:sp>
@@ -8603,11 +9349,11 @@
           <a:lstStyle/>
           <a:p>
             <a:fld id="{610C4E4B-DC7F-8F40-B47C-DF522102C54B}" type="slidenum">
-              <a:rPr lang="sv-SE" smtClean="0"/>
+              <a:rPr lang="en-US" noProof="0" smtClean="0"/>
               <a:pPr/>
               <a:t>7</a:t>
             </a:fld>
-            <a:endParaRPr lang="sv-SE" dirty="0"/>
+            <a:endParaRPr lang="en-US" noProof="0" dirty="0"/>
           </a:p>
         </p:txBody>
       </p:sp>
@@ -8725,7 +9471,7 @@
           <a:lstStyle/>
           <a:p>
             <a:pPr algn="ctr"/>
-            <a:endParaRPr lang="en-GB"/>
+            <a:endParaRPr lang="en-US" noProof="0" dirty="0"/>
           </a:p>
         </p:txBody>
       </p:sp>
@@ -8751,11 +9497,11 @@
           <a:lstStyle/>
           <a:p>
             <a:fld id="{610C4E4B-DC7F-8F40-B47C-DF522102C54B}" type="slidenum">
-              <a:rPr lang="sv-SE" smtClean="0"/>
+              <a:rPr lang="en-US" noProof="0" smtClean="0"/>
               <a:pPr/>
               <a:t>8</a:t>
             </a:fld>
-            <a:endParaRPr lang="sv-SE" dirty="0"/>
+            <a:endParaRPr lang="en-US" noProof="0" dirty="0"/>
           </a:p>
         </p:txBody>
       </p:sp>
@@ -8808,7 +9554,7 @@
           <a:lstStyle/>
           <a:p>
             <a:pPr algn="ctr"/>
-            <a:endParaRPr lang="en-GB"/>
+            <a:endParaRPr lang="en-US" noProof="0" dirty="0"/>
           </a:p>
         </p:txBody>
       </p:sp>
@@ -8955,7 +9701,7 @@
           <a:lstStyle/>
           <a:p>
             <a:pPr algn="ctr"/>
-            <a:endParaRPr lang="en-GB"/>
+            <a:endParaRPr lang="en-US" noProof="0" dirty="0"/>
           </a:p>
         </p:txBody>
       </p:sp>
@@ -8981,11 +9727,11 @@
           <a:lstStyle/>
           <a:p>
             <a:fld id="{610C4E4B-DC7F-8F40-B47C-DF522102C54B}" type="slidenum">
-              <a:rPr lang="sv-SE" smtClean="0"/>
+              <a:rPr lang="en-US" noProof="0" smtClean="0"/>
               <a:pPr/>
               <a:t>9</a:t>
             </a:fld>
-            <a:endParaRPr lang="sv-SE" dirty="0"/>
+            <a:endParaRPr lang="en-US" noProof="0" dirty="0"/>
           </a:p>
         </p:txBody>
       </p:sp>
@@ -9993,15 +10739,6 @@
 </file>
 
 <file path=customXml/item1.xml><?xml version="1.0" encoding="utf-8"?>
-<?mso-contentType ?>
-<FormTemplates xmlns="http://schemas.microsoft.com/sharepoint/v3/contenttype/forms">
-  <Display>DocumentLibraryForm</Display>
-  <Edit>DocumentLibraryForm</Edit>
-  <New>DocumentLibraryForm</New>
-</FormTemplates>
-</file>
-
-<file path=customXml/item2.xml><?xml version="1.0" encoding="utf-8"?>
 <ct:contentTypeSchema xmlns:ct="http://schemas.microsoft.com/office/2006/metadata/contentType" xmlns:ma="http://schemas.microsoft.com/office/2006/metadata/properties/metaAttributes" ct:_="" ma:_="" ma:contentTypeName="dokument" ma:contentTypeID="0x010100830AFD53EA4FAC4B93D1BAD879B4B205" ma:contentTypeVersion="20" ma:contentTypeDescription="Skapa ett nytt dokument." ma:contentTypeScope="" ma:versionID="d20458860b4e67c8a989bb88ba1189b9">
   <xsd:schema xmlns:xsd="http://www.w3.org/2001/XMLSchema" xmlns:xs="http://www.w3.org/2001/XMLSchema" xmlns:p="http://schemas.microsoft.com/office/2006/metadata/properties" xmlns:ns2="a27dfd0f-a6f2-4712-9137-d9a404cddc60" xmlns:ns3="661728cc-f8de-4546-bc23-5f5fdbb4708e" targetNamespace="http://schemas.microsoft.com/office/2006/metadata/properties" ma:root="true" ma:fieldsID="704e11bb582ec7a1851f532e774c0983" ns2:_="" ns3:_="">
     <xsd:import namespace="a27dfd0f-a6f2-4712-9137-d9a404cddc60"/>
@@ -10222,6 +10959,15 @@
 </ct:contentTypeSchema>
 </file>
 
+<file path=customXml/item2.xml><?xml version="1.0" encoding="utf-8"?>
+<?mso-contentType ?>
+<FormTemplates xmlns="http://schemas.microsoft.com/sharepoint/v3/contenttype/forms">
+  <Display>DocumentLibraryForm</Display>
+  <Edit>DocumentLibraryForm</Edit>
+  <New>DocumentLibraryForm</New>
+</FormTemplates>
+</file>
+
 <file path=customXml/item3.xml><?xml version="1.0" encoding="utf-8"?>
 <p:properties xmlns:p="http://schemas.microsoft.com/office/2006/metadata/properties" xmlns:xsi="http://www.w3.org/2001/XMLSchema-instance" xmlns:pc="http://schemas.microsoft.com/office/infopath/2007/PartnerControls">
   <documentManagement>
@@ -10235,14 +10981,6 @@
 </file>
 
 <file path=customXml/itemProps1.xml><?xml version="1.0" encoding="utf-8"?>
-<ds:datastoreItem xmlns:ds="http://schemas.openxmlformats.org/officeDocument/2006/customXml" ds:itemID="{D28E330F-FAEB-43BD-88E9-B921C1D5AE7B}">
-  <ds:schemaRefs>
-    <ds:schemaRef ds:uri="http://schemas.microsoft.com/sharepoint/v3/contenttype/forms"/>
-  </ds:schemaRefs>
-</ds:datastoreItem>
-</file>
-
-<file path=customXml/itemProps2.xml><?xml version="1.0" encoding="utf-8"?>
 <ds:datastoreItem xmlns:ds="http://schemas.openxmlformats.org/officeDocument/2006/customXml" ds:itemID="{4DA24E85-69A4-40E6-B457-5DEA4943BCC4}">
   <ds:schemaRefs>
     <ds:schemaRef ds:uri="http://schemas.microsoft.com/office/2006/metadata/contentType"/>
@@ -10261,13 +10999,27 @@
 </ds:datastoreItem>
 </file>
 
+<file path=customXml/itemProps2.xml><?xml version="1.0" encoding="utf-8"?>
+<ds:datastoreItem xmlns:ds="http://schemas.openxmlformats.org/officeDocument/2006/customXml" ds:itemID="{D28E330F-FAEB-43BD-88E9-B921C1D5AE7B}">
+  <ds:schemaRefs>
+    <ds:schemaRef ds:uri="http://schemas.microsoft.com/sharepoint/v3/contenttype/forms"/>
+  </ds:schemaRefs>
+</ds:datastoreItem>
+</file>
+
 <file path=customXml/itemProps3.xml><?xml version="1.0" encoding="utf-8"?>
 <ds:datastoreItem xmlns:ds="http://schemas.openxmlformats.org/officeDocument/2006/customXml" ds:itemID="{0CF91B3D-EC90-430A-AB1E-F0238E505E8F}">
   <ds:schemaRefs>
+    <ds:schemaRef ds:uri="http://purl.org/dc/dcmitype/"/>
+    <ds:schemaRef ds:uri="http://schemas.microsoft.com/office/2006/documentManagement/types"/>
+    <ds:schemaRef ds:uri="http://purl.org/dc/terms/"/>
     <ds:schemaRef ds:uri="http://schemas.microsoft.com/office/2006/metadata/properties"/>
+    <ds:schemaRef ds:uri="http://schemas.openxmlformats.org/package/2006/metadata/core-properties"/>
+    <ds:schemaRef ds:uri="http://purl.org/dc/elements/1.1/"/>
+    <ds:schemaRef ds:uri="http://www.w3.org/XML/1998/namespace"/>
     <ds:schemaRef ds:uri="http://schemas.microsoft.com/office/infopath/2007/PartnerControls"/>
+    <ds:schemaRef ds:uri="661728cc-f8de-4546-bc23-5f5fdbb4708e"/>
     <ds:schemaRef ds:uri="a27dfd0f-a6f2-4712-9137-d9a404cddc60"/>
-    <ds:schemaRef ds:uri="661728cc-f8de-4546-bc23-5f5fdbb4708e"/>
   </ds:schemaRefs>
 </ds:datastoreItem>
 </file>
--- a/Project Assignment - Regression Analysis.pptx
+++ b/Project Assignment - Regression Analysis.pptx
@@ -5,23 +5,30 @@
     <p:sldMasterId id="2147483648" r:id="rId4"/>
   </p:sldMasterIdLst>
   <p:notesMasterIdLst>
-    <p:notesMasterId r:id="rId16"/>
+    <p:notesMasterId r:id="rId23"/>
   </p:notesMasterIdLst>
   <p:handoutMasterIdLst>
-    <p:handoutMasterId r:id="rId17"/>
+    <p:handoutMasterId r:id="rId24"/>
   </p:handoutMasterIdLst>
   <p:sldIdLst>
     <p:sldId id="419" r:id="rId5"/>
     <p:sldId id="435" r:id="rId6"/>
-    <p:sldId id="424" r:id="rId7"/>
-    <p:sldId id="425" r:id="rId8"/>
-    <p:sldId id="436" r:id="rId9"/>
-    <p:sldId id="437" r:id="rId10"/>
-    <p:sldId id="438" r:id="rId11"/>
-    <p:sldId id="439" r:id="rId12"/>
-    <p:sldId id="440" r:id="rId13"/>
-    <p:sldId id="441" r:id="rId14"/>
-    <p:sldId id="442" r:id="rId15"/>
+    <p:sldId id="444" r:id="rId7"/>
+    <p:sldId id="443" r:id="rId8"/>
+    <p:sldId id="446" r:id="rId9"/>
+    <p:sldId id="447" r:id="rId10"/>
+    <p:sldId id="448" r:id="rId11"/>
+    <p:sldId id="449" r:id="rId12"/>
+    <p:sldId id="450" r:id="rId13"/>
+    <p:sldId id="451" r:id="rId14"/>
+    <p:sldId id="452" r:id="rId15"/>
+    <p:sldId id="453" r:id="rId16"/>
+    <p:sldId id="454" r:id="rId17"/>
+    <p:sldId id="455" r:id="rId18"/>
+    <p:sldId id="456" r:id="rId19"/>
+    <p:sldId id="457" r:id="rId20"/>
+    <p:sldId id="442" r:id="rId21"/>
+    <p:sldId id="445" r:id="rId22"/>
   </p:sldIdLst>
   <p:sldSz cx="9144000" cy="5143500" type="screen16x9"/>
   <p:notesSz cx="6784975" cy="9906000"/>
@@ -182,8 +189,7 @@
 <file path=ppt/revisionInfo.xml><?xml version="1.0" encoding="utf-8"?>
 <p1510:revInfo xmlns:a="http://schemas.openxmlformats.org/drawingml/2006/main" xmlns:r="http://schemas.openxmlformats.org/officeDocument/2006/relationships" xmlns:p1510="http://schemas.microsoft.com/office/powerpoint/2015/10/main">
   <p1510:revLst>
-    <p1510:client id="{19F4C7BE-D3A6-E1AB-9EF1-1D95187F52DF}" v="201" dt="2025-04-11T11:06:27.594"/>
-    <p1510:client id="{1E06C9D2-DBB7-4CD2-A800-2F010F4405AC}" v="477" dt="2025-04-11T12:12:46.007"/>
+    <p1510:client id="{C717CE6A-4C88-094D-ADC2-CF20F04A6B48}" v="24" dt="2025-05-02T10:37:49.176"/>
   </p1510:revLst>
 </p1510:revInfo>
 </file>
@@ -290,7 +296,7 @@
             <a:fld id="{BE2E8362-7B74-CD41-BED9-51C895E0F26E}" type="datetime1">
               <a:rPr lang="sv-SE"/>
               <a:pPr/>
-              <a:t>2025-04-16</a:t>
+              <a:t>2025-05-01</a:t>
             </a:fld>
             <a:endParaRPr lang="sv-SE"/>
           </a:p>
@@ -496,7 +502,7 @@
             <a:fld id="{42B30327-357F-3343-805F-CF1F05C4CF93}" type="datetime1">
               <a:rPr lang="sv-SE"/>
               <a:pPr/>
-              <a:t>2025-04-16</a:t>
+              <a:t>2025-05-01</a:t>
             </a:fld>
             <a:endParaRPr lang="sv-SE"/>
           </a:p>
@@ -902,878 +908,6 @@
 </p:notes>
 </file>
 
-<file path=ppt/notesSlides/notesSlide2.xml><?xml version="1.0" encoding="utf-8"?>
-<p:notes xmlns:a="http://schemas.openxmlformats.org/drawingml/2006/main" xmlns:r="http://schemas.openxmlformats.org/officeDocument/2006/relationships" xmlns:p="http://schemas.openxmlformats.org/presentationml/2006/main">
-  <p:cSld>
-    <p:spTree>
-      <p:nvGrpSpPr>
-        <p:cNvPr id="1" name=""/>
-        <p:cNvGrpSpPr/>
-        <p:nvPr/>
-      </p:nvGrpSpPr>
-      <p:grpSpPr>
-        <a:xfrm>
-          <a:off x="0" y="0"/>
-          <a:ext cx="0" cy="0"/>
-          <a:chOff x="0" y="0"/>
-          <a:chExt cx="0" cy="0"/>
-        </a:xfrm>
-      </p:grpSpPr>
-      <p:sp>
-        <p:nvSpPr>
-          <p:cNvPr id="2" name="Platshållare för bildobjekt 1"/>
-          <p:cNvSpPr>
-            <a:spLocks noGrp="1" noRot="1" noChangeAspect="1"/>
-          </p:cNvSpPr>
-          <p:nvPr>
-            <p:ph type="sldImg"/>
-          </p:nvPr>
-        </p:nvSpPr>
-        <p:spPr/>
-      </p:sp>
-      <p:sp>
-        <p:nvSpPr>
-          <p:cNvPr id="3" name="Platshållare för anteckningar 2"/>
-          <p:cNvSpPr>
-            <a:spLocks noGrp="1"/>
-          </p:cNvSpPr>
-          <p:nvPr>
-            <p:ph type="body" idx="1"/>
-          </p:nvPr>
-        </p:nvSpPr>
-        <p:spPr/>
-        <p:txBody>
-          <a:bodyPr/>
-          <a:lstStyle/>
-          <a:p>
-            <a:r>
-              <a:rPr lang="en-US" dirty="0">
-                <a:ea typeface="Calibri"/>
-                <a:cs typeface="Calibri"/>
-              </a:rPr>
-              <a:t>The bar chart shows a comparison of the median tank volume between conventional and hybrid electric cars. Conclusion: Hybrid electric cars tend to have a slightly larger median tank volume than conventional cars.</a:t>
-            </a:r>
-          </a:p>
-        </p:txBody>
-      </p:sp>
-      <p:sp>
-        <p:nvSpPr>
-          <p:cNvPr id="4" name="Platshållare för bildnummer 3"/>
-          <p:cNvSpPr>
-            <a:spLocks noGrp="1"/>
-          </p:cNvSpPr>
-          <p:nvPr>
-            <p:ph type="sldNum" sz="quarter" idx="5"/>
-          </p:nvPr>
-        </p:nvSpPr>
-        <p:spPr/>
-        <p:txBody>
-          <a:bodyPr/>
-          <a:lstStyle/>
-          <a:p>
-            <a:fld id="{E2B1B8E9-9BE0-194F-B3CF-D6D0B7B1DAE8}" type="slidenum">
-              <a:rPr lang="sv-SE"/>
-              <a:pPr/>
-              <a:t>3</a:t>
-            </a:fld>
-            <a:endParaRPr lang="sv-SE"/>
-          </a:p>
-        </p:txBody>
-      </p:sp>
-    </p:spTree>
-    <p:extLst>
-      <p:ext uri="{BB962C8B-B14F-4D97-AF65-F5344CB8AC3E}">
-        <p14:creationId xmlns:p14="http://schemas.microsoft.com/office/powerpoint/2010/main" val="703507916"/>
-      </p:ext>
-    </p:extLst>
-  </p:cSld>
-  <p:clrMapOvr>
-    <a:masterClrMapping/>
-  </p:clrMapOvr>
-</p:notes>
-</file>
-
-<file path=ppt/notesSlides/notesSlide3.xml><?xml version="1.0" encoding="utf-8"?>
-<p:notes xmlns:a="http://schemas.openxmlformats.org/drawingml/2006/main" xmlns:r="http://schemas.openxmlformats.org/officeDocument/2006/relationships" xmlns:p="http://schemas.openxmlformats.org/presentationml/2006/main">
-  <p:cSld>
-    <p:spTree>
-      <p:nvGrpSpPr>
-        <p:cNvPr id="1" name=""/>
-        <p:cNvGrpSpPr/>
-        <p:nvPr/>
-      </p:nvGrpSpPr>
-      <p:grpSpPr>
-        <a:xfrm>
-          <a:off x="0" y="0"/>
-          <a:ext cx="0" cy="0"/>
-          <a:chOff x="0" y="0"/>
-          <a:chExt cx="0" cy="0"/>
-        </a:xfrm>
-      </p:grpSpPr>
-      <p:sp>
-        <p:nvSpPr>
-          <p:cNvPr id="2" name="Platshållare för bildobjekt 1"/>
-          <p:cNvSpPr>
-            <a:spLocks noGrp="1" noRot="1" noChangeAspect="1"/>
-          </p:cNvSpPr>
-          <p:nvPr>
-            <p:ph type="sldImg"/>
-          </p:nvPr>
-        </p:nvSpPr>
-        <p:spPr/>
-      </p:sp>
-      <p:sp>
-        <p:nvSpPr>
-          <p:cNvPr id="3" name="Platshållare för anteckningar 2"/>
-          <p:cNvSpPr>
-            <a:spLocks noGrp="1"/>
-          </p:cNvSpPr>
-          <p:nvPr>
-            <p:ph type="body" idx="1"/>
-          </p:nvPr>
-        </p:nvSpPr>
-        <p:spPr/>
-        <p:txBody>
-          <a:bodyPr/>
-          <a:lstStyle/>
-          <a:p>
-            <a:r>
-              <a:rPr lang="en-US" dirty="0">
-                <a:ea typeface="Calibri"/>
-                <a:cs typeface="Calibri"/>
-              </a:rPr>
-              <a:t>The histogram shows the distribution of the length between conventional and electric cars. Conclusion: Electric cars tend to be longer than conventional cars, with their lengths more consistently clustered around a higher average.</a:t>
-            </a:r>
-          </a:p>
-        </p:txBody>
-      </p:sp>
-      <p:sp>
-        <p:nvSpPr>
-          <p:cNvPr id="4" name="Platshållare för bildnummer 3"/>
-          <p:cNvSpPr>
-            <a:spLocks noGrp="1"/>
-          </p:cNvSpPr>
-          <p:nvPr>
-            <p:ph type="sldNum" sz="quarter" idx="5"/>
-          </p:nvPr>
-        </p:nvSpPr>
-        <p:spPr/>
-        <p:txBody>
-          <a:bodyPr/>
-          <a:lstStyle/>
-          <a:p>
-            <a:fld id="{E2B1B8E9-9BE0-194F-B3CF-D6D0B7B1DAE8}" type="slidenum">
-              <a:rPr lang="sv-SE"/>
-              <a:pPr/>
-              <a:t>4</a:t>
-            </a:fld>
-            <a:endParaRPr lang="sv-SE"/>
-          </a:p>
-        </p:txBody>
-      </p:sp>
-    </p:spTree>
-    <p:extLst>
-      <p:ext uri="{BB962C8B-B14F-4D97-AF65-F5344CB8AC3E}">
-        <p14:creationId xmlns:p14="http://schemas.microsoft.com/office/powerpoint/2010/main" val="1659000141"/>
-      </p:ext>
-    </p:extLst>
-  </p:cSld>
-  <p:clrMapOvr>
-    <a:masterClrMapping/>
-  </p:clrMapOvr>
-</p:notes>
-</file>
-
-<file path=ppt/notesSlides/notesSlide4.xml><?xml version="1.0" encoding="utf-8"?>
-<p:notes xmlns:a="http://schemas.openxmlformats.org/drawingml/2006/main" xmlns:r="http://schemas.openxmlformats.org/officeDocument/2006/relationships" xmlns:p="http://schemas.openxmlformats.org/presentationml/2006/main">
-  <p:cSld>
-    <p:spTree>
-      <p:nvGrpSpPr>
-        <p:cNvPr id="1" name="">
-          <a:extLst>
-            <a:ext uri="{FF2B5EF4-FFF2-40B4-BE49-F238E27FC236}">
-              <a16:creationId xmlns:a16="http://schemas.microsoft.com/office/drawing/2014/main" id="{44B9CD1D-8835-1F40-622A-F6699566877B}"/>
-            </a:ext>
-          </a:extLst>
-        </p:cNvPr>
-        <p:cNvGrpSpPr/>
-        <p:nvPr/>
-      </p:nvGrpSpPr>
-      <p:grpSpPr>
-        <a:xfrm>
-          <a:off x="0" y="0"/>
-          <a:ext cx="0" cy="0"/>
-          <a:chOff x="0" y="0"/>
-          <a:chExt cx="0" cy="0"/>
-        </a:xfrm>
-      </p:grpSpPr>
-      <p:sp>
-        <p:nvSpPr>
-          <p:cNvPr id="2" name="Platshållare för bildobjekt 1">
-            <a:extLst>
-              <a:ext uri="{FF2B5EF4-FFF2-40B4-BE49-F238E27FC236}">
-                <a16:creationId xmlns:a16="http://schemas.microsoft.com/office/drawing/2014/main" id="{D15A0CD4-6F9E-E296-3D38-5A9FB62B692D}"/>
-              </a:ext>
-            </a:extLst>
-          </p:cNvPr>
-          <p:cNvSpPr>
-            <a:spLocks noGrp="1" noRot="1" noChangeAspect="1"/>
-          </p:cNvSpPr>
-          <p:nvPr>
-            <p:ph type="sldImg"/>
-          </p:nvPr>
-        </p:nvSpPr>
-        <p:spPr/>
-      </p:sp>
-      <p:sp>
-        <p:nvSpPr>
-          <p:cNvPr id="3" name="Platshållare för anteckningar 2">
-            <a:extLst>
-              <a:ext uri="{FF2B5EF4-FFF2-40B4-BE49-F238E27FC236}">
-                <a16:creationId xmlns:a16="http://schemas.microsoft.com/office/drawing/2014/main" id="{F79C568B-94C1-C63F-27B2-2844483BB90D}"/>
-              </a:ext>
-            </a:extLst>
-          </p:cNvPr>
-          <p:cNvSpPr>
-            <a:spLocks noGrp="1"/>
-          </p:cNvSpPr>
-          <p:nvPr>
-            <p:ph type="body" idx="1"/>
-          </p:nvPr>
-        </p:nvSpPr>
-        <p:spPr/>
-        <p:txBody>
-          <a:bodyPr/>
-          <a:lstStyle/>
-          <a:p>
-            <a:r>
-              <a:rPr lang="en-US" dirty="0">
-                <a:ea typeface="Calibri"/>
-                <a:cs typeface="Calibri"/>
-              </a:rPr>
-              <a:t>The bar chart shows a comparison of the median tank volume between conventional and hybrid electric cars. Conclusion: Hybrid electric cars tend to have a slightly larger median tank volume than conventional cars.</a:t>
-            </a:r>
-          </a:p>
-        </p:txBody>
-      </p:sp>
-      <p:sp>
-        <p:nvSpPr>
-          <p:cNvPr id="4" name="Platshållare för bildnummer 3">
-            <a:extLst>
-              <a:ext uri="{FF2B5EF4-FFF2-40B4-BE49-F238E27FC236}">
-                <a16:creationId xmlns:a16="http://schemas.microsoft.com/office/drawing/2014/main" id="{B8A43239-2016-0492-5E41-A2B9C940BFFC}"/>
-              </a:ext>
-            </a:extLst>
-          </p:cNvPr>
-          <p:cNvSpPr>
-            <a:spLocks noGrp="1"/>
-          </p:cNvSpPr>
-          <p:nvPr>
-            <p:ph type="sldNum" sz="quarter" idx="5"/>
-          </p:nvPr>
-        </p:nvSpPr>
-        <p:spPr/>
-        <p:txBody>
-          <a:bodyPr/>
-          <a:lstStyle/>
-          <a:p>
-            <a:fld id="{E2B1B8E9-9BE0-194F-B3CF-D6D0B7B1DAE8}" type="slidenum">
-              <a:rPr lang="sv-SE"/>
-              <a:pPr/>
-              <a:t>5</a:t>
-            </a:fld>
-            <a:endParaRPr lang="sv-SE"/>
-          </a:p>
-        </p:txBody>
-      </p:sp>
-    </p:spTree>
-    <p:extLst>
-      <p:ext uri="{BB962C8B-B14F-4D97-AF65-F5344CB8AC3E}">
-        <p14:creationId xmlns:p14="http://schemas.microsoft.com/office/powerpoint/2010/main" val="2142686524"/>
-      </p:ext>
-    </p:extLst>
-  </p:cSld>
-  <p:clrMapOvr>
-    <a:masterClrMapping/>
-  </p:clrMapOvr>
-</p:notes>
-</file>
-
-<file path=ppt/notesSlides/notesSlide5.xml><?xml version="1.0" encoding="utf-8"?>
-<p:notes xmlns:a="http://schemas.openxmlformats.org/drawingml/2006/main" xmlns:r="http://schemas.openxmlformats.org/officeDocument/2006/relationships" xmlns:p="http://schemas.openxmlformats.org/presentationml/2006/main">
-  <p:cSld>
-    <p:spTree>
-      <p:nvGrpSpPr>
-        <p:cNvPr id="1" name="">
-          <a:extLst>
-            <a:ext uri="{FF2B5EF4-FFF2-40B4-BE49-F238E27FC236}">
-              <a16:creationId xmlns:a16="http://schemas.microsoft.com/office/drawing/2014/main" id="{A85FFB02-FDE8-FA35-ACE5-56F9F8DB1607}"/>
-            </a:ext>
-          </a:extLst>
-        </p:cNvPr>
-        <p:cNvGrpSpPr/>
-        <p:nvPr/>
-      </p:nvGrpSpPr>
-      <p:grpSpPr>
-        <a:xfrm>
-          <a:off x="0" y="0"/>
-          <a:ext cx="0" cy="0"/>
-          <a:chOff x="0" y="0"/>
-          <a:chExt cx="0" cy="0"/>
-        </a:xfrm>
-      </p:grpSpPr>
-      <p:sp>
-        <p:nvSpPr>
-          <p:cNvPr id="2" name="Platshållare för bildobjekt 1">
-            <a:extLst>
-              <a:ext uri="{FF2B5EF4-FFF2-40B4-BE49-F238E27FC236}">
-                <a16:creationId xmlns:a16="http://schemas.microsoft.com/office/drawing/2014/main" id="{B77442F5-BECA-2317-EED4-22E892CE09DC}"/>
-              </a:ext>
-            </a:extLst>
-          </p:cNvPr>
-          <p:cNvSpPr>
-            <a:spLocks noGrp="1" noRot="1" noChangeAspect="1"/>
-          </p:cNvSpPr>
-          <p:nvPr>
-            <p:ph type="sldImg"/>
-          </p:nvPr>
-        </p:nvSpPr>
-        <p:spPr/>
-      </p:sp>
-      <p:sp>
-        <p:nvSpPr>
-          <p:cNvPr id="3" name="Platshållare för anteckningar 2">
-            <a:extLst>
-              <a:ext uri="{FF2B5EF4-FFF2-40B4-BE49-F238E27FC236}">
-                <a16:creationId xmlns:a16="http://schemas.microsoft.com/office/drawing/2014/main" id="{AF069040-0921-1E19-A46F-61B816877098}"/>
-              </a:ext>
-            </a:extLst>
-          </p:cNvPr>
-          <p:cNvSpPr>
-            <a:spLocks noGrp="1"/>
-          </p:cNvSpPr>
-          <p:nvPr>
-            <p:ph type="body" idx="1"/>
-          </p:nvPr>
-        </p:nvSpPr>
-        <p:spPr/>
-        <p:txBody>
-          <a:bodyPr/>
-          <a:lstStyle/>
-          <a:p>
-            <a:r>
-              <a:rPr lang="en-US" dirty="0">
-                <a:ea typeface="Calibri"/>
-                <a:cs typeface="Calibri"/>
-              </a:rPr>
-              <a:t>The histogram shows the distribution of the length between conventional and electric cars. Conclusion: Electric cars tend to be longer than conventional cars, with their lengths more consistently clustered around a higher average.</a:t>
-            </a:r>
-          </a:p>
-        </p:txBody>
-      </p:sp>
-      <p:sp>
-        <p:nvSpPr>
-          <p:cNvPr id="4" name="Platshållare för bildnummer 3">
-            <a:extLst>
-              <a:ext uri="{FF2B5EF4-FFF2-40B4-BE49-F238E27FC236}">
-                <a16:creationId xmlns:a16="http://schemas.microsoft.com/office/drawing/2014/main" id="{03284EE1-586A-C66F-03CC-D3A12C1919F6}"/>
-              </a:ext>
-            </a:extLst>
-          </p:cNvPr>
-          <p:cNvSpPr>
-            <a:spLocks noGrp="1"/>
-          </p:cNvSpPr>
-          <p:nvPr>
-            <p:ph type="sldNum" sz="quarter" idx="5"/>
-          </p:nvPr>
-        </p:nvSpPr>
-        <p:spPr/>
-        <p:txBody>
-          <a:bodyPr/>
-          <a:lstStyle/>
-          <a:p>
-            <a:fld id="{E2B1B8E9-9BE0-194F-B3CF-D6D0B7B1DAE8}" type="slidenum">
-              <a:rPr lang="sv-SE"/>
-              <a:pPr/>
-              <a:t>6</a:t>
-            </a:fld>
-            <a:endParaRPr lang="sv-SE"/>
-          </a:p>
-        </p:txBody>
-      </p:sp>
-    </p:spTree>
-    <p:extLst>
-      <p:ext uri="{BB962C8B-B14F-4D97-AF65-F5344CB8AC3E}">
-        <p14:creationId xmlns:p14="http://schemas.microsoft.com/office/powerpoint/2010/main" val="1150643376"/>
-      </p:ext>
-    </p:extLst>
-  </p:cSld>
-  <p:clrMapOvr>
-    <a:masterClrMapping/>
-  </p:clrMapOvr>
-</p:notes>
-</file>
-
-<file path=ppt/notesSlides/notesSlide6.xml><?xml version="1.0" encoding="utf-8"?>
-<p:notes xmlns:a="http://schemas.openxmlformats.org/drawingml/2006/main" xmlns:r="http://schemas.openxmlformats.org/officeDocument/2006/relationships" xmlns:p="http://schemas.openxmlformats.org/presentationml/2006/main">
-  <p:cSld>
-    <p:spTree>
-      <p:nvGrpSpPr>
-        <p:cNvPr id="1" name="">
-          <a:extLst>
-            <a:ext uri="{FF2B5EF4-FFF2-40B4-BE49-F238E27FC236}">
-              <a16:creationId xmlns:a16="http://schemas.microsoft.com/office/drawing/2014/main" id="{A37E4CA4-5D84-A8E9-A9B4-55D94BDAAEC9}"/>
-            </a:ext>
-          </a:extLst>
-        </p:cNvPr>
-        <p:cNvGrpSpPr/>
-        <p:nvPr/>
-      </p:nvGrpSpPr>
-      <p:grpSpPr>
-        <a:xfrm>
-          <a:off x="0" y="0"/>
-          <a:ext cx="0" cy="0"/>
-          <a:chOff x="0" y="0"/>
-          <a:chExt cx="0" cy="0"/>
-        </a:xfrm>
-      </p:grpSpPr>
-      <p:sp>
-        <p:nvSpPr>
-          <p:cNvPr id="2" name="Platshållare för bildobjekt 1">
-            <a:extLst>
-              <a:ext uri="{FF2B5EF4-FFF2-40B4-BE49-F238E27FC236}">
-                <a16:creationId xmlns:a16="http://schemas.microsoft.com/office/drawing/2014/main" id="{6DFC6F62-8E6D-B42F-1AE3-F4B782AB672C}"/>
-              </a:ext>
-            </a:extLst>
-          </p:cNvPr>
-          <p:cNvSpPr>
-            <a:spLocks noGrp="1" noRot="1" noChangeAspect="1"/>
-          </p:cNvSpPr>
-          <p:nvPr>
-            <p:ph type="sldImg"/>
-          </p:nvPr>
-        </p:nvSpPr>
-        <p:spPr/>
-      </p:sp>
-      <p:sp>
-        <p:nvSpPr>
-          <p:cNvPr id="3" name="Platshållare för anteckningar 2">
-            <a:extLst>
-              <a:ext uri="{FF2B5EF4-FFF2-40B4-BE49-F238E27FC236}">
-                <a16:creationId xmlns:a16="http://schemas.microsoft.com/office/drawing/2014/main" id="{50A3E7A7-2784-CF72-5FCA-BCE35E3A0F8B}"/>
-              </a:ext>
-            </a:extLst>
-          </p:cNvPr>
-          <p:cNvSpPr>
-            <a:spLocks noGrp="1"/>
-          </p:cNvSpPr>
-          <p:nvPr>
-            <p:ph type="body" idx="1"/>
-          </p:nvPr>
-        </p:nvSpPr>
-        <p:spPr/>
-        <p:txBody>
-          <a:bodyPr/>
-          <a:lstStyle/>
-          <a:p>
-            <a:r>
-              <a:rPr lang="en-US" dirty="0">
-                <a:ea typeface="Calibri"/>
-                <a:cs typeface="Calibri"/>
-              </a:rPr>
-              <a:t>The bar chart shows a comparison of the median tank volume between conventional and hybrid electric cars. Conclusion: Hybrid electric cars tend to have a slightly larger median tank volume than conventional cars.</a:t>
-            </a:r>
-          </a:p>
-        </p:txBody>
-      </p:sp>
-      <p:sp>
-        <p:nvSpPr>
-          <p:cNvPr id="4" name="Platshållare för bildnummer 3">
-            <a:extLst>
-              <a:ext uri="{FF2B5EF4-FFF2-40B4-BE49-F238E27FC236}">
-                <a16:creationId xmlns:a16="http://schemas.microsoft.com/office/drawing/2014/main" id="{3B7F6B3E-DD62-B7E4-EB7E-419BFAE9382E}"/>
-              </a:ext>
-            </a:extLst>
-          </p:cNvPr>
-          <p:cNvSpPr>
-            <a:spLocks noGrp="1"/>
-          </p:cNvSpPr>
-          <p:nvPr>
-            <p:ph type="sldNum" sz="quarter" idx="5"/>
-          </p:nvPr>
-        </p:nvSpPr>
-        <p:spPr/>
-        <p:txBody>
-          <a:bodyPr/>
-          <a:lstStyle/>
-          <a:p>
-            <a:fld id="{E2B1B8E9-9BE0-194F-B3CF-D6D0B7B1DAE8}" type="slidenum">
-              <a:rPr lang="sv-SE"/>
-              <a:pPr/>
-              <a:t>7</a:t>
-            </a:fld>
-            <a:endParaRPr lang="sv-SE"/>
-          </a:p>
-        </p:txBody>
-      </p:sp>
-    </p:spTree>
-    <p:extLst>
-      <p:ext uri="{BB962C8B-B14F-4D97-AF65-F5344CB8AC3E}">
-        <p14:creationId xmlns:p14="http://schemas.microsoft.com/office/powerpoint/2010/main" val="2599846022"/>
-      </p:ext>
-    </p:extLst>
-  </p:cSld>
-  <p:clrMapOvr>
-    <a:masterClrMapping/>
-  </p:clrMapOvr>
-</p:notes>
-</file>
-
-<file path=ppt/notesSlides/notesSlide7.xml><?xml version="1.0" encoding="utf-8"?>
-<p:notes xmlns:a="http://schemas.openxmlformats.org/drawingml/2006/main" xmlns:r="http://schemas.openxmlformats.org/officeDocument/2006/relationships" xmlns:p="http://schemas.openxmlformats.org/presentationml/2006/main">
-  <p:cSld>
-    <p:spTree>
-      <p:nvGrpSpPr>
-        <p:cNvPr id="1" name="">
-          <a:extLst>
-            <a:ext uri="{FF2B5EF4-FFF2-40B4-BE49-F238E27FC236}">
-              <a16:creationId xmlns:a16="http://schemas.microsoft.com/office/drawing/2014/main" id="{4F587511-1BAA-290B-1BCA-0F2665E261EB}"/>
-            </a:ext>
-          </a:extLst>
-        </p:cNvPr>
-        <p:cNvGrpSpPr/>
-        <p:nvPr/>
-      </p:nvGrpSpPr>
-      <p:grpSpPr>
-        <a:xfrm>
-          <a:off x="0" y="0"/>
-          <a:ext cx="0" cy="0"/>
-          <a:chOff x="0" y="0"/>
-          <a:chExt cx="0" cy="0"/>
-        </a:xfrm>
-      </p:grpSpPr>
-      <p:sp>
-        <p:nvSpPr>
-          <p:cNvPr id="2" name="Platshållare för bildobjekt 1">
-            <a:extLst>
-              <a:ext uri="{FF2B5EF4-FFF2-40B4-BE49-F238E27FC236}">
-                <a16:creationId xmlns:a16="http://schemas.microsoft.com/office/drawing/2014/main" id="{32A2CC3E-F245-CD38-3D23-41DC13BD23BE}"/>
-              </a:ext>
-            </a:extLst>
-          </p:cNvPr>
-          <p:cNvSpPr>
-            <a:spLocks noGrp="1" noRot="1" noChangeAspect="1"/>
-          </p:cNvSpPr>
-          <p:nvPr>
-            <p:ph type="sldImg"/>
-          </p:nvPr>
-        </p:nvSpPr>
-        <p:spPr/>
-      </p:sp>
-      <p:sp>
-        <p:nvSpPr>
-          <p:cNvPr id="3" name="Platshållare för anteckningar 2">
-            <a:extLst>
-              <a:ext uri="{FF2B5EF4-FFF2-40B4-BE49-F238E27FC236}">
-                <a16:creationId xmlns:a16="http://schemas.microsoft.com/office/drawing/2014/main" id="{E7E57BBC-19AF-4A30-0C2E-568426151511}"/>
-              </a:ext>
-            </a:extLst>
-          </p:cNvPr>
-          <p:cNvSpPr>
-            <a:spLocks noGrp="1"/>
-          </p:cNvSpPr>
-          <p:nvPr>
-            <p:ph type="body" idx="1"/>
-          </p:nvPr>
-        </p:nvSpPr>
-        <p:spPr/>
-        <p:txBody>
-          <a:bodyPr/>
-          <a:lstStyle/>
-          <a:p>
-            <a:r>
-              <a:rPr lang="en-US" dirty="0">
-                <a:ea typeface="Calibri"/>
-                <a:cs typeface="Calibri"/>
-              </a:rPr>
-              <a:t>The histogram shows the distribution of the length between conventional and electric cars. Conclusion: Electric cars tend to be longer than conventional cars, with their lengths more consistently clustered around a higher average.</a:t>
-            </a:r>
-          </a:p>
-        </p:txBody>
-      </p:sp>
-      <p:sp>
-        <p:nvSpPr>
-          <p:cNvPr id="4" name="Platshållare för bildnummer 3">
-            <a:extLst>
-              <a:ext uri="{FF2B5EF4-FFF2-40B4-BE49-F238E27FC236}">
-                <a16:creationId xmlns:a16="http://schemas.microsoft.com/office/drawing/2014/main" id="{4710271A-4E76-87F7-9743-6CFFE895EF40}"/>
-              </a:ext>
-            </a:extLst>
-          </p:cNvPr>
-          <p:cNvSpPr>
-            <a:spLocks noGrp="1"/>
-          </p:cNvSpPr>
-          <p:nvPr>
-            <p:ph type="sldNum" sz="quarter" idx="5"/>
-          </p:nvPr>
-        </p:nvSpPr>
-        <p:spPr/>
-        <p:txBody>
-          <a:bodyPr/>
-          <a:lstStyle/>
-          <a:p>
-            <a:fld id="{E2B1B8E9-9BE0-194F-B3CF-D6D0B7B1DAE8}" type="slidenum">
-              <a:rPr lang="sv-SE"/>
-              <a:pPr/>
-              <a:t>8</a:t>
-            </a:fld>
-            <a:endParaRPr lang="sv-SE"/>
-          </a:p>
-        </p:txBody>
-      </p:sp>
-    </p:spTree>
-    <p:extLst>
-      <p:ext uri="{BB962C8B-B14F-4D97-AF65-F5344CB8AC3E}">
-        <p14:creationId xmlns:p14="http://schemas.microsoft.com/office/powerpoint/2010/main" val="4093272745"/>
-      </p:ext>
-    </p:extLst>
-  </p:cSld>
-  <p:clrMapOvr>
-    <a:masterClrMapping/>
-  </p:clrMapOvr>
-</p:notes>
-</file>
-
-<file path=ppt/notesSlides/notesSlide8.xml><?xml version="1.0" encoding="utf-8"?>
-<p:notes xmlns:a="http://schemas.openxmlformats.org/drawingml/2006/main" xmlns:r="http://schemas.openxmlformats.org/officeDocument/2006/relationships" xmlns:p="http://schemas.openxmlformats.org/presentationml/2006/main">
-  <p:cSld>
-    <p:spTree>
-      <p:nvGrpSpPr>
-        <p:cNvPr id="1" name="">
-          <a:extLst>
-            <a:ext uri="{FF2B5EF4-FFF2-40B4-BE49-F238E27FC236}">
-              <a16:creationId xmlns:a16="http://schemas.microsoft.com/office/drawing/2014/main" id="{132665FC-CAA2-18AD-E3A5-F41529CD4D5B}"/>
-            </a:ext>
-          </a:extLst>
-        </p:cNvPr>
-        <p:cNvGrpSpPr/>
-        <p:nvPr/>
-      </p:nvGrpSpPr>
-      <p:grpSpPr>
-        <a:xfrm>
-          <a:off x="0" y="0"/>
-          <a:ext cx="0" cy="0"/>
-          <a:chOff x="0" y="0"/>
-          <a:chExt cx="0" cy="0"/>
-        </a:xfrm>
-      </p:grpSpPr>
-      <p:sp>
-        <p:nvSpPr>
-          <p:cNvPr id="2" name="Platshållare för bildobjekt 1">
-            <a:extLst>
-              <a:ext uri="{FF2B5EF4-FFF2-40B4-BE49-F238E27FC236}">
-                <a16:creationId xmlns:a16="http://schemas.microsoft.com/office/drawing/2014/main" id="{1733BFD4-8280-C734-8203-85877B523259}"/>
-              </a:ext>
-            </a:extLst>
-          </p:cNvPr>
-          <p:cNvSpPr>
-            <a:spLocks noGrp="1" noRot="1" noChangeAspect="1"/>
-          </p:cNvSpPr>
-          <p:nvPr>
-            <p:ph type="sldImg"/>
-          </p:nvPr>
-        </p:nvSpPr>
-        <p:spPr/>
-      </p:sp>
-      <p:sp>
-        <p:nvSpPr>
-          <p:cNvPr id="3" name="Platshållare för anteckningar 2">
-            <a:extLst>
-              <a:ext uri="{FF2B5EF4-FFF2-40B4-BE49-F238E27FC236}">
-                <a16:creationId xmlns:a16="http://schemas.microsoft.com/office/drawing/2014/main" id="{AED15B13-DBF2-0083-6D0B-B173DB69EF7D}"/>
-              </a:ext>
-            </a:extLst>
-          </p:cNvPr>
-          <p:cNvSpPr>
-            <a:spLocks noGrp="1"/>
-          </p:cNvSpPr>
-          <p:nvPr>
-            <p:ph type="body" idx="1"/>
-          </p:nvPr>
-        </p:nvSpPr>
-        <p:spPr/>
-        <p:txBody>
-          <a:bodyPr/>
-          <a:lstStyle/>
-          <a:p>
-            <a:r>
-              <a:rPr lang="en-US" dirty="0">
-                <a:ea typeface="Calibri"/>
-                <a:cs typeface="Calibri"/>
-              </a:rPr>
-              <a:t>The bar chart shows a comparison of the median tank volume between conventional and hybrid electric cars. Conclusion: Hybrid electric cars tend to have a slightly larger median tank volume than conventional cars.</a:t>
-            </a:r>
-          </a:p>
-        </p:txBody>
-      </p:sp>
-      <p:sp>
-        <p:nvSpPr>
-          <p:cNvPr id="4" name="Platshållare för bildnummer 3">
-            <a:extLst>
-              <a:ext uri="{FF2B5EF4-FFF2-40B4-BE49-F238E27FC236}">
-                <a16:creationId xmlns:a16="http://schemas.microsoft.com/office/drawing/2014/main" id="{6C2CCFF7-79D7-56C4-221C-401175EE8D0F}"/>
-              </a:ext>
-            </a:extLst>
-          </p:cNvPr>
-          <p:cNvSpPr>
-            <a:spLocks noGrp="1"/>
-          </p:cNvSpPr>
-          <p:nvPr>
-            <p:ph type="sldNum" sz="quarter" idx="5"/>
-          </p:nvPr>
-        </p:nvSpPr>
-        <p:spPr/>
-        <p:txBody>
-          <a:bodyPr/>
-          <a:lstStyle/>
-          <a:p>
-            <a:fld id="{E2B1B8E9-9BE0-194F-B3CF-D6D0B7B1DAE8}" type="slidenum">
-              <a:rPr lang="sv-SE"/>
-              <a:pPr/>
-              <a:t>9</a:t>
-            </a:fld>
-            <a:endParaRPr lang="sv-SE"/>
-          </a:p>
-        </p:txBody>
-      </p:sp>
-    </p:spTree>
-    <p:extLst>
-      <p:ext uri="{BB962C8B-B14F-4D97-AF65-F5344CB8AC3E}">
-        <p14:creationId xmlns:p14="http://schemas.microsoft.com/office/powerpoint/2010/main" val="1876836454"/>
-      </p:ext>
-    </p:extLst>
-  </p:cSld>
-  <p:clrMapOvr>
-    <a:masterClrMapping/>
-  </p:clrMapOvr>
-</p:notes>
-</file>
-
-<file path=ppt/notesSlides/notesSlide9.xml><?xml version="1.0" encoding="utf-8"?>
-<p:notes xmlns:a="http://schemas.openxmlformats.org/drawingml/2006/main" xmlns:r="http://schemas.openxmlformats.org/officeDocument/2006/relationships" xmlns:p="http://schemas.openxmlformats.org/presentationml/2006/main">
-  <p:cSld>
-    <p:spTree>
-      <p:nvGrpSpPr>
-        <p:cNvPr id="1" name="">
-          <a:extLst>
-            <a:ext uri="{FF2B5EF4-FFF2-40B4-BE49-F238E27FC236}">
-              <a16:creationId xmlns:a16="http://schemas.microsoft.com/office/drawing/2014/main" id="{60F5E7B7-5D28-5030-D7FE-E3E024832551}"/>
-            </a:ext>
-          </a:extLst>
-        </p:cNvPr>
-        <p:cNvGrpSpPr/>
-        <p:nvPr/>
-      </p:nvGrpSpPr>
-      <p:grpSpPr>
-        <a:xfrm>
-          <a:off x="0" y="0"/>
-          <a:ext cx="0" cy="0"/>
-          <a:chOff x="0" y="0"/>
-          <a:chExt cx="0" cy="0"/>
-        </a:xfrm>
-      </p:grpSpPr>
-      <p:sp>
-        <p:nvSpPr>
-          <p:cNvPr id="2" name="Platshållare för bildobjekt 1">
-            <a:extLst>
-              <a:ext uri="{FF2B5EF4-FFF2-40B4-BE49-F238E27FC236}">
-                <a16:creationId xmlns:a16="http://schemas.microsoft.com/office/drawing/2014/main" id="{14A585F4-D6A0-0135-E1B2-497CAE58907C}"/>
-              </a:ext>
-            </a:extLst>
-          </p:cNvPr>
-          <p:cNvSpPr>
-            <a:spLocks noGrp="1" noRot="1" noChangeAspect="1"/>
-          </p:cNvSpPr>
-          <p:nvPr>
-            <p:ph type="sldImg"/>
-          </p:nvPr>
-        </p:nvSpPr>
-        <p:spPr/>
-      </p:sp>
-      <p:sp>
-        <p:nvSpPr>
-          <p:cNvPr id="3" name="Platshållare för anteckningar 2">
-            <a:extLst>
-              <a:ext uri="{FF2B5EF4-FFF2-40B4-BE49-F238E27FC236}">
-                <a16:creationId xmlns:a16="http://schemas.microsoft.com/office/drawing/2014/main" id="{8C4421F4-6E0F-3996-A765-32D1957F3333}"/>
-              </a:ext>
-            </a:extLst>
-          </p:cNvPr>
-          <p:cNvSpPr>
-            <a:spLocks noGrp="1"/>
-          </p:cNvSpPr>
-          <p:nvPr>
-            <p:ph type="body" idx="1"/>
-          </p:nvPr>
-        </p:nvSpPr>
-        <p:spPr/>
-        <p:txBody>
-          <a:bodyPr/>
-          <a:lstStyle/>
-          <a:p>
-            <a:r>
-              <a:rPr lang="en-US" dirty="0">
-                <a:ea typeface="Calibri"/>
-                <a:cs typeface="Calibri"/>
-              </a:rPr>
-              <a:t>The histogram shows the distribution of the length between conventional and electric cars. Conclusion: Electric cars tend to be longer than conventional cars, with their lengths more consistently clustered around a higher average.</a:t>
-            </a:r>
-          </a:p>
-        </p:txBody>
-      </p:sp>
-      <p:sp>
-        <p:nvSpPr>
-          <p:cNvPr id="4" name="Platshållare för bildnummer 3">
-            <a:extLst>
-              <a:ext uri="{FF2B5EF4-FFF2-40B4-BE49-F238E27FC236}">
-                <a16:creationId xmlns:a16="http://schemas.microsoft.com/office/drawing/2014/main" id="{411B4FDB-8D5F-33CC-F641-54148EA995A5}"/>
-              </a:ext>
-            </a:extLst>
-          </p:cNvPr>
-          <p:cNvSpPr>
-            <a:spLocks noGrp="1"/>
-          </p:cNvSpPr>
-          <p:nvPr>
-            <p:ph type="sldNum" sz="quarter" idx="5"/>
-          </p:nvPr>
-        </p:nvSpPr>
-        <p:spPr/>
-        <p:txBody>
-          <a:bodyPr/>
-          <a:lstStyle/>
-          <a:p>
-            <a:fld id="{E2B1B8E9-9BE0-194F-B3CF-D6D0B7B1DAE8}" type="slidenum">
-              <a:rPr lang="sv-SE"/>
-              <a:pPr/>
-              <a:t>10</a:t>
-            </a:fld>
-            <a:endParaRPr lang="sv-SE"/>
-          </a:p>
-        </p:txBody>
-      </p:sp>
-    </p:spTree>
-    <p:extLst>
-      <p:ext uri="{BB962C8B-B14F-4D97-AF65-F5344CB8AC3E}">
-        <p14:creationId xmlns:p14="http://schemas.microsoft.com/office/powerpoint/2010/main" val="2699443482"/>
-      </p:ext>
-    </p:extLst>
-  </p:cSld>
-  <p:clrMapOvr>
-    <a:masterClrMapping/>
-  </p:clrMapOvr>
-</p:notes>
-</file>
-
 <file path=ppt/slideLayouts/slideLayout1.xml><?xml version="1.0" encoding="utf-8"?>
 <p:sldLayout xmlns:a="http://schemas.openxmlformats.org/drawingml/2006/main" xmlns:r="http://schemas.openxmlformats.org/officeDocument/2006/relationships" xmlns:p="http://schemas.openxmlformats.org/presentationml/2006/main" showMasterSp="0" preserve="1" userDrawn="1">
   <p:cSld name="Startsida grön">
@@ -2146,7 +1280,7 @@
             </a:pPr>
             <a:fld id="{78286638-E000-784D-B9E7-19A664CA2261}" type="datetime1">
               <a:rPr lang="sv-SE" smtClean="0"/>
-              <a:t>2025-04-16</a:t>
+              <a:t>2025-05-01</a:t>
             </a:fld>
             <a:endParaRPr lang="sv-SE" dirty="0"/>
           </a:p>
@@ -2529,7 +1663,7 @@
             </a:pPr>
             <a:fld id="{78286638-E000-784D-B9E7-19A664CA2261}" type="datetime1">
               <a:rPr lang="sv-SE" smtClean="0"/>
-              <a:t>2025-04-16</a:t>
+              <a:t>2025-05-01</a:t>
             </a:fld>
             <a:endParaRPr lang="sv-SE" dirty="0"/>
           </a:p>
@@ -2928,7 +2062,7 @@
             </a:pPr>
             <a:fld id="{78286638-E000-784D-B9E7-19A664CA2261}" type="datetime1">
               <a:rPr lang="sv-SE" smtClean="0"/>
-              <a:t>2025-04-16</a:t>
+              <a:t>2025-05-01</a:t>
             </a:fld>
             <a:endParaRPr lang="sv-SE" dirty="0"/>
           </a:p>
@@ -3204,7 +2338,7 @@
             </a:pPr>
             <a:fld id="{78286638-E000-784D-B9E7-19A664CA2261}" type="datetime1">
               <a:rPr lang="sv-SE" smtClean="0"/>
-              <a:t>2025-04-16</a:t>
+              <a:t>2025-05-01</a:t>
             </a:fld>
             <a:endParaRPr lang="sv-SE" dirty="0"/>
           </a:p>
@@ -3560,7 +2694,7 @@
             </a:pPr>
             <a:fld id="{78286638-E000-784D-B9E7-19A664CA2261}" type="datetime1">
               <a:rPr lang="sv-SE" smtClean="0"/>
-              <a:t>2025-04-16</a:t>
+              <a:t>2025-05-01</a:t>
             </a:fld>
             <a:endParaRPr lang="sv-SE" dirty="0"/>
           </a:p>
@@ -3776,7 +2910,7 @@
             </a:pPr>
             <a:fld id="{78286638-E000-784D-B9E7-19A664CA2261}" type="datetime1">
               <a:rPr lang="sv-SE" smtClean="0"/>
-              <a:t>2025-04-16</a:t>
+              <a:t>2025-05-01</a:t>
             </a:fld>
             <a:endParaRPr lang="sv-SE" dirty="0"/>
           </a:p>
@@ -3970,7 +3104,7 @@
             </a:pPr>
             <a:fld id="{78286638-E000-784D-B9E7-19A664CA2261}" type="datetime1">
               <a:rPr lang="sv-SE" smtClean="0"/>
-              <a:t>2025-04-16</a:t>
+              <a:t>2025-05-01</a:t>
             </a:fld>
             <a:endParaRPr lang="sv-SE" dirty="0"/>
           </a:p>
@@ -4205,7 +3339,7 @@
             </a:pPr>
             <a:fld id="{78286638-E000-784D-B9E7-19A664CA2261}" type="datetime1">
               <a:rPr lang="sv-SE" smtClean="0"/>
-              <a:t>2025-04-16</a:t>
+              <a:t>2025-05-01</a:t>
             </a:fld>
             <a:endParaRPr lang="sv-SE" dirty="0"/>
           </a:p>
@@ -4526,7 +3660,7 @@
             </a:pPr>
             <a:fld id="{78286638-E000-784D-B9E7-19A664CA2261}" type="datetime1">
               <a:rPr lang="sv-SE" smtClean="0"/>
-              <a:t>2025-04-16</a:t>
+              <a:t>2025-05-01</a:t>
             </a:fld>
             <a:endParaRPr lang="sv-SE" dirty="0"/>
           </a:p>
@@ -4765,7 +3899,7 @@
             </a:pPr>
             <a:fld id="{78286638-E000-784D-B9E7-19A664CA2261}" type="datetime1">
               <a:rPr lang="sv-SE" smtClean="0"/>
-              <a:t>2025-04-16</a:t>
+              <a:t>2025-05-01</a:t>
             </a:fld>
             <a:endParaRPr lang="sv-SE" dirty="0"/>
           </a:p>
@@ -4889,14 +4023,14 @@
           </a:ln>
           <a:extLst>
             <a:ext uri="{909E8E84-426E-40dd-AFC4-6F175D3DCCD1}">
-              <a14:hiddenFill xmlns:a14="http://schemas.microsoft.com/office/drawing/2010/main" xmlns="">
+              <a14:hiddenFill xmlns="" xmlns:a14="http://schemas.microsoft.com/office/drawing/2010/main">
                 <a:solidFill>
                   <a:srgbClr val="FFFFFF"/>
                 </a:solidFill>
               </a14:hiddenFill>
             </a:ext>
             <a:ext uri="{91240B29-F687-4f45-9708-019B960494DF}">
-              <a14:hiddenLine xmlns:a14="http://schemas.microsoft.com/office/drawing/2010/main" xmlns="" w="9525">
+              <a14:hiddenLine xmlns="" xmlns:a14="http://schemas.microsoft.com/office/drawing/2010/main" w="9525">
                 <a:solidFill>
                   <a:srgbClr val="000000"/>
                 </a:solidFill>
@@ -4906,7 +4040,7 @@
               </a14:hiddenLine>
             </a:ext>
             <a:ext uri="{FAA26D3D-D897-4be2-8F04-BA451C77F1D7}">
-              <ma14:placeholderFlag xmlns:ma14="http://schemas.microsoft.com/office/mac/drawingml/2011/main" xmlns="" val="1"/>
+              <ma14:placeholderFlag xmlns="" xmlns:ma14="http://schemas.microsoft.com/office/mac/drawingml/2011/main" val="1"/>
             </a:ext>
           </a:extLst>
         </p:spPr>
@@ -4950,14 +4084,14 @@
           </a:ln>
           <a:extLst>
             <a:ext uri="{909E8E84-426E-40dd-AFC4-6F175D3DCCD1}">
-              <a14:hiddenFill xmlns:a14="http://schemas.microsoft.com/office/drawing/2010/main" xmlns="">
+              <a14:hiddenFill xmlns="" xmlns:a14="http://schemas.microsoft.com/office/drawing/2010/main">
                 <a:solidFill>
                   <a:srgbClr val="FFFFFF"/>
                 </a:solidFill>
               </a14:hiddenFill>
             </a:ext>
             <a:ext uri="{91240B29-F687-4f45-9708-019B960494DF}">
-              <a14:hiddenLine xmlns:a14="http://schemas.microsoft.com/office/drawing/2010/main" xmlns="" w="9525">
+              <a14:hiddenLine xmlns="" xmlns:a14="http://schemas.microsoft.com/office/drawing/2010/main" w="9525">
                 <a:solidFill>
                   <a:srgbClr val="000000"/>
                 </a:solidFill>
@@ -4967,7 +4101,7 @@
               </a14:hiddenLine>
             </a:ext>
             <a:ext uri="{FAA26D3D-D897-4be2-8F04-BA451C77F1D7}">
-              <ma14:placeholderFlag xmlns:ma14="http://schemas.microsoft.com/office/mac/drawingml/2011/main" xmlns="" val="1"/>
+              <ma14:placeholderFlag xmlns="" xmlns:ma14="http://schemas.microsoft.com/office/mac/drawingml/2011/main" val="1"/>
             </a:ext>
           </a:extLst>
         </p:spPr>
@@ -5598,14 +4732,9 @@
           <a:lstStyle/>
           <a:p>
             <a:r>
-              <a:rPr lang="sv-SE" dirty="0"/>
-              <a:t>Project Assignment – Regression </a:t>
+              <a:rPr lang="en-US" noProof="0" dirty="0"/>
+              <a:t>Project Assignment – Regression Analysis</a:t>
             </a:r>
-            <a:r>
-              <a:rPr lang="sv-SE" dirty="0" err="1"/>
-              <a:t>Analysis</a:t>
-            </a:r>
-            <a:endParaRPr lang="sv-SE" dirty="0"/>
           </a:p>
         </p:txBody>
       </p:sp>
@@ -5631,32 +4760,16 @@
           <a:lstStyle/>
           <a:p>
             <a:r>
-              <a:rPr lang="sv-SE" dirty="0"/>
+              <a:rPr lang="en-US" noProof="0" dirty="0"/>
               <a:t>David </a:t>
             </a:r>
             <a:r>
-              <a:rPr lang="sv-SE" dirty="0" err="1"/>
+              <a:rPr lang="en-US" noProof="0" dirty="0" err="1"/>
               <a:t>Lienkamp</a:t>
             </a:r>
             <a:r>
-              <a:rPr lang="sv-SE" dirty="0"/>
-              <a:t>, </a:t>
-            </a:r>
-            <a:r>
-              <a:rPr lang="sv-SE" dirty="0" err="1"/>
-              <a:t>Sevval</a:t>
-            </a:r>
-            <a:r>
-              <a:rPr lang="sv-SE" dirty="0"/>
-              <a:t> </a:t>
-            </a:r>
-            <a:r>
-              <a:rPr lang="sv-SE" dirty="0" err="1"/>
-              <a:t>Sagir</a:t>
-            </a:r>
-            <a:r>
-              <a:rPr lang="sv-SE" dirty="0"/>
-              <a:t>, Raphael Sommer </a:t>
+              <a:rPr lang="en-US" noProof="0" dirty="0"/>
+              <a:t>, Sevval Sagir, Raphael Sommer </a:t>
             </a:r>
           </a:p>
         </p:txBody>
@@ -5682,7 +4795,7 @@
         <p:cNvPr id="1" name="">
           <a:extLst>
             <a:ext uri="{FF2B5EF4-FFF2-40B4-BE49-F238E27FC236}">
-              <a16:creationId xmlns:a16="http://schemas.microsoft.com/office/drawing/2014/main" id="{4E1971A3-7FBD-14FD-2C99-758D0FD84FA7}"/>
+              <a16:creationId xmlns:a16="http://schemas.microsoft.com/office/drawing/2014/main" id="{263524F9-AB91-EA13-C719-93EF3CB55358}"/>
             </a:ext>
           </a:extLst>
         </p:cNvPr>
@@ -5699,63 +4812,10 @@
       </p:grpSpPr>
       <p:sp>
         <p:nvSpPr>
-          <p:cNvPr id="6" name="Rechteck 5">
-            <a:extLst>
-              <a:ext uri="{FF2B5EF4-FFF2-40B4-BE49-F238E27FC236}">
-                <a16:creationId xmlns:a16="http://schemas.microsoft.com/office/drawing/2014/main" id="{4DEA5C00-9258-648D-5B32-D24B89E9C626}"/>
-              </a:ext>
-            </a:extLst>
-          </p:cNvPr>
-          <p:cNvSpPr/>
-          <p:nvPr/>
-        </p:nvSpPr>
-        <p:spPr>
-          <a:xfrm>
-            <a:off x="7673340" y="4328160"/>
-            <a:ext cx="1310640" cy="685800"/>
-          </a:xfrm>
-          <a:prstGeom prst="rect">
-            <a:avLst/>
-          </a:prstGeom>
-          <a:solidFill>
-            <a:schemeClr val="bg1"/>
-          </a:solidFill>
-          <a:ln>
-            <a:solidFill>
-              <a:schemeClr val="bg1"/>
-            </a:solidFill>
-          </a:ln>
-          <a:effectLst/>
-        </p:spPr>
-        <p:style>
-          <a:lnRef idx="1">
-            <a:schemeClr val="accent1"/>
-          </a:lnRef>
-          <a:fillRef idx="3">
-            <a:schemeClr val="accent1"/>
-          </a:fillRef>
-          <a:effectRef idx="2">
-            <a:schemeClr val="accent1"/>
-          </a:effectRef>
-          <a:fontRef idx="minor">
-            <a:schemeClr val="lt1"/>
-          </a:fontRef>
-        </p:style>
-        <p:txBody>
-          <a:bodyPr rtlCol="0" anchor="ctr"/>
-          <a:lstStyle/>
-          <a:p>
-            <a:pPr algn="ctr"/>
-            <a:endParaRPr lang="en-GB"/>
-          </a:p>
-        </p:txBody>
-      </p:sp>
-      <p:sp>
-        <p:nvSpPr>
-          <p:cNvPr id="2" name="Foliennummernplatzhalter 1">
-            <a:extLst>
-              <a:ext uri="{FF2B5EF4-FFF2-40B4-BE49-F238E27FC236}">
-                <a16:creationId xmlns:a16="http://schemas.microsoft.com/office/drawing/2014/main" id="{8E5A10CA-79EB-E4CF-5B35-F22E085D16B2}"/>
+          <p:cNvPr id="4" name="Foliennummernplatzhalter 3">
+            <a:extLst>
+              <a:ext uri="{FF2B5EF4-FFF2-40B4-BE49-F238E27FC236}">
+                <a16:creationId xmlns:a16="http://schemas.microsoft.com/office/drawing/2014/main" id="{E83AC524-85ED-9FBB-53F0-5AB64C223AB8}"/>
               </a:ext>
             </a:extLst>
           </p:cNvPr>
@@ -5763,7 +4823,7 @@
             <a:spLocks noGrp="1"/>
           </p:cNvSpPr>
           <p:nvPr>
-            <p:ph type="sldNum" sz="quarter" idx="10"/>
+            <p:ph type="sldNum" sz="quarter" idx="4"/>
           </p:nvPr>
         </p:nvSpPr>
         <p:spPr/>
@@ -5772,73 +4832,401 @@
           <a:lstStyle/>
           <a:p>
             <a:fld id="{610C4E4B-DC7F-8F40-B47C-DF522102C54B}" type="slidenum">
-              <a:rPr lang="sv-SE" smtClean="0"/>
+              <a:rPr lang="en-US" noProof="0" smtClean="0"/>
               <a:pPr/>
               <a:t>10</a:t>
             </a:fld>
-            <a:endParaRPr lang="sv-SE" dirty="0"/>
-          </a:p>
-        </p:txBody>
-      </p:sp>
-      <p:sp>
-        <p:nvSpPr>
-          <p:cNvPr id="5" name="Rechteck 4">
-            <a:extLst>
-              <a:ext uri="{FF2B5EF4-FFF2-40B4-BE49-F238E27FC236}">
-                <a16:creationId xmlns:a16="http://schemas.microsoft.com/office/drawing/2014/main" id="{3A6920D3-A2AB-104F-1EED-98A7A0593C52}"/>
-              </a:ext>
-            </a:extLst>
-          </p:cNvPr>
-          <p:cNvSpPr/>
+            <a:endParaRPr lang="en-US" noProof="0" dirty="0"/>
+          </a:p>
+        </p:txBody>
+      </p:sp>
+      <p:sp>
+        <p:nvSpPr>
+          <p:cNvPr id="7" name="Titel 1">
+            <a:extLst>
+              <a:ext uri="{FF2B5EF4-FFF2-40B4-BE49-F238E27FC236}">
+                <a16:creationId xmlns:a16="http://schemas.microsoft.com/office/drawing/2014/main" id="{E319D2DC-66C2-BE74-AE53-1351BDE39B77}"/>
+              </a:ext>
+            </a:extLst>
+          </p:cNvPr>
+          <p:cNvSpPr>
+            <a:spLocks noGrp="1"/>
+          </p:cNvSpPr>
+          <p:nvPr>
+            <p:ph type="ctrTitle"/>
+          </p:nvPr>
+        </p:nvSpPr>
+        <p:spPr>
+          <a:xfrm>
+            <a:off x="685800" y="0"/>
+            <a:ext cx="7772400" cy="1102519"/>
+          </a:xfrm>
+        </p:spPr>
+        <p:txBody>
+          <a:bodyPr/>
+          <a:lstStyle/>
+          <a:p>
+            <a:pPr algn="ctr"/>
+            <a:r>
+              <a:rPr lang="en-US" sz="3200" noProof="0" dirty="0"/>
+              <a:t>Fuel Consumption – Methodology</a:t>
+            </a:r>
+          </a:p>
+        </p:txBody>
+      </p:sp>
+      <p:sp>
+        <p:nvSpPr>
+          <p:cNvPr id="2" name="TextBox 1">
+            <a:extLst>
+              <a:ext uri="{FF2B5EF4-FFF2-40B4-BE49-F238E27FC236}">
+                <a16:creationId xmlns:a16="http://schemas.microsoft.com/office/drawing/2014/main" id="{517FB75C-9C41-897D-4AB0-81A3A118D342}"/>
+              </a:ext>
+            </a:extLst>
+          </p:cNvPr>
+          <p:cNvSpPr txBox="1"/>
           <p:nvPr/>
         </p:nvSpPr>
         <p:spPr>
           <a:xfrm>
-            <a:off x="7520940" y="4175760"/>
-            <a:ext cx="1310640" cy="685800"/>
+            <a:off x="447674" y="1102519"/>
+            <a:ext cx="8248651" cy="646331"/>
           </a:xfrm>
           <a:prstGeom prst="rect">
             <a:avLst/>
           </a:prstGeom>
-          <a:solidFill>
-            <a:schemeClr val="bg1"/>
-          </a:solidFill>
-          <a:ln>
-            <a:solidFill>
-              <a:schemeClr val="bg1"/>
-            </a:solidFill>
-          </a:ln>
-          <a:effectLst/>
-        </p:spPr>
-        <p:style>
-          <a:lnRef idx="1">
-            <a:schemeClr val="accent1"/>
-          </a:lnRef>
-          <a:fillRef idx="3">
-            <a:schemeClr val="accent1"/>
-          </a:fillRef>
-          <a:effectRef idx="2">
-            <a:schemeClr val="accent1"/>
-          </a:effectRef>
-          <a:fontRef idx="minor">
-            <a:schemeClr val="lt1"/>
-          </a:fontRef>
-        </p:style>
-        <p:txBody>
-          <a:bodyPr rtlCol="0" anchor="ctr"/>
+          <a:noFill/>
+        </p:spPr>
+        <p:txBody>
+          <a:bodyPr wrap="square" rtlCol="0">
+            <a:spAutoFit/>
+          </a:bodyPr>
           <a:lstStyle/>
           <a:p>
+            <a:r>
+              <a:rPr lang="en-US" sz="2000" noProof="0" dirty="0">
+                <a:solidFill>
+                  <a:srgbClr val="51AA00"/>
+                </a:solidFill>
+              </a:rPr>
+              <a:t>Common knowledge + Minitab’s Best Subset: </a:t>
+            </a:r>
+          </a:p>
+          <a:p>
+            <a:r>
+              <a:rPr lang="en-US" sz="1600" noProof="0" dirty="0"/>
+              <a:t>Power, Weight + Cylinders </a:t>
+            </a:r>
+            <a:r>
+              <a:rPr lang="en-US" sz="1600" noProof="0" dirty="0">
+                <a:sym typeface="Wingdings" pitchFamily="2" charset="2"/>
+              </a:rPr>
+              <a:t> Power/Weight Ratio, Cylinders</a:t>
+            </a:r>
+            <a:endParaRPr lang="en-US" sz="1600" noProof="0" dirty="0"/>
+          </a:p>
+        </p:txBody>
+      </p:sp>
+      <p:sp>
+        <p:nvSpPr>
+          <p:cNvPr id="11" name="TextBox 10">
+            <a:extLst>
+              <a:ext uri="{FF2B5EF4-FFF2-40B4-BE49-F238E27FC236}">
+                <a16:creationId xmlns:a16="http://schemas.microsoft.com/office/drawing/2014/main" id="{453F7F54-3845-9641-D286-0E40E464C32F}"/>
+              </a:ext>
+            </a:extLst>
+          </p:cNvPr>
+          <p:cNvSpPr txBox="1"/>
+          <p:nvPr/>
+        </p:nvSpPr>
+        <p:spPr>
+          <a:xfrm>
+            <a:off x="3215354" y="2851369"/>
+            <a:ext cx="2713290" cy="338554"/>
+          </a:xfrm>
+          <a:prstGeom prst="rect">
+            <a:avLst/>
+          </a:prstGeom>
+          <a:noFill/>
+        </p:spPr>
+        <p:txBody>
+          <a:bodyPr wrap="square">
+            <a:spAutoFit/>
+          </a:bodyPr>
+          <a:lstStyle/>
+          <a:p>
             <a:pPr algn="ctr"/>
-            <a:endParaRPr lang="en-GB"/>
+            <a:r>
+              <a:rPr lang="en-US" sz="1600" noProof="0" dirty="0"/>
+              <a:t>No “issues”</a:t>
+            </a:r>
+            <a:endParaRPr lang="en-DE" sz="1600" dirty="0"/>
+          </a:p>
+        </p:txBody>
+      </p:sp>
+    </p:spTree>
+    <p:extLst>
+      <p:ext uri="{BB962C8B-B14F-4D97-AF65-F5344CB8AC3E}">
+        <p14:creationId xmlns:p14="http://schemas.microsoft.com/office/powerpoint/2010/main" val="4240701480"/>
+      </p:ext>
+    </p:extLst>
+  </p:cSld>
+  <p:clrMapOvr>
+    <a:masterClrMapping/>
+  </p:clrMapOvr>
+</p:sld>
+</file>
+
+<file path=ppt/slides/slide11.xml><?xml version="1.0" encoding="utf-8"?>
+<p:sld xmlns:a="http://schemas.openxmlformats.org/drawingml/2006/main" xmlns:r="http://schemas.openxmlformats.org/officeDocument/2006/relationships" xmlns:p="http://schemas.openxmlformats.org/presentationml/2006/main">
+  <p:cSld>
+    <p:spTree>
+      <p:nvGrpSpPr>
+        <p:cNvPr id="1" name="">
+          <a:extLst>
+            <a:ext uri="{FF2B5EF4-FFF2-40B4-BE49-F238E27FC236}">
+              <a16:creationId xmlns:a16="http://schemas.microsoft.com/office/drawing/2014/main" id="{B007C0A8-1642-72E4-3851-468A757FE97C}"/>
+            </a:ext>
+          </a:extLst>
+        </p:cNvPr>
+        <p:cNvGrpSpPr/>
+        <p:nvPr/>
+      </p:nvGrpSpPr>
+      <p:grpSpPr>
+        <a:xfrm>
+          <a:off x="0" y="0"/>
+          <a:ext cx="0" cy="0"/>
+          <a:chOff x="0" y="0"/>
+          <a:chExt cx="0" cy="0"/>
+        </a:xfrm>
+      </p:grpSpPr>
+      <p:sp>
+        <p:nvSpPr>
+          <p:cNvPr id="4" name="Foliennummernplatzhalter 3">
+            <a:extLst>
+              <a:ext uri="{FF2B5EF4-FFF2-40B4-BE49-F238E27FC236}">
+                <a16:creationId xmlns:a16="http://schemas.microsoft.com/office/drawing/2014/main" id="{D07ABC00-491F-092D-84E4-73E36C1D0594}"/>
+              </a:ext>
+            </a:extLst>
+          </p:cNvPr>
+          <p:cNvSpPr>
+            <a:spLocks noGrp="1"/>
+          </p:cNvSpPr>
+          <p:nvPr>
+            <p:ph type="sldNum" sz="quarter" idx="4"/>
+          </p:nvPr>
+        </p:nvSpPr>
+        <p:spPr/>
+        <p:txBody>
+          <a:bodyPr/>
+          <a:lstStyle/>
+          <a:p>
+            <a:fld id="{610C4E4B-DC7F-8F40-B47C-DF522102C54B}" type="slidenum">
+              <a:rPr lang="en-US" noProof="0" smtClean="0"/>
+              <a:pPr/>
+              <a:t>11</a:t>
+            </a:fld>
+            <a:endParaRPr lang="en-US" noProof="0" dirty="0"/>
+          </a:p>
+        </p:txBody>
+      </p:sp>
+      <p:sp>
+        <p:nvSpPr>
+          <p:cNvPr id="7" name="Titel 1">
+            <a:extLst>
+              <a:ext uri="{FF2B5EF4-FFF2-40B4-BE49-F238E27FC236}">
+                <a16:creationId xmlns:a16="http://schemas.microsoft.com/office/drawing/2014/main" id="{F0DC282D-24D4-8522-CEA0-D9C898253FAA}"/>
+              </a:ext>
+            </a:extLst>
+          </p:cNvPr>
+          <p:cNvSpPr>
+            <a:spLocks noGrp="1"/>
+          </p:cNvSpPr>
+          <p:nvPr>
+            <p:ph type="ctrTitle"/>
+          </p:nvPr>
+        </p:nvSpPr>
+        <p:spPr>
+          <a:xfrm>
+            <a:off x="685800" y="0"/>
+            <a:ext cx="7772400" cy="1102519"/>
+          </a:xfrm>
+        </p:spPr>
+        <p:txBody>
+          <a:bodyPr/>
+          <a:lstStyle/>
+          <a:p>
+            <a:pPr algn="ctr"/>
+            <a:r>
+              <a:rPr lang="en-US" sz="3200" noProof="0" dirty="0"/>
+              <a:t>Regression Model – Fuel Cons. (1)</a:t>
+            </a:r>
           </a:p>
         </p:txBody>
       </p:sp>
       <p:pic>
         <p:nvPicPr>
-          <p:cNvPr id="4" name="Picture 3">
-            <a:extLst>
-              <a:ext uri="{FF2B5EF4-FFF2-40B4-BE49-F238E27FC236}">
-                <a16:creationId xmlns:a16="http://schemas.microsoft.com/office/drawing/2014/main" id="{5A761EE5-BEFC-1309-ECBD-54532408A41E}"/>
+          <p:cNvPr id="3" name="Picture 2">
+            <a:extLst>
+              <a:ext uri="{FF2B5EF4-FFF2-40B4-BE49-F238E27FC236}">
+                <a16:creationId xmlns:a16="http://schemas.microsoft.com/office/drawing/2014/main" id="{18A8EC9C-CE94-A15C-C229-57AB191A6EC0}"/>
+              </a:ext>
+            </a:extLst>
+          </p:cNvPr>
+          <p:cNvPicPr>
+            <a:picLocks noChangeAspect="1"/>
+          </p:cNvPicPr>
+          <p:nvPr/>
+        </p:nvPicPr>
+        <p:blipFill>
+          <a:blip r:embed="rId2"/>
+          <a:srcRect/>
+          <a:stretch/>
+        </p:blipFill>
+        <p:spPr>
+          <a:xfrm>
+            <a:off x="685800" y="1189740"/>
+            <a:ext cx="6807200" cy="3397761"/>
+          </a:xfrm>
+          <a:prstGeom prst="rect">
+            <a:avLst/>
+          </a:prstGeom>
+        </p:spPr>
+      </p:pic>
+    </p:spTree>
+    <p:extLst>
+      <p:ext uri="{BB962C8B-B14F-4D97-AF65-F5344CB8AC3E}">
+        <p14:creationId xmlns:p14="http://schemas.microsoft.com/office/powerpoint/2010/main" val="203581634"/>
+      </p:ext>
+    </p:extLst>
+  </p:cSld>
+  <p:clrMapOvr>
+    <a:masterClrMapping/>
+  </p:clrMapOvr>
+</p:sld>
+</file>
+
+<file path=ppt/slides/slide12.xml><?xml version="1.0" encoding="utf-8"?>
+<p:sld xmlns:a="http://schemas.openxmlformats.org/drawingml/2006/main" xmlns:r="http://schemas.openxmlformats.org/officeDocument/2006/relationships" xmlns:p="http://schemas.openxmlformats.org/presentationml/2006/main">
+  <p:cSld>
+    <p:spTree>
+      <p:nvGrpSpPr>
+        <p:cNvPr id="1" name="">
+          <a:extLst>
+            <a:ext uri="{FF2B5EF4-FFF2-40B4-BE49-F238E27FC236}">
+              <a16:creationId xmlns:a16="http://schemas.microsoft.com/office/drawing/2014/main" id="{AFD874EF-63BB-DC78-B033-339BACF43C6B}"/>
+            </a:ext>
+          </a:extLst>
+        </p:cNvPr>
+        <p:cNvGrpSpPr/>
+        <p:nvPr/>
+      </p:nvGrpSpPr>
+      <p:grpSpPr>
+        <a:xfrm>
+          <a:off x="0" y="0"/>
+          <a:ext cx="0" cy="0"/>
+          <a:chOff x="0" y="0"/>
+          <a:chExt cx="0" cy="0"/>
+        </a:xfrm>
+      </p:grpSpPr>
+      <p:sp>
+        <p:nvSpPr>
+          <p:cNvPr id="4" name="Foliennummernplatzhalter 3">
+            <a:extLst>
+              <a:ext uri="{FF2B5EF4-FFF2-40B4-BE49-F238E27FC236}">
+                <a16:creationId xmlns:a16="http://schemas.microsoft.com/office/drawing/2014/main" id="{693F8BFB-37CD-E8D2-0FCF-64FCF8CAB4B3}"/>
+              </a:ext>
+            </a:extLst>
+          </p:cNvPr>
+          <p:cNvSpPr>
+            <a:spLocks noGrp="1"/>
+          </p:cNvSpPr>
+          <p:nvPr>
+            <p:ph type="sldNum" sz="quarter" idx="4"/>
+          </p:nvPr>
+        </p:nvSpPr>
+        <p:spPr/>
+        <p:txBody>
+          <a:bodyPr/>
+          <a:lstStyle/>
+          <a:p>
+            <a:fld id="{610C4E4B-DC7F-8F40-B47C-DF522102C54B}" type="slidenum">
+              <a:rPr lang="en-US" noProof="0" smtClean="0"/>
+              <a:pPr/>
+              <a:t>12</a:t>
+            </a:fld>
+            <a:endParaRPr lang="en-US" noProof="0" dirty="0"/>
+          </a:p>
+        </p:txBody>
+      </p:sp>
+      <p:sp>
+        <p:nvSpPr>
+          <p:cNvPr id="7" name="Titel 1">
+            <a:extLst>
+              <a:ext uri="{FF2B5EF4-FFF2-40B4-BE49-F238E27FC236}">
+                <a16:creationId xmlns:a16="http://schemas.microsoft.com/office/drawing/2014/main" id="{8F8A46FA-95F5-B7D3-8BA8-1BF150F33AB6}"/>
+              </a:ext>
+            </a:extLst>
+          </p:cNvPr>
+          <p:cNvSpPr>
+            <a:spLocks noGrp="1"/>
+          </p:cNvSpPr>
+          <p:nvPr>
+            <p:ph type="ctrTitle"/>
+          </p:nvPr>
+        </p:nvSpPr>
+        <p:spPr>
+          <a:xfrm>
+            <a:off x="685800" y="0"/>
+            <a:ext cx="7772400" cy="1102519"/>
+          </a:xfrm>
+        </p:spPr>
+        <p:txBody>
+          <a:bodyPr/>
+          <a:lstStyle/>
+          <a:p>
+            <a:pPr algn="ctr"/>
+            <a:r>
+              <a:rPr lang="en-US" sz="3200" noProof="0" dirty="0"/>
+              <a:t>Regression Model – Fuel Cons. (2)</a:t>
+            </a:r>
+          </a:p>
+        </p:txBody>
+      </p:sp>
+      <p:pic>
+        <p:nvPicPr>
+          <p:cNvPr id="3" name="Picture 2">
+            <a:extLst>
+              <a:ext uri="{FF2B5EF4-FFF2-40B4-BE49-F238E27FC236}">
+                <a16:creationId xmlns:a16="http://schemas.microsoft.com/office/drawing/2014/main" id="{AF58DF0D-8D1A-DDDE-6B03-DD325E3C135B}"/>
+              </a:ext>
+            </a:extLst>
+          </p:cNvPr>
+          <p:cNvPicPr>
+            <a:picLocks noChangeAspect="1"/>
+          </p:cNvPicPr>
+          <p:nvPr/>
+        </p:nvPicPr>
+        <p:blipFill>
+          <a:blip r:embed="rId2"/>
+          <a:srcRect/>
+          <a:stretch/>
+        </p:blipFill>
+        <p:spPr>
+          <a:xfrm>
+            <a:off x="604562" y="977591"/>
+            <a:ext cx="3652970" cy="1249080"/>
+          </a:xfrm>
+          <a:prstGeom prst="rect">
+            <a:avLst/>
+          </a:prstGeom>
+        </p:spPr>
+      </p:pic>
+      <p:pic>
+        <p:nvPicPr>
+          <p:cNvPr id="5" name="Picture 4">
+            <a:extLst>
+              <a:ext uri="{FF2B5EF4-FFF2-40B4-BE49-F238E27FC236}">
+                <a16:creationId xmlns:a16="http://schemas.microsoft.com/office/drawing/2014/main" id="{7CE279D6-9D47-A071-CE80-66C414F81D76}"/>
               </a:ext>
             </a:extLst>
           </p:cNvPr>
@@ -5854,8 +5242,8 @@
         </p:blipFill>
         <p:spPr>
           <a:xfrm>
-            <a:off x="3048000" y="3441329"/>
-            <a:ext cx="3048000" cy="1371600"/>
+            <a:off x="602248" y="2238998"/>
+            <a:ext cx="3657600" cy="2438400"/>
           </a:xfrm>
           <a:prstGeom prst="rect">
             <a:avLst/>
@@ -5864,10 +5252,10 @@
       </p:pic>
       <p:pic>
         <p:nvPicPr>
-          <p:cNvPr id="3" name="Picture 2">
-            <a:extLst>
-              <a:ext uri="{FF2B5EF4-FFF2-40B4-BE49-F238E27FC236}">
-                <a16:creationId xmlns:a16="http://schemas.microsoft.com/office/drawing/2014/main" id="{3037B88F-A54B-3DBE-F450-1D7988AE11B2}"/>
+          <p:cNvPr id="6" name="Picture 5">
+            <a:extLst>
+              <a:ext uri="{FF2B5EF4-FFF2-40B4-BE49-F238E27FC236}">
+                <a16:creationId xmlns:a16="http://schemas.microsoft.com/office/drawing/2014/main" id="{B1A8DDA9-EDB0-1461-4F13-18207D4358EE}"/>
               </a:ext>
             </a:extLst>
           </p:cNvPr>
@@ -5883,8 +5271,8 @@
         </p:blipFill>
         <p:spPr>
           <a:xfrm>
-            <a:off x="1818761" y="189472"/>
-            <a:ext cx="5506477" cy="3424374"/>
+            <a:off x="4884153" y="1352550"/>
+            <a:ext cx="3657600" cy="2438400"/>
           </a:xfrm>
           <a:prstGeom prst="rect">
             <a:avLst/>
@@ -5894,7 +5282,7 @@
     </p:spTree>
     <p:extLst>
       <p:ext uri="{BB962C8B-B14F-4D97-AF65-F5344CB8AC3E}">
-        <p14:creationId xmlns:p14="http://schemas.microsoft.com/office/powerpoint/2010/main" val="1317131025"/>
+        <p14:creationId xmlns:p14="http://schemas.microsoft.com/office/powerpoint/2010/main" val="2297267905"/>
       </p:ext>
     </p:extLst>
   </p:cSld>
@@ -5904,7 +5292,879 @@
 </p:sld>
 </file>
 
-<file path=ppt/slides/slide11.xml><?xml version="1.0" encoding="utf-8"?>
+<file path=ppt/slides/slide13.xml><?xml version="1.0" encoding="utf-8"?>
+<p:sld xmlns:a="http://schemas.openxmlformats.org/drawingml/2006/main" xmlns:r="http://schemas.openxmlformats.org/officeDocument/2006/relationships" xmlns:p="http://schemas.openxmlformats.org/presentationml/2006/main">
+  <p:cSld>
+    <p:spTree>
+      <p:nvGrpSpPr>
+        <p:cNvPr id="1" name="">
+          <a:extLst>
+            <a:ext uri="{FF2B5EF4-FFF2-40B4-BE49-F238E27FC236}">
+              <a16:creationId xmlns:a16="http://schemas.microsoft.com/office/drawing/2014/main" id="{830FED56-1075-37DA-0BAD-5E1294FF8A52}"/>
+            </a:ext>
+          </a:extLst>
+        </p:cNvPr>
+        <p:cNvGrpSpPr/>
+        <p:nvPr/>
+      </p:nvGrpSpPr>
+      <p:grpSpPr>
+        <a:xfrm>
+          <a:off x="0" y="0"/>
+          <a:ext cx="0" cy="0"/>
+          <a:chOff x="0" y="0"/>
+          <a:chExt cx="0" cy="0"/>
+        </a:xfrm>
+      </p:grpSpPr>
+      <p:sp>
+        <p:nvSpPr>
+          <p:cNvPr id="4" name="Foliennummernplatzhalter 3">
+            <a:extLst>
+              <a:ext uri="{FF2B5EF4-FFF2-40B4-BE49-F238E27FC236}">
+                <a16:creationId xmlns:a16="http://schemas.microsoft.com/office/drawing/2014/main" id="{EB41383E-857B-415D-7F23-12BF3B5146EF}"/>
+              </a:ext>
+            </a:extLst>
+          </p:cNvPr>
+          <p:cNvSpPr>
+            <a:spLocks noGrp="1"/>
+          </p:cNvSpPr>
+          <p:nvPr>
+            <p:ph type="sldNum" sz="quarter" idx="4"/>
+          </p:nvPr>
+        </p:nvSpPr>
+        <p:spPr/>
+        <p:txBody>
+          <a:bodyPr/>
+          <a:lstStyle/>
+          <a:p>
+            <a:fld id="{610C4E4B-DC7F-8F40-B47C-DF522102C54B}" type="slidenum">
+              <a:rPr lang="en-US" noProof="0" smtClean="0"/>
+              <a:pPr/>
+              <a:t>13</a:t>
+            </a:fld>
+            <a:endParaRPr lang="en-US" noProof="0" dirty="0"/>
+          </a:p>
+        </p:txBody>
+      </p:sp>
+      <p:sp>
+        <p:nvSpPr>
+          <p:cNvPr id="7" name="Titel 1">
+            <a:extLst>
+              <a:ext uri="{FF2B5EF4-FFF2-40B4-BE49-F238E27FC236}">
+                <a16:creationId xmlns:a16="http://schemas.microsoft.com/office/drawing/2014/main" id="{26790CFC-A23E-C3E4-EDDA-7C1CA146B99C}"/>
+              </a:ext>
+            </a:extLst>
+          </p:cNvPr>
+          <p:cNvSpPr>
+            <a:spLocks noGrp="1"/>
+          </p:cNvSpPr>
+          <p:nvPr>
+            <p:ph type="ctrTitle"/>
+          </p:nvPr>
+        </p:nvSpPr>
+        <p:spPr>
+          <a:xfrm>
+            <a:off x="685800" y="0"/>
+            <a:ext cx="7772400" cy="1102519"/>
+          </a:xfrm>
+        </p:spPr>
+        <p:txBody>
+          <a:bodyPr/>
+          <a:lstStyle/>
+          <a:p>
+            <a:pPr algn="ctr"/>
+            <a:r>
+              <a:rPr lang="en-US" sz="3200" noProof="0" dirty="0"/>
+              <a:t>Price – Methodology (1)</a:t>
+            </a:r>
+          </a:p>
+        </p:txBody>
+      </p:sp>
+      <p:sp>
+        <p:nvSpPr>
+          <p:cNvPr id="2" name="TextBox 1">
+            <a:extLst>
+              <a:ext uri="{FF2B5EF4-FFF2-40B4-BE49-F238E27FC236}">
+                <a16:creationId xmlns:a16="http://schemas.microsoft.com/office/drawing/2014/main" id="{B9D2C74D-EB72-7C6E-DDCC-73486EE25682}"/>
+              </a:ext>
+            </a:extLst>
+          </p:cNvPr>
+          <p:cNvSpPr txBox="1"/>
+          <p:nvPr/>
+        </p:nvSpPr>
+        <p:spPr>
+          <a:xfrm>
+            <a:off x="447674" y="1102519"/>
+            <a:ext cx="8248651" cy="646331"/>
+          </a:xfrm>
+          <a:prstGeom prst="rect">
+            <a:avLst/>
+          </a:prstGeom>
+          <a:noFill/>
+        </p:spPr>
+        <p:txBody>
+          <a:bodyPr wrap="square" rtlCol="0">
+            <a:spAutoFit/>
+          </a:bodyPr>
+          <a:lstStyle/>
+          <a:p>
+            <a:r>
+              <a:rPr lang="en-US" sz="2000" noProof="0" dirty="0">
+                <a:solidFill>
+                  <a:srgbClr val="51AA00"/>
+                </a:solidFill>
+              </a:rPr>
+              <a:t>Minitab’s Best Subset:</a:t>
+            </a:r>
+          </a:p>
+          <a:p>
+            <a:r>
+              <a:rPr lang="en-US" sz="1600" noProof="0" dirty="0"/>
+              <a:t>Power, Acceleration, Fuel Consumption</a:t>
+            </a:r>
+          </a:p>
+        </p:txBody>
+      </p:sp>
+      <p:pic>
+        <p:nvPicPr>
+          <p:cNvPr id="5" name="Picture 4">
+            <a:extLst>
+              <a:ext uri="{FF2B5EF4-FFF2-40B4-BE49-F238E27FC236}">
+                <a16:creationId xmlns:a16="http://schemas.microsoft.com/office/drawing/2014/main" id="{A22C73FF-36F8-7B10-AEE6-436EAE1D0632}"/>
+              </a:ext>
+            </a:extLst>
+          </p:cNvPr>
+          <p:cNvPicPr>
+            <a:picLocks noChangeAspect="1"/>
+          </p:cNvPicPr>
+          <p:nvPr/>
+        </p:nvPicPr>
+        <p:blipFill>
+          <a:blip r:embed="rId2"/>
+          <a:srcRect/>
+          <a:stretch/>
+        </p:blipFill>
+        <p:spPr>
+          <a:xfrm>
+            <a:off x="447674" y="1959296"/>
+            <a:ext cx="3632761" cy="2533655"/>
+          </a:xfrm>
+          <a:prstGeom prst="rect">
+            <a:avLst/>
+          </a:prstGeom>
+        </p:spPr>
+      </p:pic>
+      <p:cxnSp>
+        <p:nvCxnSpPr>
+          <p:cNvPr id="9" name="Straight Arrow Connector 8">
+            <a:extLst>
+              <a:ext uri="{FF2B5EF4-FFF2-40B4-BE49-F238E27FC236}">
+                <a16:creationId xmlns:a16="http://schemas.microsoft.com/office/drawing/2014/main" id="{04CD5C4A-078A-BFF2-C1F4-44C60C1FC0AE}"/>
+              </a:ext>
+            </a:extLst>
+          </p:cNvPr>
+          <p:cNvCxnSpPr>
+            <a:cxnSpLocks/>
+            <a:stCxn id="10" idx="2"/>
+            <a:endCxn id="11" idx="1"/>
+          </p:cNvCxnSpPr>
+          <p:nvPr/>
+        </p:nvCxnSpPr>
+        <p:spPr>
+          <a:xfrm>
+            <a:off x="6043951" y="3577354"/>
+            <a:ext cx="240795" cy="289289"/>
+          </a:xfrm>
+          <a:prstGeom prst="straightConnector1">
+            <a:avLst/>
+          </a:prstGeom>
+          <a:ln>
+            <a:solidFill>
+              <a:srgbClr val="FF0000"/>
+            </a:solidFill>
+            <a:tailEnd type="triangle"/>
+          </a:ln>
+        </p:spPr>
+        <p:style>
+          <a:lnRef idx="2">
+            <a:schemeClr val="accent1"/>
+          </a:lnRef>
+          <a:fillRef idx="0">
+            <a:schemeClr val="accent1"/>
+          </a:fillRef>
+          <a:effectRef idx="1">
+            <a:schemeClr val="accent1"/>
+          </a:effectRef>
+          <a:fontRef idx="minor">
+            <a:schemeClr val="tx1"/>
+          </a:fontRef>
+        </p:style>
+      </p:cxnSp>
+      <p:sp>
+        <p:nvSpPr>
+          <p:cNvPr id="11" name="TextBox 10">
+            <a:extLst>
+              <a:ext uri="{FF2B5EF4-FFF2-40B4-BE49-F238E27FC236}">
+                <a16:creationId xmlns:a16="http://schemas.microsoft.com/office/drawing/2014/main" id="{5D543107-E424-DF0D-0A3A-4D26ED7FB449}"/>
+              </a:ext>
+            </a:extLst>
+          </p:cNvPr>
+          <p:cNvSpPr txBox="1"/>
+          <p:nvPr/>
+        </p:nvSpPr>
+        <p:spPr>
+          <a:xfrm>
+            <a:off x="6284746" y="3697366"/>
+            <a:ext cx="2135559" cy="338554"/>
+          </a:xfrm>
+          <a:prstGeom prst="rect">
+            <a:avLst/>
+          </a:prstGeom>
+          <a:noFill/>
+        </p:spPr>
+        <p:txBody>
+          <a:bodyPr wrap="square">
+            <a:spAutoFit/>
+          </a:bodyPr>
+          <a:lstStyle/>
+          <a:p>
+            <a:pPr marL="342900" indent="-342900">
+              <a:buAutoNum type="arabicPeriod"/>
+            </a:pPr>
+            <a:r>
+              <a:rPr lang="en-US" sz="1600" dirty="0"/>
+              <a:t>Remove outlier</a:t>
+            </a:r>
+            <a:endParaRPr lang="en-DE" sz="1600" dirty="0"/>
+          </a:p>
+        </p:txBody>
+      </p:sp>
+      <p:sp>
+        <p:nvSpPr>
+          <p:cNvPr id="6" name="TextBox 5">
+            <a:extLst>
+              <a:ext uri="{FF2B5EF4-FFF2-40B4-BE49-F238E27FC236}">
+                <a16:creationId xmlns:a16="http://schemas.microsoft.com/office/drawing/2014/main" id="{6435A899-595D-9A21-CD70-18DF50C0EF3E}"/>
+              </a:ext>
+            </a:extLst>
+          </p:cNvPr>
+          <p:cNvSpPr txBox="1"/>
+          <p:nvPr/>
+        </p:nvSpPr>
+        <p:spPr>
+          <a:xfrm>
+            <a:off x="2946902" y="4040981"/>
+            <a:ext cx="1133533" cy="338554"/>
+          </a:xfrm>
+          <a:prstGeom prst="rect">
+            <a:avLst/>
+          </a:prstGeom>
+          <a:noFill/>
+        </p:spPr>
+        <p:txBody>
+          <a:bodyPr wrap="square">
+            <a:spAutoFit/>
+          </a:bodyPr>
+          <a:lstStyle/>
+          <a:p>
+            <a:r>
+              <a:rPr lang="en-US" sz="1600" noProof="0" dirty="0"/>
+              <a:t>“ok”, but:</a:t>
+            </a:r>
+            <a:endParaRPr lang="en-DE" sz="1600" dirty="0"/>
+          </a:p>
+        </p:txBody>
+      </p:sp>
+      <p:pic>
+        <p:nvPicPr>
+          <p:cNvPr id="10" name="Picture 9" descr="A graph with blue dots&#10;&#10;AI-generated content may be incorrect.">
+            <a:extLst>
+              <a:ext uri="{FF2B5EF4-FFF2-40B4-BE49-F238E27FC236}">
+                <a16:creationId xmlns:a16="http://schemas.microsoft.com/office/drawing/2014/main" id="{A95E92C8-3D40-31D6-DEDD-EEC3922AAF1B}"/>
+              </a:ext>
+            </a:extLst>
+          </p:cNvPr>
+          <p:cNvPicPr>
+            <a:picLocks noChangeAspect="1"/>
+          </p:cNvPicPr>
+          <p:nvPr/>
+        </p:nvPicPr>
+        <p:blipFill>
+          <a:blip r:embed="rId3"/>
+          <a:srcRect l="1063"/>
+          <a:stretch/>
+        </p:blipFill>
+        <p:spPr>
+          <a:xfrm>
+            <a:off x="4735376" y="1959296"/>
+            <a:ext cx="2617149" cy="1618058"/>
+          </a:xfrm>
+          <a:prstGeom prst="rect">
+            <a:avLst/>
+          </a:prstGeom>
+        </p:spPr>
+      </p:pic>
+    </p:spTree>
+    <p:extLst>
+      <p:ext uri="{BB962C8B-B14F-4D97-AF65-F5344CB8AC3E}">
+        <p14:creationId xmlns:p14="http://schemas.microsoft.com/office/powerpoint/2010/main" val="1225979378"/>
+      </p:ext>
+    </p:extLst>
+  </p:cSld>
+  <p:clrMapOvr>
+    <a:masterClrMapping/>
+  </p:clrMapOvr>
+</p:sld>
+</file>
+
+<file path=ppt/slides/slide14.xml><?xml version="1.0" encoding="utf-8"?>
+<p:sld xmlns:a="http://schemas.openxmlformats.org/drawingml/2006/main" xmlns:r="http://schemas.openxmlformats.org/officeDocument/2006/relationships" xmlns:p="http://schemas.openxmlformats.org/presentationml/2006/main">
+  <p:cSld>
+    <p:spTree>
+      <p:nvGrpSpPr>
+        <p:cNvPr id="1" name="">
+          <a:extLst>
+            <a:ext uri="{FF2B5EF4-FFF2-40B4-BE49-F238E27FC236}">
+              <a16:creationId xmlns:a16="http://schemas.microsoft.com/office/drawing/2014/main" id="{5D56B9AB-8988-CE43-F0F4-C3DF26DA4BFC}"/>
+            </a:ext>
+          </a:extLst>
+        </p:cNvPr>
+        <p:cNvGrpSpPr/>
+        <p:nvPr/>
+      </p:nvGrpSpPr>
+      <p:grpSpPr>
+        <a:xfrm>
+          <a:off x="0" y="0"/>
+          <a:ext cx="0" cy="0"/>
+          <a:chOff x="0" y="0"/>
+          <a:chExt cx="0" cy="0"/>
+        </a:xfrm>
+      </p:grpSpPr>
+      <p:sp>
+        <p:nvSpPr>
+          <p:cNvPr id="4" name="Foliennummernplatzhalter 3">
+            <a:extLst>
+              <a:ext uri="{FF2B5EF4-FFF2-40B4-BE49-F238E27FC236}">
+                <a16:creationId xmlns:a16="http://schemas.microsoft.com/office/drawing/2014/main" id="{42086709-E6ED-6EE5-88B3-3DB8D59FCDA5}"/>
+              </a:ext>
+            </a:extLst>
+          </p:cNvPr>
+          <p:cNvSpPr>
+            <a:spLocks noGrp="1"/>
+          </p:cNvSpPr>
+          <p:nvPr>
+            <p:ph type="sldNum" sz="quarter" idx="4"/>
+          </p:nvPr>
+        </p:nvSpPr>
+        <p:spPr/>
+        <p:txBody>
+          <a:bodyPr/>
+          <a:lstStyle/>
+          <a:p>
+            <a:fld id="{610C4E4B-DC7F-8F40-B47C-DF522102C54B}" type="slidenum">
+              <a:rPr lang="en-US" noProof="0" smtClean="0"/>
+              <a:pPr/>
+              <a:t>14</a:t>
+            </a:fld>
+            <a:endParaRPr lang="en-US" noProof="0" dirty="0"/>
+          </a:p>
+        </p:txBody>
+      </p:sp>
+      <p:sp>
+        <p:nvSpPr>
+          <p:cNvPr id="7" name="Titel 1">
+            <a:extLst>
+              <a:ext uri="{FF2B5EF4-FFF2-40B4-BE49-F238E27FC236}">
+                <a16:creationId xmlns:a16="http://schemas.microsoft.com/office/drawing/2014/main" id="{DA3FFDCE-8BF5-E7BE-6696-39A60E85325A}"/>
+              </a:ext>
+            </a:extLst>
+          </p:cNvPr>
+          <p:cNvSpPr>
+            <a:spLocks noGrp="1"/>
+          </p:cNvSpPr>
+          <p:nvPr>
+            <p:ph type="ctrTitle"/>
+          </p:nvPr>
+        </p:nvSpPr>
+        <p:spPr>
+          <a:xfrm>
+            <a:off x="685800" y="0"/>
+            <a:ext cx="7772400" cy="1102519"/>
+          </a:xfrm>
+        </p:spPr>
+        <p:txBody>
+          <a:bodyPr/>
+          <a:lstStyle/>
+          <a:p>
+            <a:pPr algn="ctr"/>
+            <a:r>
+              <a:rPr lang="en-US" sz="3200" noProof="0" dirty="0"/>
+              <a:t>Price – Methodology (2)</a:t>
+            </a:r>
+          </a:p>
+        </p:txBody>
+      </p:sp>
+      <p:pic>
+        <p:nvPicPr>
+          <p:cNvPr id="5" name="Picture 4">
+            <a:extLst>
+              <a:ext uri="{FF2B5EF4-FFF2-40B4-BE49-F238E27FC236}">
+                <a16:creationId xmlns:a16="http://schemas.microsoft.com/office/drawing/2014/main" id="{378E60D2-EC38-619D-833C-D2332ABBE2B3}"/>
+              </a:ext>
+            </a:extLst>
+          </p:cNvPr>
+          <p:cNvPicPr>
+            <a:picLocks noChangeAspect="1"/>
+          </p:cNvPicPr>
+          <p:nvPr/>
+        </p:nvPicPr>
+        <p:blipFill>
+          <a:blip r:embed="rId2"/>
+          <a:srcRect/>
+          <a:stretch/>
+        </p:blipFill>
+        <p:spPr>
+          <a:xfrm>
+            <a:off x="456295" y="1120153"/>
+            <a:ext cx="4331490" cy="3035388"/>
+          </a:xfrm>
+          <a:prstGeom prst="rect">
+            <a:avLst/>
+          </a:prstGeom>
+        </p:spPr>
+      </p:pic>
+      <p:cxnSp>
+        <p:nvCxnSpPr>
+          <p:cNvPr id="9" name="Straight Arrow Connector 8">
+            <a:extLst>
+              <a:ext uri="{FF2B5EF4-FFF2-40B4-BE49-F238E27FC236}">
+                <a16:creationId xmlns:a16="http://schemas.microsoft.com/office/drawing/2014/main" id="{E41DAF37-8223-25C4-0C1B-8B8D350BCA58}"/>
+              </a:ext>
+            </a:extLst>
+          </p:cNvPr>
+          <p:cNvCxnSpPr>
+            <a:cxnSpLocks/>
+            <a:stCxn id="5" idx="3"/>
+            <a:endCxn id="11" idx="1"/>
+          </p:cNvCxnSpPr>
+          <p:nvPr/>
+        </p:nvCxnSpPr>
+        <p:spPr>
+          <a:xfrm>
+            <a:off x="4787785" y="2637847"/>
+            <a:ext cx="511539" cy="298859"/>
+          </a:xfrm>
+          <a:prstGeom prst="straightConnector1">
+            <a:avLst/>
+          </a:prstGeom>
+          <a:ln>
+            <a:solidFill>
+              <a:srgbClr val="FF0000"/>
+            </a:solidFill>
+            <a:tailEnd type="triangle"/>
+          </a:ln>
+        </p:spPr>
+        <p:style>
+          <a:lnRef idx="2">
+            <a:schemeClr val="accent1"/>
+          </a:lnRef>
+          <a:fillRef idx="0">
+            <a:schemeClr val="accent1"/>
+          </a:fillRef>
+          <a:effectRef idx="1">
+            <a:schemeClr val="accent1"/>
+          </a:effectRef>
+          <a:fontRef idx="minor">
+            <a:schemeClr val="tx1"/>
+          </a:fontRef>
+        </p:style>
+      </p:cxnSp>
+      <p:sp>
+        <p:nvSpPr>
+          <p:cNvPr id="11" name="TextBox 10">
+            <a:extLst>
+              <a:ext uri="{FF2B5EF4-FFF2-40B4-BE49-F238E27FC236}">
+                <a16:creationId xmlns:a16="http://schemas.microsoft.com/office/drawing/2014/main" id="{D587497A-7031-F127-B928-375A2AAFA5AE}"/>
+              </a:ext>
+            </a:extLst>
+          </p:cNvPr>
+          <p:cNvSpPr txBox="1"/>
+          <p:nvPr/>
+        </p:nvSpPr>
+        <p:spPr>
+          <a:xfrm>
+            <a:off x="5299324" y="2398097"/>
+            <a:ext cx="3388383" cy="1077218"/>
+          </a:xfrm>
+          <a:prstGeom prst="rect">
+            <a:avLst/>
+          </a:prstGeom>
+          <a:noFill/>
+        </p:spPr>
+        <p:txBody>
+          <a:bodyPr wrap="square">
+            <a:spAutoFit/>
+          </a:bodyPr>
+          <a:lstStyle/>
+          <a:p>
+            <a:pPr marL="342900" indent="-342900">
+              <a:buAutoNum type="arabicPeriod"/>
+            </a:pPr>
+            <a:r>
+              <a:rPr lang="en-US" sz="1600" dirty="0"/>
+              <a:t>Remove non-significant predictor</a:t>
+            </a:r>
+          </a:p>
+          <a:p>
+            <a:pPr marL="342900" indent="-342900">
+              <a:buAutoNum type="arabicPeriod"/>
+            </a:pPr>
+            <a:r>
+              <a:rPr lang="en-US" sz="1600" dirty="0"/>
+              <a:t>Standardize predictors</a:t>
+            </a:r>
+          </a:p>
+          <a:p>
+            <a:pPr marL="342900" indent="-342900">
+              <a:buAutoNum type="arabicPeriod"/>
+            </a:pPr>
+            <a:r>
+              <a:rPr lang="en-US" sz="1600" dirty="0"/>
+              <a:t>Apply Box-Cox transformation</a:t>
+            </a:r>
+            <a:endParaRPr lang="en-DE" sz="1600" dirty="0"/>
+          </a:p>
+        </p:txBody>
+      </p:sp>
+    </p:spTree>
+    <p:extLst>
+      <p:ext uri="{BB962C8B-B14F-4D97-AF65-F5344CB8AC3E}">
+        <p14:creationId xmlns:p14="http://schemas.microsoft.com/office/powerpoint/2010/main" val="473769861"/>
+      </p:ext>
+    </p:extLst>
+  </p:cSld>
+  <p:clrMapOvr>
+    <a:masterClrMapping/>
+  </p:clrMapOvr>
+</p:sld>
+</file>
+
+<file path=ppt/slides/slide15.xml><?xml version="1.0" encoding="utf-8"?>
+<p:sld xmlns:a="http://schemas.openxmlformats.org/drawingml/2006/main" xmlns:r="http://schemas.openxmlformats.org/officeDocument/2006/relationships" xmlns:p="http://schemas.openxmlformats.org/presentationml/2006/main">
+  <p:cSld>
+    <p:spTree>
+      <p:nvGrpSpPr>
+        <p:cNvPr id="1" name="">
+          <a:extLst>
+            <a:ext uri="{FF2B5EF4-FFF2-40B4-BE49-F238E27FC236}">
+              <a16:creationId xmlns:a16="http://schemas.microsoft.com/office/drawing/2014/main" id="{DF9E91CD-AB73-210C-2340-A6CD07A35F2A}"/>
+            </a:ext>
+          </a:extLst>
+        </p:cNvPr>
+        <p:cNvGrpSpPr/>
+        <p:nvPr/>
+      </p:nvGrpSpPr>
+      <p:grpSpPr>
+        <a:xfrm>
+          <a:off x="0" y="0"/>
+          <a:ext cx="0" cy="0"/>
+          <a:chOff x="0" y="0"/>
+          <a:chExt cx="0" cy="0"/>
+        </a:xfrm>
+      </p:grpSpPr>
+      <p:sp>
+        <p:nvSpPr>
+          <p:cNvPr id="4" name="Foliennummernplatzhalter 3">
+            <a:extLst>
+              <a:ext uri="{FF2B5EF4-FFF2-40B4-BE49-F238E27FC236}">
+                <a16:creationId xmlns:a16="http://schemas.microsoft.com/office/drawing/2014/main" id="{5766CB03-A022-788F-93AD-DBC1F0C06B8A}"/>
+              </a:ext>
+            </a:extLst>
+          </p:cNvPr>
+          <p:cNvSpPr>
+            <a:spLocks noGrp="1"/>
+          </p:cNvSpPr>
+          <p:nvPr>
+            <p:ph type="sldNum" sz="quarter" idx="4"/>
+          </p:nvPr>
+        </p:nvSpPr>
+        <p:spPr/>
+        <p:txBody>
+          <a:bodyPr/>
+          <a:lstStyle/>
+          <a:p>
+            <a:fld id="{610C4E4B-DC7F-8F40-B47C-DF522102C54B}" type="slidenum">
+              <a:rPr lang="en-US" noProof="0" smtClean="0"/>
+              <a:pPr/>
+              <a:t>15</a:t>
+            </a:fld>
+            <a:endParaRPr lang="en-US" noProof="0" dirty="0"/>
+          </a:p>
+        </p:txBody>
+      </p:sp>
+      <p:sp>
+        <p:nvSpPr>
+          <p:cNvPr id="7" name="Titel 1">
+            <a:extLst>
+              <a:ext uri="{FF2B5EF4-FFF2-40B4-BE49-F238E27FC236}">
+                <a16:creationId xmlns:a16="http://schemas.microsoft.com/office/drawing/2014/main" id="{EB01303E-CC9F-E543-6F40-86265BDA088F}"/>
+              </a:ext>
+            </a:extLst>
+          </p:cNvPr>
+          <p:cNvSpPr>
+            <a:spLocks noGrp="1"/>
+          </p:cNvSpPr>
+          <p:nvPr>
+            <p:ph type="ctrTitle"/>
+          </p:nvPr>
+        </p:nvSpPr>
+        <p:spPr>
+          <a:xfrm>
+            <a:off x="685800" y="0"/>
+            <a:ext cx="7772400" cy="1102519"/>
+          </a:xfrm>
+        </p:spPr>
+        <p:txBody>
+          <a:bodyPr/>
+          <a:lstStyle/>
+          <a:p>
+            <a:pPr algn="ctr"/>
+            <a:r>
+              <a:rPr lang="en-US" sz="3200" noProof="0" dirty="0"/>
+              <a:t>Regression Model – Prize (1)</a:t>
+            </a:r>
+          </a:p>
+        </p:txBody>
+      </p:sp>
+      <p:pic>
+        <p:nvPicPr>
+          <p:cNvPr id="3" name="Picture 2">
+            <a:extLst>
+              <a:ext uri="{FF2B5EF4-FFF2-40B4-BE49-F238E27FC236}">
+                <a16:creationId xmlns:a16="http://schemas.microsoft.com/office/drawing/2014/main" id="{3DDE189A-1848-6FC2-A6A6-C8728307E96E}"/>
+              </a:ext>
+            </a:extLst>
+          </p:cNvPr>
+          <p:cNvPicPr>
+            <a:picLocks noChangeAspect="1"/>
+          </p:cNvPicPr>
+          <p:nvPr/>
+        </p:nvPicPr>
+        <p:blipFill>
+          <a:blip r:embed="rId2"/>
+          <a:srcRect/>
+          <a:stretch/>
+        </p:blipFill>
+        <p:spPr>
+          <a:xfrm>
+            <a:off x="1131684" y="933425"/>
+            <a:ext cx="4173647" cy="3949116"/>
+          </a:xfrm>
+          <a:prstGeom prst="rect">
+            <a:avLst/>
+          </a:prstGeom>
+        </p:spPr>
+      </p:pic>
+    </p:spTree>
+    <p:extLst>
+      <p:ext uri="{BB962C8B-B14F-4D97-AF65-F5344CB8AC3E}">
+        <p14:creationId xmlns:p14="http://schemas.microsoft.com/office/powerpoint/2010/main" val="3801156997"/>
+      </p:ext>
+    </p:extLst>
+  </p:cSld>
+  <p:clrMapOvr>
+    <a:masterClrMapping/>
+  </p:clrMapOvr>
+</p:sld>
+</file>
+
+<file path=ppt/slides/slide16.xml><?xml version="1.0" encoding="utf-8"?>
+<p:sld xmlns:a="http://schemas.openxmlformats.org/drawingml/2006/main" xmlns:r="http://schemas.openxmlformats.org/officeDocument/2006/relationships" xmlns:p="http://schemas.openxmlformats.org/presentationml/2006/main">
+  <p:cSld>
+    <p:spTree>
+      <p:nvGrpSpPr>
+        <p:cNvPr id="1" name="">
+          <a:extLst>
+            <a:ext uri="{FF2B5EF4-FFF2-40B4-BE49-F238E27FC236}">
+              <a16:creationId xmlns:a16="http://schemas.microsoft.com/office/drawing/2014/main" id="{04F9D112-2916-4EAC-187E-F1A6B59141B7}"/>
+            </a:ext>
+          </a:extLst>
+        </p:cNvPr>
+        <p:cNvGrpSpPr/>
+        <p:nvPr/>
+      </p:nvGrpSpPr>
+      <p:grpSpPr>
+        <a:xfrm>
+          <a:off x="0" y="0"/>
+          <a:ext cx="0" cy="0"/>
+          <a:chOff x="0" y="0"/>
+          <a:chExt cx="0" cy="0"/>
+        </a:xfrm>
+      </p:grpSpPr>
+      <p:sp>
+        <p:nvSpPr>
+          <p:cNvPr id="4" name="Foliennummernplatzhalter 3">
+            <a:extLst>
+              <a:ext uri="{FF2B5EF4-FFF2-40B4-BE49-F238E27FC236}">
+                <a16:creationId xmlns:a16="http://schemas.microsoft.com/office/drawing/2014/main" id="{F9A5A9D6-E471-20A2-A79F-8A0CFDD5D878}"/>
+              </a:ext>
+            </a:extLst>
+          </p:cNvPr>
+          <p:cNvSpPr>
+            <a:spLocks noGrp="1"/>
+          </p:cNvSpPr>
+          <p:nvPr>
+            <p:ph type="sldNum" sz="quarter" idx="4"/>
+          </p:nvPr>
+        </p:nvSpPr>
+        <p:spPr/>
+        <p:txBody>
+          <a:bodyPr/>
+          <a:lstStyle/>
+          <a:p>
+            <a:fld id="{610C4E4B-DC7F-8F40-B47C-DF522102C54B}" type="slidenum">
+              <a:rPr lang="en-US" noProof="0" smtClean="0"/>
+              <a:pPr/>
+              <a:t>16</a:t>
+            </a:fld>
+            <a:endParaRPr lang="en-US" noProof="0" dirty="0"/>
+          </a:p>
+        </p:txBody>
+      </p:sp>
+      <p:sp>
+        <p:nvSpPr>
+          <p:cNvPr id="7" name="Titel 1">
+            <a:extLst>
+              <a:ext uri="{FF2B5EF4-FFF2-40B4-BE49-F238E27FC236}">
+                <a16:creationId xmlns:a16="http://schemas.microsoft.com/office/drawing/2014/main" id="{92FC1707-F93B-8157-9526-0DD3B2A04286}"/>
+              </a:ext>
+            </a:extLst>
+          </p:cNvPr>
+          <p:cNvSpPr>
+            <a:spLocks noGrp="1"/>
+          </p:cNvSpPr>
+          <p:nvPr>
+            <p:ph type="ctrTitle"/>
+          </p:nvPr>
+        </p:nvSpPr>
+        <p:spPr>
+          <a:xfrm>
+            <a:off x="685800" y="0"/>
+            <a:ext cx="7772400" cy="1102519"/>
+          </a:xfrm>
+        </p:spPr>
+        <p:txBody>
+          <a:bodyPr/>
+          <a:lstStyle/>
+          <a:p>
+            <a:pPr algn="ctr"/>
+            <a:r>
+              <a:rPr lang="en-US" sz="3200" noProof="0" dirty="0"/>
+              <a:t>Regression Model – Prize (2)</a:t>
+            </a:r>
+          </a:p>
+        </p:txBody>
+      </p:sp>
+      <p:pic>
+        <p:nvPicPr>
+          <p:cNvPr id="3" name="Picture 2">
+            <a:extLst>
+              <a:ext uri="{FF2B5EF4-FFF2-40B4-BE49-F238E27FC236}">
+                <a16:creationId xmlns:a16="http://schemas.microsoft.com/office/drawing/2014/main" id="{1D5EA37D-BD16-39E2-90E0-D2DA71C84AE2}"/>
+              </a:ext>
+            </a:extLst>
+          </p:cNvPr>
+          <p:cNvPicPr>
+            <a:picLocks noChangeAspect="1"/>
+          </p:cNvPicPr>
+          <p:nvPr/>
+        </p:nvPicPr>
+        <p:blipFill>
+          <a:blip r:embed="rId2"/>
+          <a:srcRect/>
+          <a:stretch/>
+        </p:blipFill>
+        <p:spPr>
+          <a:xfrm>
+            <a:off x="604562" y="1037293"/>
+            <a:ext cx="3652970" cy="1129675"/>
+          </a:xfrm>
+          <a:prstGeom prst="rect">
+            <a:avLst/>
+          </a:prstGeom>
+        </p:spPr>
+      </p:pic>
+      <p:pic>
+        <p:nvPicPr>
+          <p:cNvPr id="5" name="Picture 4">
+            <a:extLst>
+              <a:ext uri="{FF2B5EF4-FFF2-40B4-BE49-F238E27FC236}">
+                <a16:creationId xmlns:a16="http://schemas.microsoft.com/office/drawing/2014/main" id="{9FB16C53-FBC7-CED9-AF0F-EC9CEFD00D83}"/>
+              </a:ext>
+            </a:extLst>
+          </p:cNvPr>
+          <p:cNvPicPr>
+            <a:picLocks noChangeAspect="1"/>
+          </p:cNvPicPr>
+          <p:nvPr/>
+        </p:nvPicPr>
+        <p:blipFill>
+          <a:blip r:embed="rId3"/>
+          <a:srcRect/>
+          <a:stretch/>
+        </p:blipFill>
+        <p:spPr>
+          <a:xfrm>
+            <a:off x="602248" y="2238998"/>
+            <a:ext cx="3657600" cy="2438400"/>
+          </a:xfrm>
+          <a:prstGeom prst="rect">
+            <a:avLst/>
+          </a:prstGeom>
+        </p:spPr>
+      </p:pic>
+      <p:pic>
+        <p:nvPicPr>
+          <p:cNvPr id="6" name="Picture 5">
+            <a:extLst>
+              <a:ext uri="{FF2B5EF4-FFF2-40B4-BE49-F238E27FC236}">
+                <a16:creationId xmlns:a16="http://schemas.microsoft.com/office/drawing/2014/main" id="{CB0F74DF-DB82-E81E-C9F7-733E715354E8}"/>
+              </a:ext>
+            </a:extLst>
+          </p:cNvPr>
+          <p:cNvPicPr>
+            <a:picLocks noChangeAspect="1"/>
+          </p:cNvPicPr>
+          <p:nvPr/>
+        </p:nvPicPr>
+        <p:blipFill>
+          <a:blip r:embed="rId4"/>
+          <a:srcRect/>
+          <a:stretch/>
+        </p:blipFill>
+        <p:spPr>
+          <a:xfrm>
+            <a:off x="4884153" y="1352550"/>
+            <a:ext cx="3657600" cy="2438400"/>
+          </a:xfrm>
+          <a:prstGeom prst="rect">
+            <a:avLst/>
+          </a:prstGeom>
+        </p:spPr>
+      </p:pic>
+    </p:spTree>
+    <p:extLst>
+      <p:ext uri="{BB962C8B-B14F-4D97-AF65-F5344CB8AC3E}">
+        <p14:creationId xmlns:p14="http://schemas.microsoft.com/office/powerpoint/2010/main" val="1068132791"/>
+      </p:ext>
+    </p:extLst>
+  </p:cSld>
+  <p:clrMapOvr>
+    <a:masterClrMapping/>
+  </p:clrMapOvr>
+</p:sld>
+</file>
+
+<file path=ppt/slides/slide17.xml><?xml version="1.0" encoding="utf-8"?>
 <p:sld xmlns:a="http://schemas.openxmlformats.org/drawingml/2006/main" xmlns:r="http://schemas.openxmlformats.org/officeDocument/2006/relationships" xmlns:p="http://schemas.openxmlformats.org/presentationml/2006/main">
   <p:cSld>
     <p:spTree>
@@ -5949,11 +6209,11 @@
           <a:lstStyle/>
           <a:p>
             <a:fld id="{610C4E4B-DC7F-8F40-B47C-DF522102C54B}" type="slidenum">
-              <a:rPr lang="sv-SE" smtClean="0"/>
+              <a:rPr lang="en-US" noProof="0" smtClean="0"/>
               <a:pPr/>
-              <a:t>11</a:t>
+              <a:t>17</a:t>
             </a:fld>
-            <a:endParaRPr lang="sv-SE" dirty="0"/>
+            <a:endParaRPr lang="en-US" noProof="0" dirty="0"/>
           </a:p>
         </p:txBody>
       </p:sp>
@@ -5972,7 +6232,7 @@
           <p:nvPr>
             <p:extLst>
               <p:ext uri="{D42A27DB-BD31-4B8C-83A1-F6EECF244321}">
-                <p14:modId xmlns:p14="http://schemas.microsoft.com/office/powerpoint/2010/main" val="93559264"/>
+                <p14:modId xmlns:p14="http://schemas.microsoft.com/office/powerpoint/2010/main" val="2138393865"/>
               </p:ext>
             </p:extLst>
           </p:nvPr>
@@ -6030,7 +6290,7 @@
                     <a:bodyPr/>
                     <a:lstStyle/>
                     <a:p>
-                      <a:endParaRPr lang="en-DE" sz="1100"/>
+                      <a:endParaRPr lang="en-US" sz="1100" noProof="0" dirty="0"/>
                     </a:p>
                   </a:txBody>
                   <a:tcPr/>
@@ -6042,14 +6302,14 @@
                     <a:p>
                       <a:pPr algn="r"/>
                       <a:r>
-                        <a:rPr lang="en-DE" sz="1100" dirty="0"/>
+                        <a:rPr lang="en-US" sz="1100" noProof="0" dirty="0"/>
                         <a:t>Acceleration </a:t>
                       </a:r>
                       <a:br>
-                        <a:rPr lang="en-DE" sz="1100" dirty="0"/>
+                        <a:rPr lang="en-US" sz="1100" noProof="0" dirty="0"/>
                       </a:br>
                       <a:r>
-                        <a:rPr lang="en-DE" sz="1100" dirty="0"/>
+                        <a:rPr lang="en-US" sz="1100" noProof="0" dirty="0"/>
                         <a:t>[sec.]</a:t>
                       </a:r>
                     </a:p>
@@ -6063,7 +6323,7 @@
                     <a:p>
                       <a:pPr algn="r"/>
                       <a:r>
-                        <a:rPr lang="en-DE" sz="1100" dirty="0"/>
+                        <a:rPr lang="en-US" sz="1100" noProof="0" dirty="0"/>
                         <a:t>Maximum Speed [km/h]</a:t>
                       </a:r>
                     </a:p>
@@ -6077,7 +6337,7 @@
                     <a:p>
                       <a:pPr algn="r"/>
                       <a:r>
-                        <a:rPr lang="en-DE" sz="1100" dirty="0"/>
+                        <a:rPr lang="en-US" sz="1100" noProof="0" dirty="0"/>
                         <a:t>Fuel Consumption [l/100km]</a:t>
                       </a:r>
                     </a:p>
@@ -6091,14 +6351,14 @@
                     <a:p>
                       <a:pPr algn="r"/>
                       <a:r>
-                        <a:rPr lang="en-DE" sz="1100" dirty="0"/>
+                        <a:rPr lang="en-US" sz="1100" noProof="0" dirty="0"/>
                         <a:t>Price </a:t>
                       </a:r>
                       <a:br>
-                        <a:rPr lang="en-DE" sz="1100" dirty="0"/>
+                        <a:rPr lang="en-US" sz="1100" noProof="0" dirty="0"/>
                       </a:br>
                       <a:r>
-                        <a:rPr lang="en-DE" sz="1100" dirty="0"/>
+                        <a:rPr lang="en-US" sz="1100" noProof="0" dirty="0"/>
                         <a:t>[€]</a:t>
                       </a:r>
                     </a:p>
@@ -6118,7 +6378,7 @@
                     <a:lstStyle/>
                     <a:p>
                       <a:r>
-                        <a:rPr lang="en-DE" sz="1100" dirty="0"/>
+                        <a:rPr lang="en-US" sz="1100" noProof="0" dirty="0"/>
                         <a:t>Car #1</a:t>
                       </a:r>
                     </a:p>
@@ -6132,8 +6392,8 @@
                     <a:p>
                       <a:pPr algn="r"/>
                       <a:r>
-                        <a:rPr lang="en-DE" sz="1100" dirty="0"/>
-                        <a:t>12.7</a:t>
+                        <a:rPr lang="en-US" sz="1100" noProof="0" dirty="0"/>
+                        <a:t>12.2</a:t>
                       </a:r>
                     </a:p>
                   </a:txBody>
@@ -6150,8 +6410,8 @@
                     <a:p>
                       <a:pPr algn="r"/>
                       <a:r>
-                        <a:rPr lang="en-DE" sz="1100" dirty="0"/>
-                        <a:t>186</a:t>
+                        <a:rPr lang="en-US" sz="1100" noProof="0" dirty="0"/>
+                        <a:t>185</a:t>
                       </a:r>
                     </a:p>
                   </a:txBody>
@@ -6168,8 +6428,8 @@
                     <a:p>
                       <a:pPr algn="r"/>
                       <a:r>
-                        <a:rPr lang="en-DE" sz="1100" dirty="0"/>
-                        <a:t>6.2</a:t>
+                        <a:rPr lang="en-US" sz="1100" noProof="0" dirty="0"/>
+                        <a:t>7.2</a:t>
                       </a:r>
                     </a:p>
                   </a:txBody>
@@ -6186,8 +6446,8 @@
                     <a:p>
                       <a:pPr algn="r"/>
                       <a:r>
-                        <a:rPr lang="en-DE" sz="1100" dirty="0"/>
-                        <a:t>18220</a:t>
+                        <a:rPr lang="en-US" sz="1100" noProof="0" dirty="0"/>
+                        <a:t>16578</a:t>
                       </a:r>
                     </a:p>
                   </a:txBody>
@@ -6210,7 +6470,7 @@
                     <a:lstStyle/>
                     <a:p>
                       <a:r>
-                        <a:rPr lang="en-DE" sz="1100" dirty="0"/>
+                        <a:rPr lang="en-US" sz="1100" noProof="0" dirty="0"/>
                         <a:t>Car #2</a:t>
                       </a:r>
                     </a:p>
@@ -6228,8 +6488,8 @@
                     <a:p>
                       <a:pPr algn="r"/>
                       <a:r>
-                        <a:rPr lang="en-DE" sz="1100" dirty="0"/>
-                        <a:t>3.8</a:t>
+                        <a:rPr lang="en-US" sz="1100" noProof="0" dirty="0"/>
+                        <a:t>3.2</a:t>
                       </a:r>
                     </a:p>
                   </a:txBody>
@@ -6246,8 +6506,8 @@
                     <a:p>
                       <a:pPr algn="r"/>
                       <a:r>
-                        <a:rPr lang="en-DE" sz="1100" dirty="0"/>
-                        <a:t>332</a:t>
+                        <a:rPr lang="en-US" sz="1100" noProof="0" dirty="0"/>
+                        <a:t>337</a:t>
                       </a:r>
                     </a:p>
                   </a:txBody>
@@ -6264,7 +6524,7 @@
                     <a:p>
                       <a:pPr algn="r"/>
                       <a:r>
-                        <a:rPr lang="en-DE" sz="1100" dirty="0"/>
+                        <a:rPr lang="en-US" sz="1100" noProof="0" dirty="0"/>
                         <a:t>22.4</a:t>
                       </a:r>
                     </a:p>
@@ -6282,8 +6542,8 @@
                     <a:p>
                       <a:pPr algn="r"/>
                       <a:r>
-                        <a:rPr lang="en-DE" sz="1100" dirty="0"/>
-                        <a:t>264971</a:t>
+                        <a:rPr lang="en-US" sz="1100" noProof="0" dirty="0"/>
+                        <a:t>237445</a:t>
                       </a:r>
                     </a:p>
                   </a:txBody>
@@ -6306,7 +6566,7 @@
                     <a:lstStyle/>
                     <a:p>
                       <a:r>
-                        <a:rPr lang="en-DE" sz="1100" dirty="0"/>
+                        <a:rPr lang="en-US" sz="1100" noProof="0" dirty="0"/>
                         <a:t>Car #3</a:t>
                       </a:r>
                     </a:p>
@@ -6320,8 +6580,8 @@
                     <a:p>
                       <a:pPr algn="r"/>
                       <a:r>
-                        <a:rPr lang="en-DE" sz="1100" dirty="0"/>
-                        <a:t>11.6</a:t>
+                        <a:rPr lang="en-US" sz="1100" noProof="0" dirty="0"/>
+                        <a:t>10.5</a:t>
                       </a:r>
                     </a:p>
                   </a:txBody>
@@ -6338,8 +6598,8 @@
                     <a:p>
                       <a:pPr algn="r"/>
                       <a:r>
-                        <a:rPr lang="en-DE" sz="1100" dirty="0"/>
-                        <a:t>187</a:t>
+                        <a:rPr lang="en-US" sz="1100" noProof="0" dirty="0"/>
+                        <a:t>197</a:t>
                       </a:r>
                     </a:p>
                   </a:txBody>
@@ -6356,8 +6616,8 @@
                     <a:p>
                       <a:pPr algn="r"/>
                       <a:r>
-                        <a:rPr lang="en-DE" sz="1100" dirty="0"/>
-                        <a:t>7.2</a:t>
+                        <a:rPr lang="en-US" sz="1100" noProof="0" dirty="0"/>
+                        <a:t>7.4</a:t>
                       </a:r>
                     </a:p>
                   </a:txBody>
@@ -6374,8 +6634,8 @@
                     <a:p>
                       <a:pPr algn="r"/>
                       <a:r>
-                        <a:rPr lang="en-DE" sz="1100" dirty="0"/>
-                        <a:t>12812</a:t>
+                        <a:rPr lang="en-US" sz="1100" noProof="0" dirty="0"/>
+                        <a:t>18942</a:t>
                       </a:r>
                     </a:p>
                   </a:txBody>
@@ -6398,7 +6658,7 @@
                     <a:lstStyle/>
                     <a:p>
                       <a:r>
-                        <a:rPr lang="en-DE" sz="1100" dirty="0"/>
+                        <a:rPr lang="en-US" sz="1100" noProof="0" dirty="0"/>
                         <a:t>Car #4</a:t>
                       </a:r>
                     </a:p>
@@ -6412,8 +6672,8 @@
                     <a:p>
                       <a:pPr algn="r"/>
                       <a:r>
-                        <a:rPr lang="en-DE" sz="1100" dirty="0"/>
-                        <a:t>12.8</a:t>
+                        <a:rPr lang="en-US" sz="1100" noProof="0" dirty="0"/>
+                        <a:t>10.8</a:t>
                       </a:r>
                     </a:p>
                   </a:txBody>
@@ -6430,8 +6690,8 @@
                     <a:p>
                       <a:pPr algn="r"/>
                       <a:r>
-                        <a:rPr lang="en-DE" sz="1100" dirty="0"/>
-                        <a:t>184</a:t>
+                        <a:rPr lang="en-US" sz="1100" noProof="0" dirty="0"/>
+                        <a:t>192</a:t>
                       </a:r>
                     </a:p>
                   </a:txBody>
@@ -6448,8 +6708,8 @@
                     <a:p>
                       <a:pPr algn="r"/>
                       <a:r>
-                        <a:rPr lang="en-DE" sz="1100" dirty="0"/>
-                        <a:t>6.6</a:t>
+                        <a:rPr lang="en-US" sz="1100" noProof="0" dirty="0"/>
+                        <a:t>7.2</a:t>
                       </a:r>
                     </a:p>
                   </a:txBody>
@@ -6466,8 +6726,8 @@
                     <a:p>
                       <a:pPr algn="r"/>
                       <a:r>
-                        <a:rPr lang="en-DE" sz="1100" dirty="0"/>
-                        <a:t>15769</a:t>
+                        <a:rPr lang="en-US" sz="1100" noProof="0" dirty="0"/>
+                        <a:t>17125</a:t>
                       </a:r>
                     </a:p>
                   </a:txBody>
@@ -6490,7 +6750,7 @@
                     <a:lstStyle/>
                     <a:p>
                       <a:r>
-                        <a:rPr lang="en-DE" sz="1100" dirty="0"/>
+                        <a:rPr lang="en-US" sz="1100" noProof="0" dirty="0"/>
                         <a:t>Car #5</a:t>
                       </a:r>
                     </a:p>
@@ -6504,8 +6764,8 @@
                     <a:p>
                       <a:pPr algn="r"/>
                       <a:r>
-                        <a:rPr lang="en-DE" sz="1100" dirty="0"/>
-                        <a:t>9.2</a:t>
+                        <a:rPr lang="en-US" sz="1100" noProof="0" dirty="0"/>
+                        <a:t>10.2</a:t>
                       </a:r>
                     </a:p>
                   </a:txBody>
@@ -6518,8 +6778,8 @@
                     <a:p>
                       <a:pPr algn="r"/>
                       <a:r>
-                        <a:rPr lang="en-DE" sz="1100" dirty="0"/>
-                        <a:t>210</a:t>
+                        <a:rPr lang="en-US" sz="1100" noProof="0" dirty="0"/>
+                        <a:t>207</a:t>
                       </a:r>
                     </a:p>
                   </a:txBody>
@@ -6532,8 +6792,8 @@
                     <a:p>
                       <a:pPr algn="r"/>
                       <a:r>
-                        <a:rPr lang="en-DE" sz="1100" dirty="0"/>
-                        <a:t>6.3</a:t>
+                        <a:rPr lang="en-US" sz="1100" noProof="0" dirty="0"/>
+                        <a:t>7.5</a:t>
                       </a:r>
                     </a:p>
                   </a:txBody>
@@ -6546,8 +6806,8 @@
                     <a:p>
                       <a:pPr algn="r"/>
                       <a:r>
-                        <a:rPr lang="en-DE" sz="1100" dirty="0"/>
-                        <a:t>23797</a:t>
+                        <a:rPr lang="en-US" sz="1100" noProof="0" dirty="0"/>
+                        <a:t>22742</a:t>
                       </a:r>
                     </a:p>
                   </a:txBody>
@@ -6591,18 +6851,9 @@
           <a:p>
             <a:pPr algn="ctr"/>
             <a:r>
-              <a:rPr lang="de-DE" sz="3200" dirty="0" err="1"/>
-              <a:t>Model‘s</a:t>
+              <a:rPr lang="en-US" sz="3200" noProof="0" dirty="0"/>
+              <a:t>Models' predictions</a:t>
             </a:r>
-            <a:r>
-              <a:rPr lang="de-DE" sz="3200" dirty="0"/>
-              <a:t> </a:t>
-            </a:r>
-            <a:r>
-              <a:rPr lang="de-DE" sz="3200" dirty="0" err="1"/>
-              <a:t>predictions</a:t>
-            </a:r>
-            <a:endParaRPr lang="en-GB" sz="3200" dirty="0"/>
           </a:p>
         </p:txBody>
       </p:sp>
@@ -6619,15 +6870,15 @@
 </p:sld>
 </file>
 
-<file path=ppt/slides/slide2.xml><?xml version="1.0" encoding="utf-8"?>
-<p:sld xmlns:a="http://schemas.openxmlformats.org/drawingml/2006/main" xmlns:r="http://schemas.openxmlformats.org/officeDocument/2006/relationships" xmlns:p="http://schemas.openxmlformats.org/presentationml/2006/main">
+<file path=ppt/slides/slide18.xml><?xml version="1.0" encoding="utf-8"?>
+<p:sld xmlns:a="http://schemas.openxmlformats.org/drawingml/2006/main" xmlns:r="http://schemas.openxmlformats.org/officeDocument/2006/relationships" xmlns:p="http://schemas.openxmlformats.org/presentationml/2006/main" show="0">
   <p:cSld>
     <p:spTree>
       <p:nvGrpSpPr>
         <p:cNvPr id="1" name="">
           <a:extLst>
             <a:ext uri="{FF2B5EF4-FFF2-40B4-BE49-F238E27FC236}">
-              <a16:creationId xmlns:a16="http://schemas.microsoft.com/office/drawing/2014/main" id="{4601628E-E61F-E595-0D73-97EC66E066CB}"/>
+              <a16:creationId xmlns:a16="http://schemas.microsoft.com/office/drawing/2014/main" id="{93B243D2-F82F-9BFA-CD02-54C72B12D614}"/>
             </a:ext>
           </a:extLst>
         </p:cNvPr>
@@ -6647,7 +6898,7 @@
           <p:cNvPr id="4" name="Foliennummernplatzhalter 3">
             <a:extLst>
               <a:ext uri="{FF2B5EF4-FFF2-40B4-BE49-F238E27FC236}">
-                <a16:creationId xmlns:a16="http://schemas.microsoft.com/office/drawing/2014/main" id="{028FFF86-F2EA-5756-926F-E07F79D3AAB5}"/>
+                <a16:creationId xmlns:a16="http://schemas.microsoft.com/office/drawing/2014/main" id="{BE0B9BCD-137E-DD46-C20C-E0C613DCF494}"/>
               </a:ext>
             </a:extLst>
           </p:cNvPr>
@@ -6664,11 +6915,11 @@
           <a:lstStyle/>
           <a:p>
             <a:fld id="{610C4E4B-DC7F-8F40-B47C-DF522102C54B}" type="slidenum">
-              <a:rPr lang="sv-SE" smtClean="0"/>
+              <a:rPr lang="en-US" noProof="0" smtClean="0"/>
               <a:pPr/>
-              <a:t>2</a:t>
+              <a:t>18</a:t>
             </a:fld>
-            <a:endParaRPr lang="sv-SE" dirty="0"/>
+            <a:endParaRPr lang="en-US" noProof="0" dirty="0"/>
           </a:p>
         </p:txBody>
       </p:sp>
@@ -6677,7 +6928,7 @@
           <p:cNvPr id="6" name="Table 5">
             <a:extLst>
               <a:ext uri="{FF2B5EF4-FFF2-40B4-BE49-F238E27FC236}">
-                <a16:creationId xmlns:a16="http://schemas.microsoft.com/office/drawing/2014/main" id="{0F5E5372-8F1E-E3E8-53F2-9894170CEBD9}"/>
+                <a16:creationId xmlns:a16="http://schemas.microsoft.com/office/drawing/2014/main" id="{FCB14804-1F3C-7A65-628C-55E905B719D0}"/>
               </a:ext>
             </a:extLst>
           </p:cNvPr>
@@ -6687,7 +6938,7 @@
           <p:nvPr>
             <p:extLst>
               <p:ext uri="{D42A27DB-BD31-4B8C-83A1-F6EECF244321}">
-                <p14:modId xmlns:p14="http://schemas.microsoft.com/office/powerpoint/2010/main" val="1610799107"/>
+                <p14:modId xmlns:p14="http://schemas.microsoft.com/office/powerpoint/2010/main" val="992624662"/>
               </p:ext>
             </p:extLst>
           </p:nvPr>
@@ -6745,7 +6996,7 @@
                     <a:bodyPr/>
                     <a:lstStyle/>
                     <a:p>
-                      <a:endParaRPr lang="en-DE" sz="1100"/>
+                      <a:endParaRPr lang="en-US" sz="1100" noProof="0" dirty="0"/>
                     </a:p>
                   </a:txBody>
                   <a:tcPr/>
@@ -6757,14 +7008,14 @@
                     <a:p>
                       <a:pPr algn="r"/>
                       <a:r>
-                        <a:rPr lang="en-DE" sz="1100" dirty="0"/>
+                        <a:rPr lang="en-US" sz="1100" noProof="0" dirty="0"/>
                         <a:t>Acceleration </a:t>
                       </a:r>
                       <a:br>
-                        <a:rPr lang="en-DE" sz="1100" dirty="0"/>
+                        <a:rPr lang="en-US" sz="1100" noProof="0" dirty="0"/>
                       </a:br>
                       <a:r>
-                        <a:rPr lang="en-DE" sz="1100" dirty="0"/>
+                        <a:rPr lang="en-US" sz="1100" noProof="0" dirty="0"/>
                         <a:t>[sec.]</a:t>
                       </a:r>
                     </a:p>
@@ -6778,7 +7029,7 @@
                     <a:p>
                       <a:pPr algn="r"/>
                       <a:r>
-                        <a:rPr lang="en-DE" sz="1100" dirty="0"/>
+                        <a:rPr lang="en-US" sz="1100" noProof="0" dirty="0"/>
                         <a:t>Maximum Speed [km/h]</a:t>
                       </a:r>
                     </a:p>
@@ -6792,7 +7043,7 @@
                     <a:p>
                       <a:pPr algn="r"/>
                       <a:r>
-                        <a:rPr lang="en-DE" sz="1100" dirty="0"/>
+                        <a:rPr lang="en-US" sz="1100" noProof="0" dirty="0"/>
                         <a:t>Fuel Consumption [l/100km]</a:t>
                       </a:r>
                     </a:p>
@@ -6806,14 +7057,14 @@
                     <a:p>
                       <a:pPr algn="r"/>
                       <a:r>
-                        <a:rPr lang="en-DE" sz="1100" dirty="0"/>
+                        <a:rPr lang="en-US" sz="1100" noProof="0" dirty="0"/>
                         <a:t>Price </a:t>
                       </a:r>
                       <a:br>
-                        <a:rPr lang="en-DE" sz="1100" dirty="0"/>
+                        <a:rPr lang="en-US" sz="1100" noProof="0" dirty="0"/>
                       </a:br>
                       <a:r>
-                        <a:rPr lang="en-DE" sz="1100" dirty="0"/>
+                        <a:rPr lang="en-US" sz="1100" noProof="0" dirty="0"/>
                         <a:t>[€]</a:t>
                       </a:r>
                     </a:p>
@@ -6833,7 +7084,7 @@
                     <a:lstStyle/>
                     <a:p>
                       <a:r>
-                        <a:rPr lang="en-DE" sz="1100" dirty="0"/>
+                        <a:rPr lang="en-US" sz="1100" noProof="0" dirty="0"/>
                         <a:t>Cylinders</a:t>
                       </a:r>
                     </a:p>
@@ -6845,7 +7096,7 @@
                     <a:bodyPr/>
                     <a:lstStyle/>
                     <a:p>
-                      <a:endParaRPr lang="en-DE" sz="1100" dirty="0"/>
+                      <a:endParaRPr lang="en-US" sz="1100" noProof="0" dirty="0"/>
                     </a:p>
                   </a:txBody>
                   <a:tcPr/>
@@ -6855,7 +7106,7 @@
                     <a:bodyPr/>
                     <a:lstStyle/>
                     <a:p>
-                      <a:endParaRPr lang="en-DE" sz="1100" dirty="0"/>
+                      <a:endParaRPr lang="en-US" sz="1100" noProof="0" dirty="0"/>
                     </a:p>
                   </a:txBody>
                   <a:tcPr/>
@@ -6865,7 +7116,7 @@
                     <a:bodyPr/>
                     <a:lstStyle/>
                     <a:p>
-                      <a:endParaRPr lang="en-DE" sz="1100" dirty="0"/>
+                      <a:endParaRPr lang="en-US" sz="1100" noProof="0" dirty="0"/>
                     </a:p>
                   </a:txBody>
                   <a:tcPr/>
@@ -6875,7 +7126,7 @@
                     <a:bodyPr/>
                     <a:lstStyle/>
                     <a:p>
-                      <a:endParaRPr lang="en-DE" sz="1100" dirty="0"/>
+                      <a:endParaRPr lang="en-US" sz="1100" noProof="0" dirty="0"/>
                     </a:p>
                   </a:txBody>
                   <a:tcPr>
@@ -6897,7 +7148,7 @@
                     <a:lstStyle/>
                     <a:p>
                       <a:r>
-                        <a:rPr lang="en-DE" sz="1100" dirty="0"/>
+                        <a:rPr lang="en-US" sz="1100" noProof="0" dirty="0"/>
                         <a:t>Valves/Cylinder</a:t>
                       </a:r>
                     </a:p>
@@ -6913,7 +7164,7 @@
                     <a:bodyPr/>
                     <a:lstStyle/>
                     <a:p>
-                      <a:endParaRPr lang="en-DE" sz="1100" dirty="0"/>
+                      <a:endParaRPr lang="en-US" sz="1100" noProof="0" dirty="0"/>
                     </a:p>
                   </a:txBody>
                   <a:tcPr>
@@ -6927,7 +7178,7 @@
                     <a:bodyPr/>
                     <a:lstStyle/>
                     <a:p>
-                      <a:endParaRPr lang="en-DE" sz="1100"/>
+                      <a:endParaRPr lang="en-US" sz="1100" noProof="0" dirty="0"/>
                     </a:p>
                   </a:txBody>
                   <a:tcPr>
@@ -6941,7 +7192,7 @@
                     <a:bodyPr/>
                     <a:lstStyle/>
                     <a:p>
-                      <a:endParaRPr lang="en-DE" sz="1100"/>
+                      <a:endParaRPr lang="en-US" sz="1100" noProof="0" dirty="0"/>
                     </a:p>
                   </a:txBody>
                   <a:tcPr>
@@ -6955,7 +7206,7 @@
                     <a:bodyPr/>
                     <a:lstStyle/>
                     <a:p>
-                      <a:endParaRPr lang="en-DE" sz="1100" dirty="0"/>
+                      <a:endParaRPr lang="en-US" sz="1100" noProof="0" dirty="0"/>
                     </a:p>
                   </a:txBody>
                   <a:tcPr>
@@ -6977,7 +7228,7 @@
                     <a:lstStyle/>
                     <a:p>
                       <a:r>
-                        <a:rPr lang="en-DE" sz="1100" dirty="0"/>
+                        <a:rPr lang="en-US" sz="1100" noProof="0" dirty="0"/>
                         <a:t>Displacement [cc]</a:t>
                       </a:r>
                     </a:p>
@@ -6989,7 +7240,7 @@
                     <a:bodyPr/>
                     <a:lstStyle/>
                     <a:p>
-                      <a:endParaRPr lang="en-DE" sz="1100" dirty="0"/>
+                      <a:endParaRPr lang="en-US" sz="1100" noProof="0" dirty="0"/>
                     </a:p>
                   </a:txBody>
                   <a:tcPr>
@@ -7003,7 +7254,7 @@
                     <a:bodyPr/>
                     <a:lstStyle/>
                     <a:p>
-                      <a:endParaRPr lang="en-DE" sz="1100" dirty="0"/>
+                      <a:endParaRPr lang="en-US" sz="1100" noProof="0" dirty="0"/>
                     </a:p>
                   </a:txBody>
                   <a:tcPr>
@@ -7017,7 +7268,7 @@
                     <a:bodyPr/>
                     <a:lstStyle/>
                     <a:p>
-                      <a:endParaRPr lang="en-DE" sz="1100" dirty="0"/>
+                      <a:endParaRPr lang="en-US" sz="1100" noProof="0" dirty="0"/>
                     </a:p>
                   </a:txBody>
                   <a:tcPr>
@@ -7031,7 +7282,7 @@
                     <a:bodyPr/>
                     <a:lstStyle/>
                     <a:p>
-                      <a:endParaRPr lang="en-DE" sz="1100" dirty="0"/>
+                      <a:endParaRPr lang="en-US" sz="1100" noProof="0" dirty="0"/>
                     </a:p>
                   </a:txBody>
                   <a:tcPr/>
@@ -7049,7 +7300,7 @@
                     <a:lstStyle/>
                     <a:p>
                       <a:r>
-                        <a:rPr lang="en-DE" sz="1100" dirty="0"/>
+                        <a:rPr lang="en-US" sz="1100" noProof="0" dirty="0"/>
                         <a:t>Turbo</a:t>
                       </a:r>
                     </a:p>
@@ -7061,7 +7312,7 @@
                     <a:bodyPr/>
                     <a:lstStyle/>
                     <a:p>
-                      <a:endParaRPr lang="en-DE" sz="1100" dirty="0"/>
+                      <a:endParaRPr lang="en-US" sz="1100" noProof="0" dirty="0"/>
                     </a:p>
                   </a:txBody>
                   <a:tcPr>
@@ -7075,7 +7326,7 @@
                     <a:bodyPr/>
                     <a:lstStyle/>
                     <a:p>
-                      <a:endParaRPr lang="en-DE" sz="1100" dirty="0"/>
+                      <a:endParaRPr lang="en-US" sz="1100" noProof="0" dirty="0"/>
                     </a:p>
                   </a:txBody>
                   <a:tcPr>
@@ -7089,7 +7340,7 @@
                     <a:bodyPr/>
                     <a:lstStyle/>
                     <a:p>
-                      <a:endParaRPr lang="en-DE" sz="1100" dirty="0"/>
+                      <a:endParaRPr lang="en-US" sz="1100" noProof="0" dirty="0"/>
                     </a:p>
                   </a:txBody>
                   <a:tcPr>
@@ -7103,7 +7354,7 @@
                     <a:bodyPr/>
                     <a:lstStyle/>
                     <a:p>
-                      <a:endParaRPr lang="en-DE" sz="1100" dirty="0"/>
+                      <a:endParaRPr lang="en-US" sz="1100" noProof="0" dirty="0"/>
                     </a:p>
                   </a:txBody>
                   <a:tcPr>
@@ -7125,7 +7376,7 @@
                     <a:lstStyle/>
                     <a:p>
                       <a:r>
-                        <a:rPr lang="en-DE" sz="1100" dirty="0"/>
+                        <a:rPr lang="en-US" sz="1100" noProof="0" dirty="0"/>
                         <a:t>Power [hp]</a:t>
                       </a:r>
                     </a:p>
@@ -7137,7 +7388,7 @@
                     <a:bodyPr/>
                     <a:lstStyle/>
                     <a:p>
-                      <a:endParaRPr lang="en-DE" sz="1100" dirty="0"/>
+                      <a:endParaRPr lang="en-US" sz="1100" noProof="0" dirty="0"/>
                     </a:p>
                   </a:txBody>
                   <a:tcPr/>
@@ -7147,7 +7398,7 @@
                     <a:bodyPr/>
                     <a:lstStyle/>
                     <a:p>
-                      <a:endParaRPr lang="en-DE" sz="1100" dirty="0"/>
+                      <a:endParaRPr lang="en-US" sz="1100" noProof="0" dirty="0"/>
                     </a:p>
                   </a:txBody>
                   <a:tcPr/>
@@ -7157,7 +7408,7 @@
                     <a:bodyPr/>
                     <a:lstStyle/>
                     <a:p>
-                      <a:endParaRPr lang="en-DE" sz="1100" dirty="0"/>
+                      <a:endParaRPr lang="en-US" sz="1100" noProof="0" dirty="0"/>
                     </a:p>
                   </a:txBody>
                   <a:tcPr/>
@@ -7167,7 +7418,7 @@
                     <a:bodyPr/>
                     <a:lstStyle/>
                     <a:p>
-                      <a:endParaRPr lang="en-DE" sz="1100" dirty="0"/>
+                      <a:endParaRPr lang="en-US" sz="1100" noProof="0" dirty="0"/>
                     </a:p>
                   </a:txBody>
                   <a:tcPr/>
@@ -7185,7 +7436,7 @@
                     <a:lstStyle/>
                     <a:p>
                       <a:r>
-                        <a:rPr lang="en-DE" sz="1100" dirty="0"/>
+                        <a:rPr lang="en-US" sz="1100" noProof="0" dirty="0"/>
                         <a:t>Max Torque [nm]</a:t>
                       </a:r>
                     </a:p>
@@ -7201,7 +7452,7 @@
                     <a:bodyPr/>
                     <a:lstStyle/>
                     <a:p>
-                      <a:endParaRPr lang="en-DE" sz="1100" dirty="0"/>
+                      <a:endParaRPr lang="en-US" sz="1100" noProof="0" dirty="0"/>
                     </a:p>
                   </a:txBody>
                   <a:tcPr>
@@ -7215,7 +7466,7 @@
                     <a:bodyPr/>
                     <a:lstStyle/>
                     <a:p>
-                      <a:endParaRPr lang="en-DE" sz="1100" dirty="0"/>
+                      <a:endParaRPr lang="en-US" sz="1100" noProof="0" dirty="0"/>
                     </a:p>
                   </a:txBody>
                   <a:tcPr>
@@ -7229,7 +7480,7 @@
                     <a:bodyPr/>
                     <a:lstStyle/>
                     <a:p>
-                      <a:endParaRPr lang="en-DE" sz="1100" dirty="0"/>
+                      <a:endParaRPr lang="en-US" sz="1100" noProof="0" dirty="0"/>
                     </a:p>
                   </a:txBody>
                   <a:tcPr>
@@ -7243,7 +7494,7 @@
                     <a:bodyPr/>
                     <a:lstStyle/>
                     <a:p>
-                      <a:endParaRPr lang="en-DE" sz="1100" dirty="0"/>
+                      <a:endParaRPr lang="en-US" sz="1100" noProof="0" dirty="0"/>
                     </a:p>
                   </a:txBody>
                   <a:tcPr>
@@ -7265,7 +7516,7 @@
                     <a:lstStyle/>
                     <a:p>
                       <a:r>
-                        <a:rPr lang="en-DE" sz="1100" dirty="0"/>
+                        <a:rPr lang="en-US" sz="1100" noProof="0" dirty="0"/>
                         <a:t>Length [mm]</a:t>
                       </a:r>
                     </a:p>
@@ -7277,7 +7528,7 @@
                     <a:bodyPr/>
                     <a:lstStyle/>
                     <a:p>
-                      <a:endParaRPr lang="en-DE" sz="1100" dirty="0"/>
+                      <a:endParaRPr lang="en-US" sz="1100" noProof="0" dirty="0"/>
                     </a:p>
                   </a:txBody>
                   <a:tcPr>
@@ -7291,7 +7542,7 @@
                     <a:bodyPr/>
                     <a:lstStyle/>
                     <a:p>
-                      <a:endParaRPr lang="en-DE" sz="1100" dirty="0"/>
+                      <a:endParaRPr lang="en-US" sz="1100" noProof="0" dirty="0"/>
                     </a:p>
                   </a:txBody>
                   <a:tcPr>
@@ -7305,7 +7556,7 @@
                     <a:bodyPr/>
                     <a:lstStyle/>
                     <a:p>
-                      <a:endParaRPr lang="en-DE" sz="1100" dirty="0"/>
+                      <a:endParaRPr lang="en-US" sz="1100" noProof="0" dirty="0"/>
                     </a:p>
                   </a:txBody>
                   <a:tcPr/>
@@ -7315,7 +7566,7 @@
                     <a:bodyPr/>
                     <a:lstStyle/>
                     <a:p>
-                      <a:endParaRPr lang="en-DE" sz="1100" dirty="0"/>
+                      <a:endParaRPr lang="en-US" sz="1100" noProof="0" dirty="0"/>
                     </a:p>
                   </a:txBody>
                   <a:tcPr>
@@ -7337,7 +7588,7 @@
                     <a:lstStyle/>
                     <a:p>
                       <a:r>
-                        <a:rPr lang="en-DE" sz="1100" dirty="0"/>
+                        <a:rPr lang="en-US" sz="1100" noProof="0" dirty="0"/>
                         <a:t>Width [mm]</a:t>
                       </a:r>
                     </a:p>
@@ -7353,7 +7604,7 @@
                     <a:bodyPr/>
                     <a:lstStyle/>
                     <a:p>
-                      <a:endParaRPr lang="en-DE" sz="1100" dirty="0"/>
+                      <a:endParaRPr lang="en-US" sz="1100" noProof="0" dirty="0"/>
                     </a:p>
                   </a:txBody>
                   <a:tcPr>
@@ -7367,7 +7618,7 @@
                     <a:bodyPr/>
                     <a:lstStyle/>
                     <a:p>
-                      <a:endParaRPr lang="en-DE" sz="1100" dirty="0"/>
+                      <a:endParaRPr lang="en-US" sz="1100" noProof="0" dirty="0"/>
                     </a:p>
                   </a:txBody>
                   <a:tcPr>
@@ -7381,7 +7632,7 @@
                     <a:bodyPr/>
                     <a:lstStyle/>
                     <a:p>
-                      <a:endParaRPr lang="en-DE" sz="1100" dirty="0"/>
+                      <a:endParaRPr lang="en-US" sz="1100" noProof="0" dirty="0"/>
                     </a:p>
                   </a:txBody>
                   <a:tcPr>
@@ -7395,7 +7646,7 @@
                     <a:bodyPr/>
                     <a:lstStyle/>
                     <a:p>
-                      <a:endParaRPr lang="en-DE" sz="1100" dirty="0"/>
+                      <a:endParaRPr lang="en-US" sz="1100" noProof="0" dirty="0"/>
                     </a:p>
                   </a:txBody>
                   <a:tcPr>
@@ -7417,7 +7668,7 @@
                     <a:lstStyle/>
                     <a:p>
                       <a:r>
-                        <a:rPr lang="en-DE" sz="1100" dirty="0"/>
+                        <a:rPr lang="en-US" sz="1100" noProof="0" dirty="0"/>
                         <a:t>Height [mm]</a:t>
                       </a:r>
                     </a:p>
@@ -7429,7 +7680,7 @@
                     <a:bodyPr/>
                     <a:lstStyle/>
                     <a:p>
-                      <a:endParaRPr lang="en-DE" sz="1100" dirty="0"/>
+                      <a:endParaRPr lang="en-US" sz="1100" noProof="0" dirty="0"/>
                     </a:p>
                   </a:txBody>
                   <a:tcPr>
@@ -7443,7 +7694,7 @@
                     <a:bodyPr/>
                     <a:lstStyle/>
                     <a:p>
-                      <a:endParaRPr lang="en-DE" sz="1100" dirty="0"/>
+                      <a:endParaRPr lang="en-US" sz="1100" noProof="0" dirty="0"/>
                     </a:p>
                   </a:txBody>
                   <a:tcPr/>
@@ -7453,7 +7704,7 @@
                     <a:bodyPr/>
                     <a:lstStyle/>
                     <a:p>
-                      <a:endParaRPr lang="en-DE" sz="1100" dirty="0"/>
+                      <a:endParaRPr lang="en-US" sz="1100" noProof="0" dirty="0"/>
                     </a:p>
                   </a:txBody>
                   <a:tcPr>
@@ -7467,7 +7718,7 @@
                     <a:bodyPr/>
                     <a:lstStyle/>
                     <a:p>
-                      <a:endParaRPr lang="en-DE" sz="1100" dirty="0"/>
+                      <a:endParaRPr lang="en-US" sz="1100" noProof="0" dirty="0"/>
                     </a:p>
                   </a:txBody>
                   <a:tcPr>
@@ -7489,7 +7740,7 @@
                     <a:lstStyle/>
                     <a:p>
                       <a:r>
-                        <a:rPr lang="en-DE" sz="1100" dirty="0"/>
+                        <a:rPr lang="en-US" sz="1100" noProof="0" dirty="0"/>
                         <a:t>Weight [kg]</a:t>
                       </a:r>
                     </a:p>
@@ -7501,7 +7752,7 @@
                     <a:bodyPr/>
                     <a:lstStyle/>
                     <a:p>
-                      <a:endParaRPr lang="en-DE" sz="1100" dirty="0"/>
+                      <a:endParaRPr lang="en-US" sz="1100" noProof="0" dirty="0"/>
                     </a:p>
                   </a:txBody>
                   <a:tcPr>
@@ -7515,7 +7766,7 @@
                     <a:bodyPr/>
                     <a:lstStyle/>
                     <a:p>
-                      <a:endParaRPr lang="en-DE" sz="1100" dirty="0"/>
+                      <a:endParaRPr lang="en-US" sz="1100" noProof="0" dirty="0"/>
                     </a:p>
                   </a:txBody>
                   <a:tcPr>
@@ -7529,7 +7780,7 @@
                     <a:bodyPr/>
                     <a:lstStyle/>
                     <a:p>
-                      <a:endParaRPr lang="en-DE" sz="1100" dirty="0"/>
+                      <a:endParaRPr lang="en-US" sz="1100" noProof="0" dirty="0"/>
                     </a:p>
                   </a:txBody>
                   <a:tcPr>
@@ -7543,7 +7794,7 @@
                     <a:bodyPr/>
                     <a:lstStyle/>
                     <a:p>
-                      <a:endParaRPr lang="en-DE" sz="1100" dirty="0"/>
+                      <a:endParaRPr lang="en-US" sz="1100" noProof="0" dirty="0"/>
                     </a:p>
                   </a:txBody>
                   <a:tcPr>
@@ -7565,7 +7816,7 @@
                     <a:lstStyle/>
                     <a:p>
                       <a:r>
-                        <a:rPr lang="en-DE" sz="1100" dirty="0"/>
+                        <a:rPr lang="en-US" sz="1100" noProof="0" dirty="0"/>
                         <a:t>Trunk Volume [l]</a:t>
                       </a:r>
                     </a:p>
@@ -7577,7 +7828,7 @@
                     <a:bodyPr/>
                     <a:lstStyle/>
                     <a:p>
-                      <a:endParaRPr lang="en-DE" sz="1100" dirty="0"/>
+                      <a:endParaRPr lang="en-US" sz="1100" noProof="0" dirty="0"/>
                     </a:p>
                   </a:txBody>
                   <a:tcPr/>
@@ -7587,7 +7838,7 @@
                     <a:bodyPr/>
                     <a:lstStyle/>
                     <a:p>
-                      <a:endParaRPr lang="en-DE" sz="1100" dirty="0"/>
+                      <a:endParaRPr lang="en-US" sz="1100" noProof="0" dirty="0"/>
                     </a:p>
                   </a:txBody>
                   <a:tcPr>
@@ -7601,7 +7852,7 @@
                     <a:bodyPr/>
                     <a:lstStyle/>
                     <a:p>
-                      <a:endParaRPr lang="en-DE" sz="1100" dirty="0"/>
+                      <a:endParaRPr lang="en-US" sz="1100" noProof="0" dirty="0"/>
                     </a:p>
                   </a:txBody>
                   <a:tcPr/>
@@ -7611,7 +7862,7 @@
                     <a:bodyPr/>
                     <a:lstStyle/>
                     <a:p>
-                      <a:endParaRPr lang="en-DE" sz="1100" dirty="0"/>
+                      <a:endParaRPr lang="en-US" sz="1100" noProof="0" dirty="0"/>
                     </a:p>
                   </a:txBody>
                   <a:tcPr>
@@ -7633,7 +7884,7 @@
                     <a:lstStyle/>
                     <a:p>
                       <a:r>
-                        <a:rPr lang="en-DE" sz="1100" dirty="0"/>
+                        <a:rPr lang="en-US" sz="1100" noProof="0" dirty="0"/>
                         <a:t>Maximum Speed [km/h]</a:t>
                       </a:r>
                     </a:p>
@@ -7645,7 +7896,7 @@
                     <a:bodyPr/>
                     <a:lstStyle/>
                     <a:p>
-                      <a:endParaRPr lang="en-DE" sz="1100" dirty="0"/>
+                      <a:endParaRPr lang="en-US" sz="1100" noProof="0" dirty="0"/>
                     </a:p>
                   </a:txBody>
                   <a:tcPr>
@@ -7659,7 +7910,7 @@
                     <a:bodyPr/>
                     <a:lstStyle/>
                     <a:p>
-                      <a:endParaRPr lang="en-DE" sz="1100" dirty="0"/>
+                      <a:endParaRPr lang="en-US" sz="1100" noProof="0" dirty="0"/>
                     </a:p>
                   </a:txBody>
                   <a:tcPr>
@@ -7673,7 +7924,7 @@
                     <a:bodyPr/>
                     <a:lstStyle/>
                     <a:p>
-                      <a:endParaRPr lang="en-DE" sz="1100" dirty="0"/>
+                      <a:endParaRPr lang="en-US" sz="1100" noProof="0" dirty="0"/>
                     </a:p>
                   </a:txBody>
                   <a:tcPr>
@@ -7687,7 +7938,7 @@
                     <a:bodyPr/>
                     <a:lstStyle/>
                     <a:p>
-                      <a:endParaRPr lang="en-DE" sz="1100" dirty="0"/>
+                      <a:endParaRPr lang="en-US" sz="1100" noProof="0" dirty="0"/>
                     </a:p>
                   </a:txBody>
                   <a:tcPr>
@@ -7711,7 +7962,7 @@
           <p:cNvPr id="7" name="Titel 1">
             <a:extLst>
               <a:ext uri="{FF2B5EF4-FFF2-40B4-BE49-F238E27FC236}">
-                <a16:creationId xmlns:a16="http://schemas.microsoft.com/office/drawing/2014/main" id="{268C28A9-210F-262C-1AB2-5A1D803DB415}"/>
+                <a16:creationId xmlns:a16="http://schemas.microsoft.com/office/drawing/2014/main" id="{E18029E7-514D-8C4C-7ABF-B91590B629C3}"/>
               </a:ext>
             </a:extLst>
           </p:cNvPr>
@@ -7734,14 +7985,199 @@
           <a:p>
             <a:pPr algn="ctr"/>
             <a:r>
-              <a:rPr lang="de-DE" sz="3200" dirty="0"/>
-              <a:t>Relevant </a:t>
+              <a:rPr lang="en-US" sz="3200" noProof="0" dirty="0"/>
+              <a:t>Relevant parameters</a:t>
             </a:r>
+          </a:p>
+        </p:txBody>
+      </p:sp>
+    </p:spTree>
+    <p:extLst>
+      <p:ext uri="{BB962C8B-B14F-4D97-AF65-F5344CB8AC3E}">
+        <p14:creationId xmlns:p14="http://schemas.microsoft.com/office/powerpoint/2010/main" val="803079230"/>
+      </p:ext>
+    </p:extLst>
+  </p:cSld>
+  <p:clrMapOvr>
+    <a:masterClrMapping/>
+  </p:clrMapOvr>
+</p:sld>
+</file>
+
+<file path=ppt/slides/slide2.xml><?xml version="1.0" encoding="utf-8"?>
+<p:sld xmlns:a="http://schemas.openxmlformats.org/drawingml/2006/main" xmlns:r="http://schemas.openxmlformats.org/officeDocument/2006/relationships" xmlns:p="http://schemas.openxmlformats.org/presentationml/2006/main">
+  <p:cSld>
+    <p:spTree>
+      <p:nvGrpSpPr>
+        <p:cNvPr id="1" name="">
+          <a:extLst>
+            <a:ext uri="{FF2B5EF4-FFF2-40B4-BE49-F238E27FC236}">
+              <a16:creationId xmlns:a16="http://schemas.microsoft.com/office/drawing/2014/main" id="{4601628E-E61F-E595-0D73-97EC66E066CB}"/>
+            </a:ext>
+          </a:extLst>
+        </p:cNvPr>
+        <p:cNvGrpSpPr/>
+        <p:nvPr/>
+      </p:nvGrpSpPr>
+      <p:grpSpPr>
+        <a:xfrm>
+          <a:off x="0" y="0"/>
+          <a:ext cx="0" cy="0"/>
+          <a:chOff x="0" y="0"/>
+          <a:chExt cx="0" cy="0"/>
+        </a:xfrm>
+      </p:grpSpPr>
+      <p:sp>
+        <p:nvSpPr>
+          <p:cNvPr id="4" name="Foliennummernplatzhalter 3">
+            <a:extLst>
+              <a:ext uri="{FF2B5EF4-FFF2-40B4-BE49-F238E27FC236}">
+                <a16:creationId xmlns:a16="http://schemas.microsoft.com/office/drawing/2014/main" id="{028FFF86-F2EA-5756-926F-E07F79D3AAB5}"/>
+              </a:ext>
+            </a:extLst>
+          </p:cNvPr>
+          <p:cNvSpPr>
+            <a:spLocks noGrp="1"/>
+          </p:cNvSpPr>
+          <p:nvPr>
+            <p:ph type="sldNum" sz="quarter" idx="4"/>
+          </p:nvPr>
+        </p:nvSpPr>
+        <p:spPr/>
+        <p:txBody>
+          <a:bodyPr/>
+          <a:lstStyle/>
+          <a:p>
+            <a:fld id="{610C4E4B-DC7F-8F40-B47C-DF522102C54B}" type="slidenum">
+              <a:rPr lang="en-US" noProof="0" smtClean="0"/>
+              <a:pPr/>
+              <a:t>2</a:t>
+            </a:fld>
+            <a:endParaRPr lang="en-US" noProof="0" dirty="0"/>
+          </a:p>
+        </p:txBody>
+      </p:sp>
+      <p:sp>
+        <p:nvSpPr>
+          <p:cNvPr id="7" name="Titel 1">
+            <a:extLst>
+              <a:ext uri="{FF2B5EF4-FFF2-40B4-BE49-F238E27FC236}">
+                <a16:creationId xmlns:a16="http://schemas.microsoft.com/office/drawing/2014/main" id="{268C28A9-210F-262C-1AB2-5A1D803DB415}"/>
+              </a:ext>
+            </a:extLst>
+          </p:cNvPr>
+          <p:cNvSpPr>
+            <a:spLocks noGrp="1"/>
+          </p:cNvSpPr>
+          <p:nvPr>
+            <p:ph type="ctrTitle"/>
+          </p:nvPr>
+        </p:nvSpPr>
+        <p:spPr>
+          <a:xfrm>
+            <a:off x="685800" y="0"/>
+            <a:ext cx="7772400" cy="1102519"/>
+          </a:xfrm>
+        </p:spPr>
+        <p:txBody>
+          <a:bodyPr/>
+          <a:lstStyle/>
+          <a:p>
+            <a:pPr algn="ctr"/>
             <a:r>
-              <a:rPr lang="de-DE" sz="3200" dirty="0" err="1"/>
-              <a:t>parameters</a:t>
+              <a:rPr lang="en-US" sz="3200" noProof="0" dirty="0"/>
+              <a:t>Exercise &amp; Aim</a:t>
             </a:r>
-            <a:endParaRPr lang="en-GB" sz="3200" dirty="0"/>
+          </a:p>
+        </p:txBody>
+      </p:sp>
+      <p:sp>
+        <p:nvSpPr>
+          <p:cNvPr id="3" name="TextBox 2">
+            <a:extLst>
+              <a:ext uri="{FF2B5EF4-FFF2-40B4-BE49-F238E27FC236}">
+                <a16:creationId xmlns:a16="http://schemas.microsoft.com/office/drawing/2014/main" id="{63FD7FBA-0F56-7A1E-377A-2BEA5BE9064A}"/>
+              </a:ext>
+            </a:extLst>
+          </p:cNvPr>
+          <p:cNvSpPr txBox="1"/>
+          <p:nvPr/>
+        </p:nvSpPr>
+        <p:spPr>
+          <a:xfrm>
+            <a:off x="447674" y="1102519"/>
+            <a:ext cx="8248651" cy="646331"/>
+          </a:xfrm>
+          <a:prstGeom prst="rect">
+            <a:avLst/>
+          </a:prstGeom>
+          <a:noFill/>
+        </p:spPr>
+        <p:txBody>
+          <a:bodyPr wrap="square" rtlCol="0">
+            <a:spAutoFit/>
+          </a:bodyPr>
+          <a:lstStyle/>
+          <a:p>
+            <a:r>
+              <a:rPr lang="en-US" sz="2000" noProof="0" dirty="0">
+                <a:solidFill>
+                  <a:srgbClr val="51AA00"/>
+                </a:solidFill>
+              </a:rPr>
+              <a:t>Given: </a:t>
+            </a:r>
+          </a:p>
+          <a:p>
+            <a:r>
+              <a:rPr lang="en-US" sz="1600" noProof="0" dirty="0"/>
+              <a:t>Car data of 52 models (different parameters like Power, Weight, etc.)</a:t>
+            </a:r>
+          </a:p>
+        </p:txBody>
+      </p:sp>
+      <p:sp>
+        <p:nvSpPr>
+          <p:cNvPr id="5" name="TextBox 4">
+            <a:extLst>
+              <a:ext uri="{FF2B5EF4-FFF2-40B4-BE49-F238E27FC236}">
+                <a16:creationId xmlns:a16="http://schemas.microsoft.com/office/drawing/2014/main" id="{81D3E73F-8BCB-73F9-A178-FA1F6A55FF79}"/>
+              </a:ext>
+            </a:extLst>
+          </p:cNvPr>
+          <p:cNvSpPr txBox="1"/>
+          <p:nvPr/>
+        </p:nvSpPr>
+        <p:spPr>
+          <a:xfrm>
+            <a:off x="447674" y="1971180"/>
+            <a:ext cx="8248651" cy="646331"/>
+          </a:xfrm>
+          <a:prstGeom prst="rect">
+            <a:avLst/>
+          </a:prstGeom>
+          <a:noFill/>
+        </p:spPr>
+        <p:txBody>
+          <a:bodyPr wrap="square" rtlCol="0">
+            <a:spAutoFit/>
+          </a:bodyPr>
+          <a:lstStyle/>
+          <a:p>
+            <a:r>
+              <a:rPr lang="en-US" sz="2000" noProof="0" dirty="0">
+                <a:solidFill>
+                  <a:srgbClr val="51AA00"/>
+                </a:solidFill>
+              </a:rPr>
+              <a:t>To predict: </a:t>
+            </a:r>
+          </a:p>
+          <a:p>
+            <a:r>
+              <a:rPr lang="en-US" sz="1600" noProof="0" dirty="0"/>
+              <a:t>Missing car data of 5 models (Acceleration, Max. Speed, Fuel Consumption &amp; Price)</a:t>
+            </a:r>
           </a:p>
         </p:txBody>
       </p:sp>
@@ -7763,7 +8199,13 @@
   <p:cSld>
     <p:spTree>
       <p:nvGrpSpPr>
-        <p:cNvPr id="1" name=""/>
+        <p:cNvPr id="1" name="">
+          <a:extLst>
+            <a:ext uri="{FF2B5EF4-FFF2-40B4-BE49-F238E27FC236}">
+              <a16:creationId xmlns:a16="http://schemas.microsoft.com/office/drawing/2014/main" id="{05DE6A2C-ED4D-4C00-BF6A-BCCB5F1D8628}"/>
+            </a:ext>
+          </a:extLst>
+        </p:cNvPr>
         <p:cNvGrpSpPr/>
         <p:nvPr/>
       </p:nvGrpSpPr>
@@ -7777,63 +8219,10 @@
       </p:grpSpPr>
       <p:sp>
         <p:nvSpPr>
-          <p:cNvPr id="7" name="Rechteck 6">
-            <a:extLst>
-              <a:ext uri="{FF2B5EF4-FFF2-40B4-BE49-F238E27FC236}">
-                <a16:creationId xmlns:a16="http://schemas.microsoft.com/office/drawing/2014/main" id="{4AF7D0A8-7882-A42B-6A61-4267AB890C13}"/>
-              </a:ext>
-            </a:extLst>
-          </p:cNvPr>
-          <p:cNvSpPr/>
-          <p:nvPr/>
-        </p:nvSpPr>
-        <p:spPr>
-          <a:xfrm>
-            <a:off x="7520940" y="4175760"/>
-            <a:ext cx="1310640" cy="685800"/>
-          </a:xfrm>
-          <a:prstGeom prst="rect">
-            <a:avLst/>
-          </a:prstGeom>
-          <a:solidFill>
-            <a:schemeClr val="bg1"/>
-          </a:solidFill>
-          <a:ln>
-            <a:solidFill>
-              <a:schemeClr val="bg1"/>
-            </a:solidFill>
-          </a:ln>
-          <a:effectLst/>
-        </p:spPr>
-        <p:style>
-          <a:lnRef idx="1">
-            <a:schemeClr val="accent1"/>
-          </a:lnRef>
-          <a:fillRef idx="3">
-            <a:schemeClr val="accent1"/>
-          </a:fillRef>
-          <a:effectRef idx="2">
-            <a:schemeClr val="accent1"/>
-          </a:effectRef>
-          <a:fontRef idx="minor">
-            <a:schemeClr val="lt1"/>
-          </a:fontRef>
-        </p:style>
-        <p:txBody>
-          <a:bodyPr rtlCol="0" anchor="ctr"/>
-          <a:lstStyle/>
-          <a:p>
-            <a:pPr algn="ctr"/>
-            <a:endParaRPr lang="en-GB"/>
-          </a:p>
-        </p:txBody>
-      </p:sp>
-      <p:sp>
-        <p:nvSpPr>
-          <p:cNvPr id="2" name="Foliennummernplatzhalter 1">
-            <a:extLst>
-              <a:ext uri="{FF2B5EF4-FFF2-40B4-BE49-F238E27FC236}">
-                <a16:creationId xmlns:a16="http://schemas.microsoft.com/office/drawing/2014/main" id="{C001CEC8-6A3E-56E6-B2C1-2D9BB86CA8D1}"/>
+          <p:cNvPr id="4" name="Foliennummernplatzhalter 3">
+            <a:extLst>
+              <a:ext uri="{FF2B5EF4-FFF2-40B4-BE49-F238E27FC236}">
+                <a16:creationId xmlns:a16="http://schemas.microsoft.com/office/drawing/2014/main" id="{F757051C-B406-648B-E033-82421751BA06}"/>
               </a:ext>
             </a:extLst>
           </p:cNvPr>
@@ -7841,7 +8230,7 @@
             <a:spLocks noGrp="1"/>
           </p:cNvSpPr>
           <p:nvPr>
-            <p:ph type="sldNum" sz="quarter" idx="10"/>
+            <p:ph type="sldNum" sz="quarter" idx="4"/>
           </p:nvPr>
         </p:nvSpPr>
         <p:spPr/>
@@ -7850,48 +8239,279 @@
           <a:lstStyle/>
           <a:p>
             <a:fld id="{610C4E4B-DC7F-8F40-B47C-DF522102C54B}" type="slidenum">
-              <a:rPr lang="sv-SE" smtClean="0"/>
+              <a:rPr lang="en-US" noProof="0" smtClean="0"/>
               <a:pPr/>
               <a:t>3</a:t>
             </a:fld>
-            <a:endParaRPr lang="sv-SE" dirty="0"/>
-          </a:p>
-        </p:txBody>
-      </p:sp>
-      <p:pic>
-        <p:nvPicPr>
-          <p:cNvPr id="4" name="Picture 3">
-            <a:extLst>
-              <a:ext uri="{FF2B5EF4-FFF2-40B4-BE49-F238E27FC236}">
-                <a16:creationId xmlns:a16="http://schemas.microsoft.com/office/drawing/2014/main" id="{4FD77FFF-FDC8-135F-4A38-3E7B8E77743E}"/>
-              </a:ext>
-            </a:extLst>
-          </p:cNvPr>
-          <p:cNvPicPr>
-            <a:picLocks noChangeAspect="1"/>
-          </p:cNvPicPr>
+            <a:endParaRPr lang="en-US" noProof="0" dirty="0"/>
+          </a:p>
+        </p:txBody>
+      </p:sp>
+      <p:sp>
+        <p:nvSpPr>
+          <p:cNvPr id="7" name="Titel 1">
+            <a:extLst>
+              <a:ext uri="{FF2B5EF4-FFF2-40B4-BE49-F238E27FC236}">
+                <a16:creationId xmlns:a16="http://schemas.microsoft.com/office/drawing/2014/main" id="{73DBBDFE-A9F3-B5C3-8533-20FA61C70375}"/>
+              </a:ext>
+            </a:extLst>
+          </p:cNvPr>
+          <p:cNvSpPr>
+            <a:spLocks noGrp="1"/>
+          </p:cNvSpPr>
+          <p:nvPr>
+            <p:ph type="ctrTitle"/>
+          </p:nvPr>
+        </p:nvSpPr>
+        <p:spPr>
+          <a:xfrm>
+            <a:off x="685800" y="0"/>
+            <a:ext cx="7772400" cy="1102519"/>
+          </a:xfrm>
+        </p:spPr>
+        <p:txBody>
+          <a:bodyPr/>
+          <a:lstStyle/>
+          <a:p>
+            <a:pPr algn="ctr"/>
+            <a:r>
+              <a:rPr lang="en-US" sz="3200" noProof="0" dirty="0"/>
+              <a:t>General Methodology</a:t>
+            </a:r>
+          </a:p>
+        </p:txBody>
+      </p:sp>
+      <p:sp>
+        <p:nvSpPr>
+          <p:cNvPr id="3" name="TextBox 2">
+            <a:extLst>
+              <a:ext uri="{FF2B5EF4-FFF2-40B4-BE49-F238E27FC236}">
+                <a16:creationId xmlns:a16="http://schemas.microsoft.com/office/drawing/2014/main" id="{F82B4C4E-87BF-AC76-AB59-923C16EAAE01}"/>
+              </a:ext>
+            </a:extLst>
+          </p:cNvPr>
+          <p:cNvSpPr txBox="1"/>
           <p:nvPr/>
-        </p:nvPicPr>
-        <p:blipFill>
-          <a:blip r:embed="rId3"/>
-          <a:stretch>
-            <a:fillRect/>
-          </a:stretch>
-        </p:blipFill>
-        <p:spPr>
-          <a:xfrm>
-            <a:off x="1143000" y="0"/>
-            <a:ext cx="6858000" cy="5143500"/>
+        </p:nvSpPr>
+        <p:spPr>
+          <a:xfrm>
+            <a:off x="447674" y="1102519"/>
+            <a:ext cx="8248651" cy="3477875"/>
           </a:xfrm>
           <a:prstGeom prst="rect">
             <a:avLst/>
           </a:prstGeom>
-        </p:spPr>
-      </p:pic>
+          <a:noFill/>
+        </p:spPr>
+        <p:txBody>
+          <a:bodyPr wrap="square" rtlCol="0">
+            <a:spAutoFit/>
+          </a:bodyPr>
+          <a:lstStyle/>
+          <a:p>
+            <a:pPr marL="457200" indent="-457200">
+              <a:buFont typeface="+mj-lt"/>
+              <a:buAutoNum type="arabicPeriod"/>
+            </a:pPr>
+            <a:r>
+              <a:rPr lang="en-US" sz="1600" noProof="0" dirty="0">
+                <a:solidFill>
+                  <a:srgbClr val="51AA00"/>
+                </a:solidFill>
+              </a:rPr>
+              <a:t>Choose </a:t>
+            </a:r>
+            <a:r>
+              <a:rPr lang="en-US" sz="1600" noProof="0" dirty="0" err="1">
+                <a:solidFill>
+                  <a:srgbClr val="51AA00"/>
+                </a:solidFill>
+              </a:rPr>
+              <a:t>continous</a:t>
+            </a:r>
+            <a:r>
+              <a:rPr lang="en-US" sz="1600" noProof="0" dirty="0">
+                <a:solidFill>
+                  <a:srgbClr val="51AA00"/>
+                </a:solidFill>
+              </a:rPr>
+              <a:t>/categorical predictors</a:t>
+            </a:r>
+          </a:p>
+          <a:p>
+            <a:pPr marL="914400" lvl="1" indent="-457200">
+              <a:buFont typeface="+mj-lt"/>
+              <a:buAutoNum type="arabicPeriod"/>
+            </a:pPr>
+            <a:r>
+              <a:rPr lang="en-US" sz="1400" noProof="0" dirty="0"/>
+              <a:t>Apply common knowledge, research</a:t>
+            </a:r>
+          </a:p>
+          <a:p>
+            <a:pPr marL="914400" lvl="1" indent="-457200">
+              <a:buFont typeface="+mj-lt"/>
+              <a:buAutoNum type="arabicPeriod"/>
+            </a:pPr>
+            <a:r>
+              <a:rPr lang="en-US" sz="1400" noProof="0" dirty="0"/>
+              <a:t>Minitab’s “Best Subset” feature (to get a hint on which parameters could potentially give a good R</a:t>
+            </a:r>
+            <a:r>
+              <a:rPr lang="en-US" sz="1400" baseline="30000" noProof="0" dirty="0"/>
+              <a:t>2</a:t>
+            </a:r>
+            <a:r>
+              <a:rPr lang="en-US" sz="1400" noProof="0" dirty="0"/>
+              <a:t>-value)</a:t>
+            </a:r>
+          </a:p>
+          <a:p>
+            <a:pPr marL="457200" indent="-457200">
+              <a:buFont typeface="+mj-lt"/>
+              <a:buAutoNum type="arabicPeriod"/>
+            </a:pPr>
+            <a:r>
+              <a:rPr lang="en-US" sz="1600" noProof="0" dirty="0">
+                <a:solidFill>
+                  <a:srgbClr val="51AA00"/>
+                </a:solidFill>
+              </a:rPr>
+              <a:t>Assess and adapt feasible p- and VIF-values (p &lt; 0.05, VIF &lt; 10)</a:t>
+            </a:r>
+          </a:p>
+          <a:p>
+            <a:pPr marL="914400" lvl="1" indent="-457200">
+              <a:buFont typeface="+mj-lt"/>
+              <a:buAutoNum type="arabicPeriod"/>
+            </a:pPr>
+            <a:r>
+              <a:rPr lang="en-US" sz="1400" noProof="0" dirty="0"/>
+              <a:t>Transform/create predictors (apply common knowledge by e.g. creating ratios)</a:t>
+            </a:r>
+          </a:p>
+          <a:p>
+            <a:pPr marL="914400" lvl="1" indent="-457200">
+              <a:buFont typeface="+mj-lt"/>
+              <a:buAutoNum type="arabicPeriod"/>
+            </a:pPr>
+            <a:r>
+              <a:rPr lang="en-US" sz="1400" noProof="0" dirty="0"/>
+              <a:t>Standardize predictors (subtract the mean, divide by standard deviation)</a:t>
+            </a:r>
+          </a:p>
+          <a:p>
+            <a:pPr marL="457200" indent="-457200">
+              <a:buFont typeface="+mj-lt"/>
+              <a:buAutoNum type="arabicPeriod"/>
+            </a:pPr>
+            <a:r>
+              <a:rPr lang="en-US" sz="1600" noProof="0" dirty="0">
+                <a:solidFill>
+                  <a:srgbClr val="51AA00"/>
+                </a:solidFill>
+              </a:rPr>
+              <a:t>Assess and adapt residual plots</a:t>
+            </a:r>
+          </a:p>
+          <a:p>
+            <a:pPr marL="914400" lvl="1" indent="-457200">
+              <a:buFont typeface="+mj-lt"/>
+              <a:buAutoNum type="arabicPeriod"/>
+            </a:pPr>
+            <a:r>
+              <a:rPr lang="en-US" sz="1400" noProof="0" dirty="0"/>
+              <a:t>Normal </a:t>
+            </a:r>
+            <a:r>
+              <a:rPr lang="en-US" sz="1400" noProof="0" dirty="0" err="1"/>
+              <a:t>propability</a:t>
+            </a:r>
+            <a:r>
+              <a:rPr lang="en-US" sz="1400" noProof="0" dirty="0"/>
+              <a:t> plot: Remove obvious outliers</a:t>
+            </a:r>
+          </a:p>
+          <a:p>
+            <a:pPr marL="914400" lvl="1" indent="-457200">
+              <a:buFont typeface="+mj-lt"/>
+              <a:buAutoNum type="arabicPeriod"/>
+            </a:pPr>
+            <a:r>
+              <a:rPr lang="en-US" sz="1400" noProof="0" dirty="0"/>
+              <a:t>Versus fits patterns: Create interaction terms (!! standardization necessary due to high VIF-values)</a:t>
+            </a:r>
+          </a:p>
+          <a:p>
+            <a:pPr marL="457200" indent="-457200">
+              <a:buFont typeface="+mj-lt"/>
+              <a:buAutoNum type="arabicPeriod"/>
+            </a:pPr>
+            <a:r>
+              <a:rPr lang="en-US" sz="1600" noProof="0" dirty="0">
+                <a:solidFill>
+                  <a:srgbClr val="51AA00"/>
+                </a:solidFill>
+              </a:rPr>
+              <a:t>Assess and improve R</a:t>
+            </a:r>
+            <a:r>
+              <a:rPr lang="en-US" sz="1600" baseline="30000" noProof="0" dirty="0">
+                <a:solidFill>
+                  <a:srgbClr val="51AA00"/>
+                </a:solidFill>
+              </a:rPr>
+              <a:t>2</a:t>
+            </a:r>
+            <a:r>
+              <a:rPr lang="en-US" sz="1600" noProof="0" dirty="0">
+                <a:solidFill>
+                  <a:srgbClr val="51AA00"/>
+                </a:solidFill>
+              </a:rPr>
+              <a:t>-value (if necessary)</a:t>
+            </a:r>
+          </a:p>
+          <a:p>
+            <a:pPr marL="914400" lvl="1" indent="-457200">
+              <a:buFont typeface="+mj-lt"/>
+              <a:buAutoNum type="arabicPeriod"/>
+            </a:pPr>
+            <a:r>
+              <a:rPr lang="en-US" sz="1400" noProof="0" dirty="0"/>
+              <a:t>Apply Box-Cox transformation</a:t>
+            </a:r>
+          </a:p>
+          <a:p>
+            <a:pPr marL="457200" indent="-457200">
+              <a:buFont typeface="+mj-lt"/>
+              <a:buAutoNum type="arabicPeriod"/>
+            </a:pPr>
+            <a:r>
+              <a:rPr lang="en-US" sz="1600" dirty="0">
+                <a:solidFill>
+                  <a:srgbClr val="51AA00"/>
+                </a:solidFill>
+              </a:rPr>
+              <a:t>Assess predictions if they are logical</a:t>
+            </a:r>
+          </a:p>
+          <a:p>
+            <a:pPr marL="914400" lvl="1" indent="-457200">
+              <a:buFont typeface="+mj-lt"/>
+              <a:buAutoNum type="arabicPeriod"/>
+            </a:pPr>
+            <a:r>
+              <a:rPr lang="en-US" sz="1400" noProof="0" dirty="0"/>
+              <a:t>If not, redo process steps 1-4</a:t>
+            </a:r>
+          </a:p>
+        </p:txBody>
+      </p:sp>
     </p:spTree>
     <p:extLst>
       <p:ext uri="{BB962C8B-B14F-4D97-AF65-F5344CB8AC3E}">
-        <p14:creationId xmlns:p14="http://schemas.microsoft.com/office/powerpoint/2010/main" val="1549259780"/>
+        <p14:creationId xmlns:p14="http://schemas.microsoft.com/office/powerpoint/2010/main" val="3943053292"/>
       </p:ext>
     </p:extLst>
   </p:cSld>
@@ -7906,7 +8526,13 @@
   <p:cSld>
     <p:spTree>
       <p:nvGrpSpPr>
-        <p:cNvPr id="1" name=""/>
+        <p:cNvPr id="1" name="">
+          <a:extLst>
+            <a:ext uri="{FF2B5EF4-FFF2-40B4-BE49-F238E27FC236}">
+              <a16:creationId xmlns:a16="http://schemas.microsoft.com/office/drawing/2014/main" id="{7D4C5C58-11A1-CF67-10B7-6D0230D82789}"/>
+            </a:ext>
+          </a:extLst>
+        </p:cNvPr>
         <p:cNvGrpSpPr/>
         <p:nvPr/>
       </p:nvGrpSpPr>
@@ -7920,63 +8546,10 @@
       </p:grpSpPr>
       <p:sp>
         <p:nvSpPr>
-          <p:cNvPr id="6" name="Rechteck 5">
-            <a:extLst>
-              <a:ext uri="{FF2B5EF4-FFF2-40B4-BE49-F238E27FC236}">
-                <a16:creationId xmlns:a16="http://schemas.microsoft.com/office/drawing/2014/main" id="{B41B5DFA-FDE3-54E8-7879-0B0008EECA58}"/>
-              </a:ext>
-            </a:extLst>
-          </p:cNvPr>
-          <p:cNvSpPr/>
-          <p:nvPr/>
-        </p:nvSpPr>
-        <p:spPr>
-          <a:xfrm>
-            <a:off x="7673340" y="4328160"/>
-            <a:ext cx="1310640" cy="685800"/>
-          </a:xfrm>
-          <a:prstGeom prst="rect">
-            <a:avLst/>
-          </a:prstGeom>
-          <a:solidFill>
-            <a:schemeClr val="bg1"/>
-          </a:solidFill>
-          <a:ln>
-            <a:solidFill>
-              <a:schemeClr val="bg1"/>
-            </a:solidFill>
-          </a:ln>
-          <a:effectLst/>
-        </p:spPr>
-        <p:style>
-          <a:lnRef idx="1">
-            <a:schemeClr val="accent1"/>
-          </a:lnRef>
-          <a:fillRef idx="3">
-            <a:schemeClr val="accent1"/>
-          </a:fillRef>
-          <a:effectRef idx="2">
-            <a:schemeClr val="accent1"/>
-          </a:effectRef>
-          <a:fontRef idx="minor">
-            <a:schemeClr val="lt1"/>
-          </a:fontRef>
-        </p:style>
-        <p:txBody>
-          <a:bodyPr rtlCol="0" anchor="ctr"/>
-          <a:lstStyle/>
-          <a:p>
-            <a:pPr algn="ctr"/>
-            <a:endParaRPr lang="en-GB"/>
-          </a:p>
-        </p:txBody>
-      </p:sp>
-      <p:sp>
-        <p:nvSpPr>
-          <p:cNvPr id="2" name="Foliennummernplatzhalter 1">
-            <a:extLst>
-              <a:ext uri="{FF2B5EF4-FFF2-40B4-BE49-F238E27FC236}">
-                <a16:creationId xmlns:a16="http://schemas.microsoft.com/office/drawing/2014/main" id="{7A91AE8E-36AE-3B62-B466-672D53D34222}"/>
+          <p:cNvPr id="4" name="Foliennummernplatzhalter 3">
+            <a:extLst>
+              <a:ext uri="{FF2B5EF4-FFF2-40B4-BE49-F238E27FC236}">
+                <a16:creationId xmlns:a16="http://schemas.microsoft.com/office/drawing/2014/main" id="{BF32E629-D78D-CF7D-594F-B438DD4B5409}"/>
               </a:ext>
             </a:extLst>
           </p:cNvPr>
@@ -7984,7 +8557,7 @@
             <a:spLocks noGrp="1"/>
           </p:cNvSpPr>
           <p:nvPr>
-            <p:ph type="sldNum" sz="quarter" idx="10"/>
+            <p:ph type="sldNum" sz="quarter" idx="4"/>
           </p:nvPr>
         </p:nvSpPr>
         <p:spPr/>
@@ -7993,73 +8566,99 @@
           <a:lstStyle/>
           <a:p>
             <a:fld id="{610C4E4B-DC7F-8F40-B47C-DF522102C54B}" type="slidenum">
-              <a:rPr lang="sv-SE" smtClean="0"/>
+              <a:rPr lang="en-US" noProof="0" smtClean="0"/>
               <a:pPr/>
               <a:t>4</a:t>
             </a:fld>
-            <a:endParaRPr lang="sv-SE" dirty="0"/>
-          </a:p>
-        </p:txBody>
-      </p:sp>
-      <p:sp>
-        <p:nvSpPr>
-          <p:cNvPr id="5" name="Rechteck 4">
-            <a:extLst>
-              <a:ext uri="{FF2B5EF4-FFF2-40B4-BE49-F238E27FC236}">
-                <a16:creationId xmlns:a16="http://schemas.microsoft.com/office/drawing/2014/main" id="{E5C443AB-6343-D8E4-67AD-C98A2A2B96E2}"/>
-              </a:ext>
-            </a:extLst>
-          </p:cNvPr>
-          <p:cNvSpPr/>
+            <a:endParaRPr lang="en-US" noProof="0" dirty="0"/>
+          </a:p>
+        </p:txBody>
+      </p:sp>
+      <p:sp>
+        <p:nvSpPr>
+          <p:cNvPr id="7" name="Titel 1">
+            <a:extLst>
+              <a:ext uri="{FF2B5EF4-FFF2-40B4-BE49-F238E27FC236}">
+                <a16:creationId xmlns:a16="http://schemas.microsoft.com/office/drawing/2014/main" id="{69116503-3F06-4C9B-3B60-B87F48E3F546}"/>
+              </a:ext>
+            </a:extLst>
+          </p:cNvPr>
+          <p:cNvSpPr>
+            <a:spLocks noGrp="1"/>
+          </p:cNvSpPr>
+          <p:nvPr>
+            <p:ph type="ctrTitle"/>
+          </p:nvPr>
+        </p:nvSpPr>
+        <p:spPr>
+          <a:xfrm>
+            <a:off x="685800" y="0"/>
+            <a:ext cx="7772400" cy="1102519"/>
+          </a:xfrm>
+        </p:spPr>
+        <p:txBody>
+          <a:bodyPr/>
+          <a:lstStyle/>
+          <a:p>
+            <a:pPr algn="ctr"/>
+            <a:r>
+              <a:rPr lang="en-US" sz="3200" noProof="0" dirty="0"/>
+              <a:t>Acceleration – Methodology</a:t>
+            </a:r>
+          </a:p>
+        </p:txBody>
+      </p:sp>
+      <p:sp>
+        <p:nvSpPr>
+          <p:cNvPr id="2" name="TextBox 1">
+            <a:extLst>
+              <a:ext uri="{FF2B5EF4-FFF2-40B4-BE49-F238E27FC236}">
+                <a16:creationId xmlns:a16="http://schemas.microsoft.com/office/drawing/2014/main" id="{957DDCD8-0C23-C7D8-2A13-A3D39ADC0EDD}"/>
+              </a:ext>
+            </a:extLst>
+          </p:cNvPr>
+          <p:cNvSpPr txBox="1"/>
           <p:nvPr/>
         </p:nvSpPr>
         <p:spPr>
           <a:xfrm>
-            <a:off x="7520940" y="4175760"/>
-            <a:ext cx="1310640" cy="685800"/>
+            <a:off x="447674" y="1102519"/>
+            <a:ext cx="8248651" cy="646331"/>
           </a:xfrm>
           <a:prstGeom prst="rect">
             <a:avLst/>
           </a:prstGeom>
-          <a:solidFill>
-            <a:schemeClr val="bg1"/>
-          </a:solidFill>
-          <a:ln>
-            <a:solidFill>
-              <a:schemeClr val="bg1"/>
-            </a:solidFill>
-          </a:ln>
-          <a:effectLst/>
-        </p:spPr>
-        <p:style>
-          <a:lnRef idx="1">
-            <a:schemeClr val="accent1"/>
-          </a:lnRef>
-          <a:fillRef idx="3">
-            <a:schemeClr val="accent1"/>
-          </a:fillRef>
-          <a:effectRef idx="2">
-            <a:schemeClr val="accent1"/>
-          </a:effectRef>
-          <a:fontRef idx="minor">
-            <a:schemeClr val="lt1"/>
-          </a:fontRef>
-        </p:style>
-        <p:txBody>
-          <a:bodyPr rtlCol="0" anchor="ctr"/>
+          <a:noFill/>
+        </p:spPr>
+        <p:txBody>
+          <a:bodyPr wrap="square" rtlCol="0">
+            <a:spAutoFit/>
+          </a:bodyPr>
           <a:lstStyle/>
           <a:p>
-            <a:pPr algn="ctr"/>
-            <a:endParaRPr lang="en-GB"/>
+            <a:r>
+              <a:rPr lang="en-US" sz="2000" noProof="0" dirty="0">
+                <a:solidFill>
+                  <a:srgbClr val="51AA00"/>
+                </a:solidFill>
+              </a:rPr>
+              <a:t>Common knowledge: </a:t>
+            </a:r>
+          </a:p>
+          <a:p>
+            <a:r>
+              <a:rPr lang="en-US" sz="1600" noProof="0" dirty="0"/>
+              <a:t>Power, Weight, Max Torque &amp; Turbo </a:t>
+            </a:r>
           </a:p>
         </p:txBody>
       </p:sp>
       <p:pic>
         <p:nvPicPr>
-          <p:cNvPr id="4" name="Picture 3">
-            <a:extLst>
-              <a:ext uri="{FF2B5EF4-FFF2-40B4-BE49-F238E27FC236}">
-                <a16:creationId xmlns:a16="http://schemas.microsoft.com/office/drawing/2014/main" id="{0CE57C74-B431-28BD-EFA4-7A8DF487CAA0}"/>
+          <p:cNvPr id="5" name="Picture 4">
+            <a:extLst>
+              <a:ext uri="{FF2B5EF4-FFF2-40B4-BE49-F238E27FC236}">
+                <a16:creationId xmlns:a16="http://schemas.microsoft.com/office/drawing/2014/main" id="{AD690ED4-331F-4DC8-E294-1396AB677400}"/>
               </a:ext>
             </a:extLst>
           </p:cNvPr>
@@ -8069,55 +8668,127 @@
           <p:nvPr/>
         </p:nvPicPr>
         <p:blipFill>
-          <a:blip r:embed="rId3"/>
+          <a:blip r:embed="rId2"/>
           <a:stretch>
             <a:fillRect/>
           </a:stretch>
         </p:blipFill>
         <p:spPr>
           <a:xfrm>
-            <a:off x="3003550" y="3441329"/>
-            <a:ext cx="3136900" cy="1371600"/>
+            <a:off x="447674" y="1959297"/>
+            <a:ext cx="4715142" cy="2533655"/>
           </a:xfrm>
           <a:prstGeom prst="rect">
             <a:avLst/>
           </a:prstGeom>
         </p:spPr>
       </p:pic>
-      <p:pic>
-        <p:nvPicPr>
-          <p:cNvPr id="3" name="Picture 2">
-            <a:extLst>
-              <a:ext uri="{FF2B5EF4-FFF2-40B4-BE49-F238E27FC236}">
-                <a16:creationId xmlns:a16="http://schemas.microsoft.com/office/drawing/2014/main" id="{4436A40E-AF8A-6E12-B91E-1EA54D1E291B}"/>
-              </a:ext>
-            </a:extLst>
-          </p:cNvPr>
-          <p:cNvPicPr>
-            <a:picLocks noChangeAspect="1"/>
-          </p:cNvPicPr>
+      <p:cxnSp>
+        <p:nvCxnSpPr>
+          <p:cNvPr id="9" name="Straight Arrow Connector 8">
+            <a:extLst>
+              <a:ext uri="{FF2B5EF4-FFF2-40B4-BE49-F238E27FC236}">
+                <a16:creationId xmlns:a16="http://schemas.microsoft.com/office/drawing/2014/main" id="{E65EFD81-2A41-8831-7715-6D3CA20AB529}"/>
+              </a:ext>
+            </a:extLst>
+          </p:cNvPr>
+          <p:cNvCxnSpPr>
+            <a:cxnSpLocks/>
+            <a:endCxn id="11" idx="1"/>
+          </p:cNvCxnSpPr>
           <p:nvPr/>
-        </p:nvPicPr>
-        <p:blipFill>
-          <a:blip r:embed="rId4"/>
-          <a:stretch>
-            <a:fillRect/>
-          </a:stretch>
-        </p:blipFill>
-        <p:spPr>
-          <a:xfrm>
-            <a:off x="1617288" y="189472"/>
-            <a:ext cx="5909424" cy="3424374"/>
+        </p:nvCxnSpPr>
+        <p:spPr>
+          <a:xfrm flipV="1">
+            <a:off x="5162816" y="3059508"/>
+            <a:ext cx="686781" cy="166616"/>
+          </a:xfrm>
+          <a:prstGeom prst="straightConnector1">
+            <a:avLst/>
+          </a:prstGeom>
+          <a:ln>
+            <a:solidFill>
+              <a:srgbClr val="FF0000"/>
+            </a:solidFill>
+            <a:tailEnd type="triangle"/>
+          </a:ln>
+        </p:spPr>
+        <p:style>
+          <a:lnRef idx="2">
+            <a:schemeClr val="accent1"/>
+          </a:lnRef>
+          <a:fillRef idx="0">
+            <a:schemeClr val="accent1"/>
+          </a:fillRef>
+          <a:effectRef idx="1">
+            <a:schemeClr val="accent1"/>
+          </a:effectRef>
+          <a:fontRef idx="minor">
+            <a:schemeClr val="tx1"/>
+          </a:fontRef>
+        </p:style>
+      </p:cxnSp>
+      <p:sp>
+        <p:nvSpPr>
+          <p:cNvPr id="11" name="TextBox 10">
+            <a:extLst>
+              <a:ext uri="{FF2B5EF4-FFF2-40B4-BE49-F238E27FC236}">
+                <a16:creationId xmlns:a16="http://schemas.microsoft.com/office/drawing/2014/main" id="{F9B789C7-3D90-60C6-4083-AD6507FC41D0}"/>
+              </a:ext>
+            </a:extLst>
+          </p:cNvPr>
+          <p:cNvSpPr txBox="1"/>
+          <p:nvPr/>
+        </p:nvSpPr>
+        <p:spPr>
+          <a:xfrm>
+            <a:off x="5849597" y="2151567"/>
+            <a:ext cx="2713290" cy="1815882"/>
           </a:xfrm>
           <a:prstGeom prst="rect">
             <a:avLst/>
           </a:prstGeom>
-        </p:spPr>
-      </p:pic>
+          <a:noFill/>
+        </p:spPr>
+        <p:txBody>
+          <a:bodyPr wrap="square">
+            <a:spAutoFit/>
+          </a:bodyPr>
+          <a:lstStyle/>
+          <a:p>
+            <a:pPr marL="342900" indent="-342900">
+              <a:buAutoNum type="arabicPeriod"/>
+            </a:pPr>
+            <a:r>
+              <a:rPr lang="en-US" sz="1600" noProof="0" dirty="0"/>
+              <a:t>Create common knowledge ratios: hp/kg (Power/Weight ratio) &amp; RPM (Hp = Nm * RPM / 5252)</a:t>
+            </a:r>
+          </a:p>
+          <a:p>
+            <a:pPr marL="342900" indent="-342900">
+              <a:buAutoNum type="arabicPeriod"/>
+            </a:pPr>
+            <a:r>
+              <a:rPr lang="en-US" sz="1600" dirty="0"/>
+              <a:t>Standardize predictors</a:t>
+            </a:r>
+          </a:p>
+          <a:p>
+            <a:pPr marL="342900" indent="-342900">
+              <a:buAutoNum type="arabicPeriod"/>
+            </a:pPr>
+            <a:r>
+              <a:rPr lang="en-US" sz="1600" dirty="0"/>
+              <a:t>Create interaction term</a:t>
+            </a:r>
+            <a:endParaRPr lang="en-DE" sz="1600" dirty="0"/>
+          </a:p>
+        </p:txBody>
+      </p:sp>
     </p:spTree>
     <p:extLst>
       <p:ext uri="{BB962C8B-B14F-4D97-AF65-F5344CB8AC3E}">
-        <p14:creationId xmlns:p14="http://schemas.microsoft.com/office/powerpoint/2010/main" val="862845047"/>
+        <p14:creationId xmlns:p14="http://schemas.microsoft.com/office/powerpoint/2010/main" val="1029107813"/>
       </p:ext>
     </p:extLst>
   </p:cSld>
@@ -8135,7 +8806,7 @@
         <p:cNvPr id="1" name="">
           <a:extLst>
             <a:ext uri="{FF2B5EF4-FFF2-40B4-BE49-F238E27FC236}">
-              <a16:creationId xmlns:a16="http://schemas.microsoft.com/office/drawing/2014/main" id="{6ADEE542-B6F6-4C9E-F41B-053DD301F07A}"/>
+              <a16:creationId xmlns:a16="http://schemas.microsoft.com/office/drawing/2014/main" id="{19D569FD-D7EB-4062-E457-C731A1B9DC12}"/>
             </a:ext>
           </a:extLst>
         </p:cNvPr>
@@ -8152,63 +8823,10 @@
       </p:grpSpPr>
       <p:sp>
         <p:nvSpPr>
-          <p:cNvPr id="7" name="Rechteck 6">
-            <a:extLst>
-              <a:ext uri="{FF2B5EF4-FFF2-40B4-BE49-F238E27FC236}">
-                <a16:creationId xmlns:a16="http://schemas.microsoft.com/office/drawing/2014/main" id="{44920FED-4D63-FFB0-6FA8-3697F266AE4E}"/>
-              </a:ext>
-            </a:extLst>
-          </p:cNvPr>
-          <p:cNvSpPr/>
-          <p:nvPr/>
-        </p:nvSpPr>
-        <p:spPr>
-          <a:xfrm>
-            <a:off x="7520940" y="4175760"/>
-            <a:ext cx="1310640" cy="685800"/>
-          </a:xfrm>
-          <a:prstGeom prst="rect">
-            <a:avLst/>
-          </a:prstGeom>
-          <a:solidFill>
-            <a:schemeClr val="bg1"/>
-          </a:solidFill>
-          <a:ln>
-            <a:solidFill>
-              <a:schemeClr val="bg1"/>
-            </a:solidFill>
-          </a:ln>
-          <a:effectLst/>
-        </p:spPr>
-        <p:style>
-          <a:lnRef idx="1">
-            <a:schemeClr val="accent1"/>
-          </a:lnRef>
-          <a:fillRef idx="3">
-            <a:schemeClr val="accent1"/>
-          </a:fillRef>
-          <a:effectRef idx="2">
-            <a:schemeClr val="accent1"/>
-          </a:effectRef>
-          <a:fontRef idx="minor">
-            <a:schemeClr val="lt1"/>
-          </a:fontRef>
-        </p:style>
-        <p:txBody>
-          <a:bodyPr rtlCol="0" anchor="ctr"/>
-          <a:lstStyle/>
-          <a:p>
-            <a:pPr algn="ctr"/>
-            <a:endParaRPr lang="en-GB"/>
-          </a:p>
-        </p:txBody>
-      </p:sp>
-      <p:sp>
-        <p:nvSpPr>
-          <p:cNvPr id="2" name="Foliennummernplatzhalter 1">
-            <a:extLst>
-              <a:ext uri="{FF2B5EF4-FFF2-40B4-BE49-F238E27FC236}">
-                <a16:creationId xmlns:a16="http://schemas.microsoft.com/office/drawing/2014/main" id="{5E01E192-1145-FF28-1CCF-9A72EE05FFCF}"/>
+          <p:cNvPr id="4" name="Foliennummernplatzhalter 3">
+            <a:extLst>
+              <a:ext uri="{FF2B5EF4-FFF2-40B4-BE49-F238E27FC236}">
+                <a16:creationId xmlns:a16="http://schemas.microsoft.com/office/drawing/2014/main" id="{1D97CC50-0226-816A-D0C9-58B1E24B511B}"/>
               </a:ext>
             </a:extLst>
           </p:cNvPr>
@@ -8216,7 +8834,7 @@
             <a:spLocks noGrp="1"/>
           </p:cNvSpPr>
           <p:nvPr>
-            <p:ph type="sldNum" sz="quarter" idx="10"/>
+            <p:ph type="sldNum" sz="quarter" idx="4"/>
           </p:nvPr>
         </p:nvSpPr>
         <p:spPr/>
@@ -8225,20 +8843,54 @@
           <a:lstStyle/>
           <a:p>
             <a:fld id="{610C4E4B-DC7F-8F40-B47C-DF522102C54B}" type="slidenum">
-              <a:rPr lang="sv-SE" smtClean="0"/>
+              <a:rPr lang="en-US" noProof="0" smtClean="0"/>
               <a:pPr/>
               <a:t>5</a:t>
             </a:fld>
-            <a:endParaRPr lang="sv-SE" dirty="0"/>
+            <a:endParaRPr lang="en-US" noProof="0" dirty="0"/>
+          </a:p>
+        </p:txBody>
+      </p:sp>
+      <p:sp>
+        <p:nvSpPr>
+          <p:cNvPr id="7" name="Titel 1">
+            <a:extLst>
+              <a:ext uri="{FF2B5EF4-FFF2-40B4-BE49-F238E27FC236}">
+                <a16:creationId xmlns:a16="http://schemas.microsoft.com/office/drawing/2014/main" id="{24C44FC5-7F9F-1478-3EDE-93FC7B1100D9}"/>
+              </a:ext>
+            </a:extLst>
+          </p:cNvPr>
+          <p:cNvSpPr>
+            <a:spLocks noGrp="1"/>
+          </p:cNvSpPr>
+          <p:nvPr>
+            <p:ph type="ctrTitle"/>
+          </p:nvPr>
+        </p:nvSpPr>
+        <p:spPr>
+          <a:xfrm>
+            <a:off x="685800" y="0"/>
+            <a:ext cx="7772400" cy="1102519"/>
+          </a:xfrm>
+        </p:spPr>
+        <p:txBody>
+          <a:bodyPr/>
+          <a:lstStyle/>
+          <a:p>
+            <a:pPr algn="ctr"/>
+            <a:r>
+              <a:rPr lang="en-US" sz="3200" noProof="0" dirty="0"/>
+              <a:t>Regression Model – Acceleration (1)</a:t>
+            </a:r>
           </a:p>
         </p:txBody>
       </p:sp>
       <p:pic>
         <p:nvPicPr>
-          <p:cNvPr id="4" name="Picture 3">
-            <a:extLst>
-              <a:ext uri="{FF2B5EF4-FFF2-40B4-BE49-F238E27FC236}">
-                <a16:creationId xmlns:a16="http://schemas.microsoft.com/office/drawing/2014/main" id="{85FAF385-588B-B114-9985-9B2454EE862E}"/>
+          <p:cNvPr id="12" name="Picture 11">
+            <a:extLst>
+              <a:ext uri="{FF2B5EF4-FFF2-40B4-BE49-F238E27FC236}">
+                <a16:creationId xmlns:a16="http://schemas.microsoft.com/office/drawing/2014/main" id="{778B200E-E1EA-ABF0-5584-5914131B0053}"/>
               </a:ext>
             </a:extLst>
           </p:cNvPr>
@@ -8248,14 +8900,15 @@
           <p:nvPr/>
         </p:nvPicPr>
         <p:blipFill>
-          <a:blip r:embed="rId3"/>
-          <a:srcRect/>
-          <a:stretch/>
+          <a:blip r:embed="rId2"/>
+          <a:stretch>
+            <a:fillRect/>
+          </a:stretch>
         </p:blipFill>
         <p:spPr>
           <a:xfrm>
-            <a:off x="1143000" y="0"/>
-            <a:ext cx="6858000" cy="5143500"/>
+            <a:off x="752030" y="910690"/>
+            <a:ext cx="6783050" cy="3933169"/>
           </a:xfrm>
           <a:prstGeom prst="rect">
             <a:avLst/>
@@ -8265,7 +8918,7 @@
     </p:spTree>
     <p:extLst>
       <p:ext uri="{BB962C8B-B14F-4D97-AF65-F5344CB8AC3E}">
-        <p14:creationId xmlns:p14="http://schemas.microsoft.com/office/powerpoint/2010/main" val="168019384"/>
+        <p14:creationId xmlns:p14="http://schemas.microsoft.com/office/powerpoint/2010/main" val="593612559"/>
       </p:ext>
     </p:extLst>
   </p:cSld>
@@ -8283,7 +8936,7 @@
         <p:cNvPr id="1" name="">
           <a:extLst>
             <a:ext uri="{FF2B5EF4-FFF2-40B4-BE49-F238E27FC236}">
-              <a16:creationId xmlns:a16="http://schemas.microsoft.com/office/drawing/2014/main" id="{50E81991-DDE7-69EF-E6F7-3EFC84C08419}"/>
+              <a16:creationId xmlns:a16="http://schemas.microsoft.com/office/drawing/2014/main" id="{7DCBE008-684B-F496-799B-0252E0495E10}"/>
             </a:ext>
           </a:extLst>
         </p:cNvPr>
@@ -8300,63 +8953,10 @@
       </p:grpSpPr>
       <p:sp>
         <p:nvSpPr>
-          <p:cNvPr id="6" name="Rechteck 5">
-            <a:extLst>
-              <a:ext uri="{FF2B5EF4-FFF2-40B4-BE49-F238E27FC236}">
-                <a16:creationId xmlns:a16="http://schemas.microsoft.com/office/drawing/2014/main" id="{0D2FC695-7A93-BA8F-3168-7CE1C81EEC36}"/>
-              </a:ext>
-            </a:extLst>
-          </p:cNvPr>
-          <p:cNvSpPr/>
-          <p:nvPr/>
-        </p:nvSpPr>
-        <p:spPr>
-          <a:xfrm>
-            <a:off x="7673340" y="4328160"/>
-            <a:ext cx="1310640" cy="685800"/>
-          </a:xfrm>
-          <a:prstGeom prst="rect">
-            <a:avLst/>
-          </a:prstGeom>
-          <a:solidFill>
-            <a:schemeClr val="bg1"/>
-          </a:solidFill>
-          <a:ln>
-            <a:solidFill>
-              <a:schemeClr val="bg1"/>
-            </a:solidFill>
-          </a:ln>
-          <a:effectLst/>
-        </p:spPr>
-        <p:style>
-          <a:lnRef idx="1">
-            <a:schemeClr val="accent1"/>
-          </a:lnRef>
-          <a:fillRef idx="3">
-            <a:schemeClr val="accent1"/>
-          </a:fillRef>
-          <a:effectRef idx="2">
-            <a:schemeClr val="accent1"/>
-          </a:effectRef>
-          <a:fontRef idx="minor">
-            <a:schemeClr val="lt1"/>
-          </a:fontRef>
-        </p:style>
-        <p:txBody>
-          <a:bodyPr rtlCol="0" anchor="ctr"/>
-          <a:lstStyle/>
-          <a:p>
-            <a:pPr algn="ctr"/>
-            <a:endParaRPr lang="en-GB"/>
-          </a:p>
-        </p:txBody>
-      </p:sp>
-      <p:sp>
-        <p:nvSpPr>
-          <p:cNvPr id="2" name="Foliennummernplatzhalter 1">
-            <a:extLst>
-              <a:ext uri="{FF2B5EF4-FFF2-40B4-BE49-F238E27FC236}">
-                <a16:creationId xmlns:a16="http://schemas.microsoft.com/office/drawing/2014/main" id="{260ACAAB-4A37-CB60-ABAD-79672000F77A}"/>
+          <p:cNvPr id="4" name="Foliennummernplatzhalter 3">
+            <a:extLst>
+              <a:ext uri="{FF2B5EF4-FFF2-40B4-BE49-F238E27FC236}">
+                <a16:creationId xmlns:a16="http://schemas.microsoft.com/office/drawing/2014/main" id="{6A206512-64B3-80FF-A7B1-7AB4BB6F90F1}"/>
               </a:ext>
             </a:extLst>
           </p:cNvPr>
@@ -8364,7 +8964,7 @@
             <a:spLocks noGrp="1"/>
           </p:cNvSpPr>
           <p:nvPr>
-            <p:ph type="sldNum" sz="quarter" idx="10"/>
+            <p:ph type="sldNum" sz="quarter" idx="4"/>
           </p:nvPr>
         </p:nvSpPr>
         <p:spPr/>
@@ -8373,73 +8973,84 @@
           <a:lstStyle/>
           <a:p>
             <a:fld id="{610C4E4B-DC7F-8F40-B47C-DF522102C54B}" type="slidenum">
-              <a:rPr lang="sv-SE" smtClean="0"/>
+              <a:rPr lang="en-US" noProof="0" smtClean="0"/>
               <a:pPr/>
               <a:t>6</a:t>
             </a:fld>
-            <a:endParaRPr lang="sv-SE" dirty="0"/>
-          </a:p>
-        </p:txBody>
-      </p:sp>
-      <p:sp>
-        <p:nvSpPr>
-          <p:cNvPr id="5" name="Rechteck 4">
-            <a:extLst>
-              <a:ext uri="{FF2B5EF4-FFF2-40B4-BE49-F238E27FC236}">
-                <a16:creationId xmlns:a16="http://schemas.microsoft.com/office/drawing/2014/main" id="{FD9435E0-2046-5A29-9EC7-31AC7C2B3130}"/>
-              </a:ext>
-            </a:extLst>
-          </p:cNvPr>
-          <p:cNvSpPr/>
+            <a:endParaRPr lang="en-US" noProof="0" dirty="0"/>
+          </a:p>
+        </p:txBody>
+      </p:sp>
+      <p:sp>
+        <p:nvSpPr>
+          <p:cNvPr id="7" name="Titel 1">
+            <a:extLst>
+              <a:ext uri="{FF2B5EF4-FFF2-40B4-BE49-F238E27FC236}">
+                <a16:creationId xmlns:a16="http://schemas.microsoft.com/office/drawing/2014/main" id="{58B415E5-A9DE-7F57-F5DF-BEA6F4508D90}"/>
+              </a:ext>
+            </a:extLst>
+          </p:cNvPr>
+          <p:cNvSpPr>
+            <a:spLocks noGrp="1"/>
+          </p:cNvSpPr>
+          <p:nvPr>
+            <p:ph type="ctrTitle"/>
+          </p:nvPr>
+        </p:nvSpPr>
+        <p:spPr>
+          <a:xfrm>
+            <a:off x="685800" y="0"/>
+            <a:ext cx="7772400" cy="1102519"/>
+          </a:xfrm>
+        </p:spPr>
+        <p:txBody>
+          <a:bodyPr/>
+          <a:lstStyle/>
+          <a:p>
+            <a:pPr algn="ctr"/>
+            <a:r>
+              <a:rPr lang="en-US" sz="3200" noProof="0" dirty="0"/>
+              <a:t>Regression Model – Acceleration (2)</a:t>
+            </a:r>
+          </a:p>
+        </p:txBody>
+      </p:sp>
+      <p:pic>
+        <p:nvPicPr>
+          <p:cNvPr id="3" name="Picture 2">
+            <a:extLst>
+              <a:ext uri="{FF2B5EF4-FFF2-40B4-BE49-F238E27FC236}">
+                <a16:creationId xmlns:a16="http://schemas.microsoft.com/office/drawing/2014/main" id="{AF14FD1E-9F17-CA1E-0008-89BC40A4BFA7}"/>
+              </a:ext>
+            </a:extLst>
+          </p:cNvPr>
+          <p:cNvPicPr>
+            <a:picLocks noChangeAspect="1"/>
+          </p:cNvPicPr>
           <p:nvPr/>
-        </p:nvSpPr>
-        <p:spPr>
-          <a:xfrm>
-            <a:off x="7520940" y="4175760"/>
-            <a:ext cx="1310640" cy="685800"/>
+        </p:nvPicPr>
+        <p:blipFill>
+          <a:blip r:embed="rId2"/>
+          <a:stretch>
+            <a:fillRect/>
+          </a:stretch>
+        </p:blipFill>
+        <p:spPr>
+          <a:xfrm>
+            <a:off x="602247" y="965265"/>
+            <a:ext cx="3657600" cy="1273733"/>
           </a:xfrm>
           <a:prstGeom prst="rect">
             <a:avLst/>
           </a:prstGeom>
-          <a:solidFill>
-            <a:schemeClr val="bg1"/>
-          </a:solidFill>
-          <a:ln>
-            <a:solidFill>
-              <a:schemeClr val="bg1"/>
-            </a:solidFill>
-          </a:ln>
-          <a:effectLst/>
-        </p:spPr>
-        <p:style>
-          <a:lnRef idx="1">
-            <a:schemeClr val="accent1"/>
-          </a:lnRef>
-          <a:fillRef idx="3">
-            <a:schemeClr val="accent1"/>
-          </a:fillRef>
-          <a:effectRef idx="2">
-            <a:schemeClr val="accent1"/>
-          </a:effectRef>
-          <a:fontRef idx="minor">
-            <a:schemeClr val="lt1"/>
-          </a:fontRef>
-        </p:style>
-        <p:txBody>
-          <a:bodyPr rtlCol="0" anchor="ctr"/>
-          <a:lstStyle/>
-          <a:p>
-            <a:pPr algn="ctr"/>
-            <a:endParaRPr lang="en-GB"/>
-          </a:p>
-        </p:txBody>
-      </p:sp>
+        </p:spPr>
+      </p:pic>
       <p:pic>
         <p:nvPicPr>
-          <p:cNvPr id="4" name="Picture 3">
-            <a:extLst>
-              <a:ext uri="{FF2B5EF4-FFF2-40B4-BE49-F238E27FC236}">
-                <a16:creationId xmlns:a16="http://schemas.microsoft.com/office/drawing/2014/main" id="{0D1E5E9A-9914-D7BA-BA4B-A016CA578C0F}"/>
+          <p:cNvPr id="5" name="Picture 4">
+            <a:extLst>
+              <a:ext uri="{FF2B5EF4-FFF2-40B4-BE49-F238E27FC236}">
+                <a16:creationId xmlns:a16="http://schemas.microsoft.com/office/drawing/2014/main" id="{579E61F9-3B03-691D-E194-7578C9E4C37B}"/>
               </a:ext>
             </a:extLst>
           </p:cNvPr>
@@ -8450,13 +9061,14 @@
         </p:nvPicPr>
         <p:blipFill>
           <a:blip r:embed="rId3"/>
-          <a:srcRect/>
-          <a:stretch/>
+          <a:stretch>
+            <a:fillRect/>
+          </a:stretch>
         </p:blipFill>
         <p:spPr>
           <a:xfrm>
-            <a:off x="3048000" y="3441329"/>
-            <a:ext cx="3048000" cy="1371600"/>
+            <a:off x="602248" y="2238998"/>
+            <a:ext cx="3657600" cy="2438400"/>
           </a:xfrm>
           <a:prstGeom prst="rect">
             <a:avLst/>
@@ -8465,10 +9077,10 @@
       </p:pic>
       <p:pic>
         <p:nvPicPr>
-          <p:cNvPr id="3" name="Picture 2">
-            <a:extLst>
-              <a:ext uri="{FF2B5EF4-FFF2-40B4-BE49-F238E27FC236}">
-                <a16:creationId xmlns:a16="http://schemas.microsoft.com/office/drawing/2014/main" id="{B020A83D-D33B-2029-9739-F7AFC484A636}"/>
+          <p:cNvPr id="6" name="Picture 5">
+            <a:extLst>
+              <a:ext uri="{FF2B5EF4-FFF2-40B4-BE49-F238E27FC236}">
+                <a16:creationId xmlns:a16="http://schemas.microsoft.com/office/drawing/2014/main" id="{D028EEFE-1894-A4C7-C622-6CB92A31F5EF}"/>
               </a:ext>
             </a:extLst>
           </p:cNvPr>
@@ -8479,13 +9091,14 @@
         </p:nvPicPr>
         <p:blipFill>
           <a:blip r:embed="rId4"/>
-          <a:srcRect/>
-          <a:stretch/>
+          <a:stretch>
+            <a:fillRect/>
+          </a:stretch>
         </p:blipFill>
         <p:spPr>
           <a:xfrm>
-            <a:off x="1730245" y="189472"/>
-            <a:ext cx="5683509" cy="3424374"/>
+            <a:off x="4884153" y="1352550"/>
+            <a:ext cx="3657600" cy="2438400"/>
           </a:xfrm>
           <a:prstGeom prst="rect">
             <a:avLst/>
@@ -8495,7 +9108,7 @@
     </p:spTree>
     <p:extLst>
       <p:ext uri="{BB962C8B-B14F-4D97-AF65-F5344CB8AC3E}">
-        <p14:creationId xmlns:p14="http://schemas.microsoft.com/office/powerpoint/2010/main" val="3349641183"/>
+        <p14:creationId xmlns:p14="http://schemas.microsoft.com/office/powerpoint/2010/main" val="3576415329"/>
       </p:ext>
     </p:extLst>
   </p:cSld>
@@ -8513,7 +9126,7 @@
         <p:cNvPr id="1" name="">
           <a:extLst>
             <a:ext uri="{FF2B5EF4-FFF2-40B4-BE49-F238E27FC236}">
-              <a16:creationId xmlns:a16="http://schemas.microsoft.com/office/drawing/2014/main" id="{A451DBD4-E8A6-6292-DB24-BE7519CE77B9}"/>
+              <a16:creationId xmlns:a16="http://schemas.microsoft.com/office/drawing/2014/main" id="{660A9DF5-EF8F-95AD-CD56-BF21EC645441}"/>
             </a:ext>
           </a:extLst>
         </p:cNvPr>
@@ -8530,33 +9143,281 @@
       </p:grpSpPr>
       <p:sp>
         <p:nvSpPr>
-          <p:cNvPr id="7" name="Rechteck 6">
-            <a:extLst>
-              <a:ext uri="{FF2B5EF4-FFF2-40B4-BE49-F238E27FC236}">
-                <a16:creationId xmlns:a16="http://schemas.microsoft.com/office/drawing/2014/main" id="{756B5D0E-D462-0410-4DD5-5D13B794C9A7}"/>
-              </a:ext>
-            </a:extLst>
-          </p:cNvPr>
-          <p:cNvSpPr/>
+          <p:cNvPr id="4" name="Foliennummernplatzhalter 3">
+            <a:extLst>
+              <a:ext uri="{FF2B5EF4-FFF2-40B4-BE49-F238E27FC236}">
+                <a16:creationId xmlns:a16="http://schemas.microsoft.com/office/drawing/2014/main" id="{BE8C14EC-FDC6-7739-730C-E303D359A554}"/>
+              </a:ext>
+            </a:extLst>
+          </p:cNvPr>
+          <p:cNvSpPr>
+            <a:spLocks noGrp="1"/>
+          </p:cNvSpPr>
+          <p:nvPr>
+            <p:ph type="sldNum" sz="quarter" idx="4"/>
+          </p:nvPr>
+        </p:nvSpPr>
+        <p:spPr/>
+        <p:txBody>
+          <a:bodyPr/>
+          <a:lstStyle/>
+          <a:p>
+            <a:fld id="{610C4E4B-DC7F-8F40-B47C-DF522102C54B}" type="slidenum">
+              <a:rPr lang="en-US" noProof="0" smtClean="0"/>
+              <a:pPr/>
+              <a:t>7</a:t>
+            </a:fld>
+            <a:endParaRPr lang="en-US" noProof="0" dirty="0"/>
+          </a:p>
+        </p:txBody>
+      </p:sp>
+      <p:sp>
+        <p:nvSpPr>
+          <p:cNvPr id="7" name="Titel 1">
+            <a:extLst>
+              <a:ext uri="{FF2B5EF4-FFF2-40B4-BE49-F238E27FC236}">
+                <a16:creationId xmlns:a16="http://schemas.microsoft.com/office/drawing/2014/main" id="{96E94372-A18C-2F62-D0B4-C76347F227F2}"/>
+              </a:ext>
+            </a:extLst>
+          </p:cNvPr>
+          <p:cNvSpPr>
+            <a:spLocks noGrp="1"/>
+          </p:cNvSpPr>
+          <p:nvPr>
+            <p:ph type="ctrTitle"/>
+          </p:nvPr>
+        </p:nvSpPr>
+        <p:spPr>
+          <a:xfrm>
+            <a:off x="685800" y="0"/>
+            <a:ext cx="7772400" cy="1102519"/>
+          </a:xfrm>
+        </p:spPr>
+        <p:txBody>
+          <a:bodyPr/>
+          <a:lstStyle/>
+          <a:p>
+            <a:pPr algn="ctr"/>
+            <a:r>
+              <a:rPr lang="en-US" sz="3200" noProof="0" dirty="0"/>
+              <a:t>Maximum Speed – Methodology</a:t>
+            </a:r>
+          </a:p>
+        </p:txBody>
+      </p:sp>
+      <p:sp>
+        <p:nvSpPr>
+          <p:cNvPr id="2" name="TextBox 1">
+            <a:extLst>
+              <a:ext uri="{FF2B5EF4-FFF2-40B4-BE49-F238E27FC236}">
+                <a16:creationId xmlns:a16="http://schemas.microsoft.com/office/drawing/2014/main" id="{87085403-4D3F-FA01-3518-FF0082C5BDFA}"/>
+              </a:ext>
+            </a:extLst>
+          </p:cNvPr>
+          <p:cNvSpPr txBox="1"/>
           <p:nvPr/>
         </p:nvSpPr>
         <p:spPr>
           <a:xfrm>
-            <a:off x="7520940" y="4175760"/>
-            <a:ext cx="1310640" cy="685800"/>
+            <a:off x="447674" y="1102519"/>
+            <a:ext cx="8248651" cy="646331"/>
           </a:xfrm>
           <a:prstGeom prst="rect">
             <a:avLst/>
           </a:prstGeom>
-          <a:solidFill>
-            <a:schemeClr val="bg1"/>
-          </a:solidFill>
+          <a:noFill/>
+        </p:spPr>
+        <p:txBody>
+          <a:bodyPr wrap="square" rtlCol="0">
+            <a:spAutoFit/>
+          </a:bodyPr>
+          <a:lstStyle/>
+          <a:p>
+            <a:r>
+              <a:rPr lang="en-US" sz="2000" noProof="0" dirty="0">
+                <a:solidFill>
+                  <a:srgbClr val="51AA00"/>
+                </a:solidFill>
+              </a:rPr>
+              <a:t>Minitab’s Best subset with just 2 predictors:</a:t>
+            </a:r>
+          </a:p>
+          <a:p>
+            <a:r>
+              <a:rPr lang="en-US" sz="1600" noProof="0" dirty="0"/>
+              <a:t>Power, Acceleration</a:t>
+            </a:r>
+          </a:p>
+        </p:txBody>
+      </p:sp>
+      <p:cxnSp>
+        <p:nvCxnSpPr>
+          <p:cNvPr id="9" name="Straight Arrow Connector 8">
+            <a:extLst>
+              <a:ext uri="{FF2B5EF4-FFF2-40B4-BE49-F238E27FC236}">
+                <a16:creationId xmlns:a16="http://schemas.microsoft.com/office/drawing/2014/main" id="{38E5D33D-DCF0-5B55-9721-449E7C710B09}"/>
+              </a:ext>
+            </a:extLst>
+          </p:cNvPr>
+          <p:cNvCxnSpPr>
+            <a:cxnSpLocks/>
+          </p:cNvCxnSpPr>
+          <p:nvPr/>
+        </p:nvCxnSpPr>
+        <p:spPr>
+          <a:xfrm>
+            <a:off x="4457211" y="3477030"/>
+            <a:ext cx="738632" cy="0"/>
+          </a:xfrm>
+          <a:prstGeom prst="straightConnector1">
+            <a:avLst/>
+          </a:prstGeom>
           <a:ln>
             <a:solidFill>
-              <a:schemeClr val="bg1"/>
+              <a:srgbClr val="FF0000"/>
+            </a:solidFill>
+            <a:tailEnd type="triangle"/>
+          </a:ln>
+        </p:spPr>
+        <p:style>
+          <a:lnRef idx="2">
+            <a:schemeClr val="accent1"/>
+          </a:lnRef>
+          <a:fillRef idx="0">
+            <a:schemeClr val="accent1"/>
+          </a:fillRef>
+          <a:effectRef idx="1">
+            <a:schemeClr val="accent1"/>
+          </a:effectRef>
+          <a:fontRef idx="minor">
+            <a:schemeClr val="tx1"/>
+          </a:fontRef>
+        </p:style>
+      </p:cxnSp>
+      <p:sp>
+        <p:nvSpPr>
+          <p:cNvPr id="11" name="TextBox 10">
+            <a:extLst>
+              <a:ext uri="{FF2B5EF4-FFF2-40B4-BE49-F238E27FC236}">
+                <a16:creationId xmlns:a16="http://schemas.microsoft.com/office/drawing/2014/main" id="{F3856CC7-C2EF-3C4F-D251-D8480559F9B8}"/>
+              </a:ext>
+            </a:extLst>
+          </p:cNvPr>
+          <p:cNvSpPr txBox="1"/>
+          <p:nvPr/>
+        </p:nvSpPr>
+        <p:spPr>
+          <a:xfrm>
+            <a:off x="5206890" y="3307753"/>
+            <a:ext cx="2713290" cy="338554"/>
+          </a:xfrm>
+          <a:prstGeom prst="rect">
+            <a:avLst/>
+          </a:prstGeom>
+          <a:noFill/>
+        </p:spPr>
+        <p:txBody>
+          <a:bodyPr wrap="square">
+            <a:spAutoFit/>
+          </a:bodyPr>
+          <a:lstStyle/>
+          <a:p>
+            <a:pPr marL="342900" indent="-342900">
+              <a:buAutoNum type="arabicPeriod"/>
+            </a:pPr>
+            <a:r>
+              <a:rPr lang="en-US" sz="1600" noProof="0" dirty="0"/>
+              <a:t>Remove outlier</a:t>
+            </a:r>
+            <a:endParaRPr lang="en-DE" sz="1600" dirty="0"/>
+          </a:p>
+        </p:txBody>
+      </p:sp>
+      <p:pic>
+        <p:nvPicPr>
+          <p:cNvPr id="6" name="Picture 5">
+            <a:extLst>
+              <a:ext uri="{FF2B5EF4-FFF2-40B4-BE49-F238E27FC236}">
+                <a16:creationId xmlns:a16="http://schemas.microsoft.com/office/drawing/2014/main" id="{58023F86-28EA-BEB3-0C8C-47742AAAB488}"/>
+              </a:ext>
+            </a:extLst>
+          </p:cNvPr>
+          <p:cNvPicPr>
+            <a:picLocks noChangeAspect="1"/>
+          </p:cNvPicPr>
+          <p:nvPr/>
+        </p:nvPicPr>
+        <p:blipFill>
+          <a:blip r:embed="rId2"/>
+          <a:srcRect b="25191"/>
+          <a:stretch/>
+        </p:blipFill>
+        <p:spPr>
+          <a:xfrm>
+            <a:off x="5681108" y="925098"/>
+            <a:ext cx="2239072" cy="1142280"/>
+          </a:xfrm>
+          <a:prstGeom prst="rect">
+            <a:avLst/>
+          </a:prstGeom>
+        </p:spPr>
+      </p:pic>
+      <p:pic>
+        <p:nvPicPr>
+          <p:cNvPr id="8" name="Picture 7">
+            <a:extLst>
+              <a:ext uri="{FF2B5EF4-FFF2-40B4-BE49-F238E27FC236}">
+                <a16:creationId xmlns:a16="http://schemas.microsoft.com/office/drawing/2014/main" id="{7BCEB810-2F59-C626-88C5-7A30B571BA08}"/>
+              </a:ext>
+            </a:extLst>
+          </p:cNvPr>
+          <p:cNvPicPr>
+            <a:picLocks noChangeAspect="1"/>
+          </p:cNvPicPr>
+          <p:nvPr/>
+        </p:nvPicPr>
+        <p:blipFill>
+          <a:blip r:embed="rId3"/>
+          <a:stretch>
+            <a:fillRect/>
+          </a:stretch>
+        </p:blipFill>
+        <p:spPr>
+          <a:xfrm>
+            <a:off x="685800" y="2151567"/>
+            <a:ext cx="3657600" cy="2438400"/>
+          </a:xfrm>
+          <a:prstGeom prst="rect">
+            <a:avLst/>
+          </a:prstGeom>
+        </p:spPr>
+      </p:pic>
+      <p:sp>
+        <p:nvSpPr>
+          <p:cNvPr id="12" name="Oval 11">
+            <a:extLst>
+              <a:ext uri="{FF2B5EF4-FFF2-40B4-BE49-F238E27FC236}">
+                <a16:creationId xmlns:a16="http://schemas.microsoft.com/office/drawing/2014/main" id="{9203F628-F0D2-CE52-06A5-F49680EF417C}"/>
+              </a:ext>
+            </a:extLst>
+          </p:cNvPr>
+          <p:cNvSpPr/>
+          <p:nvPr/>
+        </p:nvSpPr>
+        <p:spPr>
+          <a:xfrm>
+            <a:off x="948584" y="3085032"/>
+            <a:ext cx="230736" cy="230736"/>
+          </a:xfrm>
+          <a:prstGeom prst="ellipse">
+            <a:avLst/>
+          </a:prstGeom>
+          <a:noFill/>
+          <a:ln w="28575">
+            <a:solidFill>
+              <a:srgbClr val="FF0000"/>
             </a:solidFill>
           </a:ln>
-          <a:effectLst/>
         </p:spPr>
         <p:style>
           <a:lnRef idx="1">
@@ -8577,73 +9438,164 @@
           <a:lstStyle/>
           <a:p>
             <a:pPr algn="ctr"/>
-            <a:endParaRPr lang="en-GB"/>
-          </a:p>
-        </p:txBody>
-      </p:sp>
-      <p:sp>
-        <p:nvSpPr>
-          <p:cNvPr id="2" name="Foliennummernplatzhalter 1">
-            <a:extLst>
-              <a:ext uri="{FF2B5EF4-FFF2-40B4-BE49-F238E27FC236}">
-                <a16:creationId xmlns:a16="http://schemas.microsoft.com/office/drawing/2014/main" id="{5C7BB05F-081C-B725-A115-DBD2980CCD9F}"/>
-              </a:ext>
-            </a:extLst>
-          </p:cNvPr>
-          <p:cNvSpPr>
-            <a:spLocks noGrp="1"/>
-          </p:cNvSpPr>
-          <p:nvPr>
-            <p:ph type="sldNum" sz="quarter" idx="10"/>
-          </p:nvPr>
-        </p:nvSpPr>
-        <p:spPr/>
-        <p:txBody>
-          <a:bodyPr/>
-          <a:lstStyle/>
-          <a:p>
-            <a:fld id="{610C4E4B-DC7F-8F40-B47C-DF522102C54B}" type="slidenum">
-              <a:rPr lang="sv-SE" smtClean="0"/>
-              <a:pPr/>
-              <a:t>7</a:t>
-            </a:fld>
-            <a:endParaRPr lang="sv-SE" dirty="0"/>
-          </a:p>
-        </p:txBody>
-      </p:sp>
-      <p:pic>
-        <p:nvPicPr>
-          <p:cNvPr id="4" name="Picture 3">
-            <a:extLst>
-              <a:ext uri="{FF2B5EF4-FFF2-40B4-BE49-F238E27FC236}">
-                <a16:creationId xmlns:a16="http://schemas.microsoft.com/office/drawing/2014/main" id="{8FB0214B-3CB7-5981-3BDB-408FDB284407}"/>
-              </a:ext>
-            </a:extLst>
-          </p:cNvPr>
-          <p:cNvPicPr>
-            <a:picLocks noChangeAspect="1"/>
-          </p:cNvPicPr>
+            <a:endParaRPr lang="en-DE"/>
+          </a:p>
+        </p:txBody>
+      </p:sp>
+      <p:sp>
+        <p:nvSpPr>
+          <p:cNvPr id="13" name="Oval 12">
+            <a:extLst>
+              <a:ext uri="{FF2B5EF4-FFF2-40B4-BE49-F238E27FC236}">
+                <a16:creationId xmlns:a16="http://schemas.microsoft.com/office/drawing/2014/main" id="{8194619E-45AE-C666-5E7F-1FE1BC6AC5B9}"/>
+              </a:ext>
+            </a:extLst>
+          </p:cNvPr>
+          <p:cNvSpPr/>
           <p:nvPr/>
-        </p:nvPicPr>
-        <p:blipFill>
-          <a:blip r:embed="rId3"/>
-          <a:srcRect/>
-          <a:stretch/>
-        </p:blipFill>
-        <p:spPr>
-          <a:xfrm>
-            <a:off x="1143000" y="0"/>
-            <a:ext cx="6858000" cy="5143500"/>
-          </a:xfrm>
-          <a:prstGeom prst="rect">
+        </p:nvSpPr>
+        <p:spPr>
+          <a:xfrm>
+            <a:off x="3804673" y="3054441"/>
+            <a:ext cx="230736" cy="230736"/>
+          </a:xfrm>
+          <a:prstGeom prst="ellipse">
             <a:avLst/>
           </a:prstGeom>
-        </p:spPr>
-      </p:pic>
+          <a:noFill/>
+          <a:ln w="28575">
+            <a:solidFill>
+              <a:srgbClr val="FF0000"/>
+            </a:solidFill>
+          </a:ln>
+        </p:spPr>
+        <p:style>
+          <a:lnRef idx="1">
+            <a:schemeClr val="accent1"/>
+          </a:lnRef>
+          <a:fillRef idx="3">
+            <a:schemeClr val="accent1"/>
+          </a:fillRef>
+          <a:effectRef idx="2">
+            <a:schemeClr val="accent1"/>
+          </a:effectRef>
+          <a:fontRef idx="minor">
+            <a:schemeClr val="lt1"/>
+          </a:fontRef>
+        </p:style>
+        <p:txBody>
+          <a:bodyPr rtlCol="0" anchor="ctr"/>
+          <a:lstStyle/>
+          <a:p>
+            <a:pPr algn="ctr"/>
+            <a:endParaRPr lang="en-DE"/>
+          </a:p>
+        </p:txBody>
+      </p:sp>
+      <p:sp>
+        <p:nvSpPr>
+          <p:cNvPr id="14" name="Oval 13">
+            <a:extLst>
+              <a:ext uri="{FF2B5EF4-FFF2-40B4-BE49-F238E27FC236}">
+                <a16:creationId xmlns:a16="http://schemas.microsoft.com/office/drawing/2014/main" id="{5D3A6AD4-BD92-5DB0-65E9-2873D16E579D}"/>
+              </a:ext>
+            </a:extLst>
+          </p:cNvPr>
+          <p:cNvSpPr/>
+          <p:nvPr/>
+        </p:nvSpPr>
+        <p:spPr>
+          <a:xfrm>
+            <a:off x="959872" y="4238978"/>
+            <a:ext cx="230736" cy="230736"/>
+          </a:xfrm>
+          <a:prstGeom prst="ellipse">
+            <a:avLst/>
+          </a:prstGeom>
+          <a:noFill/>
+          <a:ln w="28575">
+            <a:solidFill>
+              <a:srgbClr val="FF0000"/>
+            </a:solidFill>
+          </a:ln>
+        </p:spPr>
+        <p:style>
+          <a:lnRef idx="1">
+            <a:schemeClr val="accent1"/>
+          </a:lnRef>
+          <a:fillRef idx="3">
+            <a:schemeClr val="accent1"/>
+          </a:fillRef>
+          <a:effectRef idx="2">
+            <a:schemeClr val="accent1"/>
+          </a:effectRef>
+          <a:fontRef idx="minor">
+            <a:schemeClr val="lt1"/>
+          </a:fontRef>
+        </p:style>
+        <p:txBody>
+          <a:bodyPr rtlCol="0" anchor="ctr"/>
+          <a:lstStyle/>
+          <a:p>
+            <a:pPr algn="ctr"/>
+            <a:endParaRPr lang="en-DE"/>
+          </a:p>
+        </p:txBody>
+      </p:sp>
+      <p:sp>
+        <p:nvSpPr>
+          <p:cNvPr id="15" name="Oval 14">
+            <a:extLst>
+              <a:ext uri="{FF2B5EF4-FFF2-40B4-BE49-F238E27FC236}">
+                <a16:creationId xmlns:a16="http://schemas.microsoft.com/office/drawing/2014/main" id="{988842B6-F777-542A-E686-2E5715FB3061}"/>
+              </a:ext>
+            </a:extLst>
+          </p:cNvPr>
+          <p:cNvSpPr/>
+          <p:nvPr/>
+        </p:nvSpPr>
+        <p:spPr>
+          <a:xfrm>
+            <a:off x="2850761" y="4188178"/>
+            <a:ext cx="230736" cy="230736"/>
+          </a:xfrm>
+          <a:prstGeom prst="ellipse">
+            <a:avLst/>
+          </a:prstGeom>
+          <a:noFill/>
+          <a:ln w="28575">
+            <a:solidFill>
+              <a:srgbClr val="FF0000"/>
+            </a:solidFill>
+          </a:ln>
+        </p:spPr>
+        <p:style>
+          <a:lnRef idx="1">
+            <a:schemeClr val="accent1"/>
+          </a:lnRef>
+          <a:fillRef idx="3">
+            <a:schemeClr val="accent1"/>
+          </a:fillRef>
+          <a:effectRef idx="2">
+            <a:schemeClr val="accent1"/>
+          </a:effectRef>
+          <a:fontRef idx="minor">
+            <a:schemeClr val="lt1"/>
+          </a:fontRef>
+        </p:style>
+        <p:txBody>
+          <a:bodyPr rtlCol="0" anchor="ctr"/>
+          <a:lstStyle/>
+          <a:p>
+            <a:pPr algn="ctr"/>
+            <a:endParaRPr lang="en-DE"/>
+          </a:p>
+        </p:txBody>
+      </p:sp>
     </p:spTree>
     <p:extLst>
       <p:ext uri="{BB962C8B-B14F-4D97-AF65-F5344CB8AC3E}">
-        <p14:creationId xmlns:p14="http://schemas.microsoft.com/office/powerpoint/2010/main" val="1563258918"/>
+        <p14:creationId xmlns:p14="http://schemas.microsoft.com/office/powerpoint/2010/main" val="3435148887"/>
       </p:ext>
     </p:extLst>
   </p:cSld>
@@ -8661,7 +9613,7 @@
         <p:cNvPr id="1" name="">
           <a:extLst>
             <a:ext uri="{FF2B5EF4-FFF2-40B4-BE49-F238E27FC236}">
-              <a16:creationId xmlns:a16="http://schemas.microsoft.com/office/drawing/2014/main" id="{053F9ADE-D769-1C67-F51F-4B647DC00F62}"/>
+              <a16:creationId xmlns:a16="http://schemas.microsoft.com/office/drawing/2014/main" id="{0E28615F-2C54-922C-3F51-52185A039F13}"/>
             </a:ext>
           </a:extLst>
         </p:cNvPr>
@@ -8678,63 +9630,10 @@
       </p:grpSpPr>
       <p:sp>
         <p:nvSpPr>
-          <p:cNvPr id="6" name="Rechteck 5">
-            <a:extLst>
-              <a:ext uri="{FF2B5EF4-FFF2-40B4-BE49-F238E27FC236}">
-                <a16:creationId xmlns:a16="http://schemas.microsoft.com/office/drawing/2014/main" id="{7051B6A1-095F-F9DE-DD64-EE81FA6136E4}"/>
-              </a:ext>
-            </a:extLst>
-          </p:cNvPr>
-          <p:cNvSpPr/>
-          <p:nvPr/>
-        </p:nvSpPr>
-        <p:spPr>
-          <a:xfrm>
-            <a:off x="7673340" y="4328160"/>
-            <a:ext cx="1310640" cy="685800"/>
-          </a:xfrm>
-          <a:prstGeom prst="rect">
-            <a:avLst/>
-          </a:prstGeom>
-          <a:solidFill>
-            <a:schemeClr val="bg1"/>
-          </a:solidFill>
-          <a:ln>
-            <a:solidFill>
-              <a:schemeClr val="bg1"/>
-            </a:solidFill>
-          </a:ln>
-          <a:effectLst/>
-        </p:spPr>
-        <p:style>
-          <a:lnRef idx="1">
-            <a:schemeClr val="accent1"/>
-          </a:lnRef>
-          <a:fillRef idx="3">
-            <a:schemeClr val="accent1"/>
-          </a:fillRef>
-          <a:effectRef idx="2">
-            <a:schemeClr val="accent1"/>
-          </a:effectRef>
-          <a:fontRef idx="minor">
-            <a:schemeClr val="lt1"/>
-          </a:fontRef>
-        </p:style>
-        <p:txBody>
-          <a:bodyPr rtlCol="0" anchor="ctr"/>
-          <a:lstStyle/>
-          <a:p>
-            <a:pPr algn="ctr"/>
-            <a:endParaRPr lang="en-GB"/>
-          </a:p>
-        </p:txBody>
-      </p:sp>
-      <p:sp>
-        <p:nvSpPr>
-          <p:cNvPr id="2" name="Foliennummernplatzhalter 1">
-            <a:extLst>
-              <a:ext uri="{FF2B5EF4-FFF2-40B4-BE49-F238E27FC236}">
-                <a16:creationId xmlns:a16="http://schemas.microsoft.com/office/drawing/2014/main" id="{E51AC65A-60F7-E330-D706-E7B2D2F21788}"/>
+          <p:cNvPr id="4" name="Foliennummernplatzhalter 3">
+            <a:extLst>
+              <a:ext uri="{FF2B5EF4-FFF2-40B4-BE49-F238E27FC236}">
+                <a16:creationId xmlns:a16="http://schemas.microsoft.com/office/drawing/2014/main" id="{AA6F23FF-4C99-5F36-3C9F-F3B33BD7DA3E}"/>
               </a:ext>
             </a:extLst>
           </p:cNvPr>
@@ -8742,7 +9641,7 @@
             <a:spLocks noGrp="1"/>
           </p:cNvSpPr>
           <p:nvPr>
-            <p:ph type="sldNum" sz="quarter" idx="10"/>
+            <p:ph type="sldNum" sz="quarter" idx="4"/>
           </p:nvPr>
         </p:nvSpPr>
         <p:spPr/>
@@ -8751,73 +9650,54 @@
           <a:lstStyle/>
           <a:p>
             <a:fld id="{610C4E4B-DC7F-8F40-B47C-DF522102C54B}" type="slidenum">
-              <a:rPr lang="sv-SE" smtClean="0"/>
+              <a:rPr lang="en-US" noProof="0" smtClean="0"/>
               <a:pPr/>
               <a:t>8</a:t>
             </a:fld>
-            <a:endParaRPr lang="sv-SE" dirty="0"/>
-          </a:p>
-        </p:txBody>
-      </p:sp>
-      <p:sp>
-        <p:nvSpPr>
-          <p:cNvPr id="5" name="Rechteck 4">
-            <a:extLst>
-              <a:ext uri="{FF2B5EF4-FFF2-40B4-BE49-F238E27FC236}">
-                <a16:creationId xmlns:a16="http://schemas.microsoft.com/office/drawing/2014/main" id="{F8F9E820-E143-DE9F-C27C-621B9A398ACD}"/>
-              </a:ext>
-            </a:extLst>
-          </p:cNvPr>
-          <p:cNvSpPr/>
-          <p:nvPr/>
-        </p:nvSpPr>
-        <p:spPr>
-          <a:xfrm>
-            <a:off x="7520940" y="4175760"/>
-            <a:ext cx="1310640" cy="685800"/>
-          </a:xfrm>
-          <a:prstGeom prst="rect">
-            <a:avLst/>
-          </a:prstGeom>
-          <a:solidFill>
-            <a:schemeClr val="bg1"/>
-          </a:solidFill>
-          <a:ln>
-            <a:solidFill>
-              <a:schemeClr val="bg1"/>
-            </a:solidFill>
-          </a:ln>
-          <a:effectLst/>
-        </p:spPr>
-        <p:style>
-          <a:lnRef idx="1">
-            <a:schemeClr val="accent1"/>
-          </a:lnRef>
-          <a:fillRef idx="3">
-            <a:schemeClr val="accent1"/>
-          </a:fillRef>
-          <a:effectRef idx="2">
-            <a:schemeClr val="accent1"/>
-          </a:effectRef>
-          <a:fontRef idx="minor">
-            <a:schemeClr val="lt1"/>
-          </a:fontRef>
-        </p:style>
-        <p:txBody>
-          <a:bodyPr rtlCol="0" anchor="ctr"/>
+            <a:endParaRPr lang="en-US" noProof="0" dirty="0"/>
+          </a:p>
+        </p:txBody>
+      </p:sp>
+      <p:sp>
+        <p:nvSpPr>
+          <p:cNvPr id="7" name="Titel 1">
+            <a:extLst>
+              <a:ext uri="{FF2B5EF4-FFF2-40B4-BE49-F238E27FC236}">
+                <a16:creationId xmlns:a16="http://schemas.microsoft.com/office/drawing/2014/main" id="{49C6D602-873C-3463-526B-4C0CEF05760B}"/>
+              </a:ext>
+            </a:extLst>
+          </p:cNvPr>
+          <p:cNvSpPr>
+            <a:spLocks noGrp="1"/>
+          </p:cNvSpPr>
+          <p:nvPr>
+            <p:ph type="ctrTitle"/>
+          </p:nvPr>
+        </p:nvSpPr>
+        <p:spPr>
+          <a:xfrm>
+            <a:off x="685800" y="0"/>
+            <a:ext cx="7772400" cy="1102519"/>
+          </a:xfrm>
+        </p:spPr>
+        <p:txBody>
+          <a:bodyPr/>
           <a:lstStyle/>
           <a:p>
             <a:pPr algn="ctr"/>
-            <a:endParaRPr lang="en-GB"/>
+            <a:r>
+              <a:rPr lang="en-US" sz="3200" noProof="0" dirty="0"/>
+              <a:t>Regression Model – Max. Speed (1)</a:t>
+            </a:r>
           </a:p>
         </p:txBody>
       </p:sp>
       <p:pic>
         <p:nvPicPr>
-          <p:cNvPr id="4" name="Picture 3">
-            <a:extLst>
-              <a:ext uri="{FF2B5EF4-FFF2-40B4-BE49-F238E27FC236}">
-                <a16:creationId xmlns:a16="http://schemas.microsoft.com/office/drawing/2014/main" id="{D430758A-8012-49B9-2AE3-FBF74014C32E}"/>
+          <p:cNvPr id="3" name="Picture 2">
+            <a:extLst>
+              <a:ext uri="{FF2B5EF4-FFF2-40B4-BE49-F238E27FC236}">
+                <a16:creationId xmlns:a16="http://schemas.microsoft.com/office/drawing/2014/main" id="{E435DAA8-BA1D-4521-96BF-A4D5CD5F5545}"/>
               </a:ext>
             </a:extLst>
           </p:cNvPr>
@@ -8827,43 +9707,15 @@
           <p:nvPr/>
         </p:nvPicPr>
         <p:blipFill>
-          <a:blip r:embed="rId3"/>
-          <a:srcRect/>
-          <a:stretch/>
+          <a:blip r:embed="rId2"/>
+          <a:stretch>
+            <a:fillRect/>
+          </a:stretch>
         </p:blipFill>
         <p:spPr>
           <a:xfrm>
-            <a:off x="3048000" y="3441329"/>
-            <a:ext cx="3048000" cy="1371600"/>
-          </a:xfrm>
-          <a:prstGeom prst="rect">
-            <a:avLst/>
-          </a:prstGeom>
-        </p:spPr>
-      </p:pic>
-      <p:pic>
-        <p:nvPicPr>
-          <p:cNvPr id="3" name="Picture 2">
-            <a:extLst>
-              <a:ext uri="{FF2B5EF4-FFF2-40B4-BE49-F238E27FC236}">
-                <a16:creationId xmlns:a16="http://schemas.microsoft.com/office/drawing/2014/main" id="{7443E379-808B-02C3-45C2-03BE601F39FC}"/>
-              </a:ext>
-            </a:extLst>
-          </p:cNvPr>
-          <p:cNvPicPr>
-            <a:picLocks noChangeAspect="1"/>
-          </p:cNvPicPr>
-          <p:nvPr/>
-        </p:nvPicPr>
-        <p:blipFill>
-          <a:blip r:embed="rId4"/>
-          <a:srcRect/>
-          <a:stretch/>
-        </p:blipFill>
-        <p:spPr>
-          <a:xfrm>
-            <a:off x="1617288" y="392046"/>
-            <a:ext cx="5909424" cy="3019225"/>
+            <a:off x="685800" y="983621"/>
+            <a:ext cx="6807200" cy="3810000"/>
           </a:xfrm>
           <a:prstGeom prst="rect">
             <a:avLst/>
@@ -8873,7 +9725,7 @@
     </p:spTree>
     <p:extLst>
       <p:ext uri="{BB962C8B-B14F-4D97-AF65-F5344CB8AC3E}">
-        <p14:creationId xmlns:p14="http://schemas.microsoft.com/office/powerpoint/2010/main" val="2771524720"/>
+        <p14:creationId xmlns:p14="http://schemas.microsoft.com/office/powerpoint/2010/main" val="227724428"/>
       </p:ext>
     </p:extLst>
   </p:cSld>
@@ -8891,7 +9743,7 @@
         <p:cNvPr id="1" name="">
           <a:extLst>
             <a:ext uri="{FF2B5EF4-FFF2-40B4-BE49-F238E27FC236}">
-              <a16:creationId xmlns:a16="http://schemas.microsoft.com/office/drawing/2014/main" id="{618FE25F-EA48-5651-51DD-6D3C1B913ED9}"/>
+              <a16:creationId xmlns:a16="http://schemas.microsoft.com/office/drawing/2014/main" id="{FBB272DA-FE80-F49F-8EC4-263E57E6D7F3}"/>
             </a:ext>
           </a:extLst>
         </p:cNvPr>
@@ -8908,63 +9760,10 @@
       </p:grpSpPr>
       <p:sp>
         <p:nvSpPr>
-          <p:cNvPr id="7" name="Rechteck 6">
-            <a:extLst>
-              <a:ext uri="{FF2B5EF4-FFF2-40B4-BE49-F238E27FC236}">
-                <a16:creationId xmlns:a16="http://schemas.microsoft.com/office/drawing/2014/main" id="{757BBBA3-8DCA-53A9-FE2E-5F094A279D1D}"/>
-              </a:ext>
-            </a:extLst>
-          </p:cNvPr>
-          <p:cNvSpPr/>
-          <p:nvPr/>
-        </p:nvSpPr>
-        <p:spPr>
-          <a:xfrm>
-            <a:off x="7520940" y="4175760"/>
-            <a:ext cx="1310640" cy="685800"/>
-          </a:xfrm>
-          <a:prstGeom prst="rect">
-            <a:avLst/>
-          </a:prstGeom>
-          <a:solidFill>
-            <a:schemeClr val="bg1"/>
-          </a:solidFill>
-          <a:ln>
-            <a:solidFill>
-              <a:schemeClr val="bg1"/>
-            </a:solidFill>
-          </a:ln>
-          <a:effectLst/>
-        </p:spPr>
-        <p:style>
-          <a:lnRef idx="1">
-            <a:schemeClr val="accent1"/>
-          </a:lnRef>
-          <a:fillRef idx="3">
-            <a:schemeClr val="accent1"/>
-          </a:fillRef>
-          <a:effectRef idx="2">
-            <a:schemeClr val="accent1"/>
-          </a:effectRef>
-          <a:fontRef idx="minor">
-            <a:schemeClr val="lt1"/>
-          </a:fontRef>
-        </p:style>
-        <p:txBody>
-          <a:bodyPr rtlCol="0" anchor="ctr"/>
-          <a:lstStyle/>
-          <a:p>
-            <a:pPr algn="ctr"/>
-            <a:endParaRPr lang="en-GB"/>
-          </a:p>
-        </p:txBody>
-      </p:sp>
-      <p:sp>
-        <p:nvSpPr>
-          <p:cNvPr id="2" name="Foliennummernplatzhalter 1">
-            <a:extLst>
-              <a:ext uri="{FF2B5EF4-FFF2-40B4-BE49-F238E27FC236}">
-                <a16:creationId xmlns:a16="http://schemas.microsoft.com/office/drawing/2014/main" id="{B8B1212D-8025-8282-F1F5-731BBCE42F6D}"/>
+          <p:cNvPr id="4" name="Foliennummernplatzhalter 3">
+            <a:extLst>
+              <a:ext uri="{FF2B5EF4-FFF2-40B4-BE49-F238E27FC236}">
+                <a16:creationId xmlns:a16="http://schemas.microsoft.com/office/drawing/2014/main" id="{4A48345D-4C2C-285E-E0D3-50FEE18FB2B9}"/>
               </a:ext>
             </a:extLst>
           </p:cNvPr>
@@ -8972,7 +9771,7 @@
             <a:spLocks noGrp="1"/>
           </p:cNvSpPr>
           <p:nvPr>
-            <p:ph type="sldNum" sz="quarter" idx="10"/>
+            <p:ph type="sldNum" sz="quarter" idx="4"/>
           </p:nvPr>
         </p:nvSpPr>
         <p:spPr/>
@@ -8981,20 +9780,83 @@
           <a:lstStyle/>
           <a:p>
             <a:fld id="{610C4E4B-DC7F-8F40-B47C-DF522102C54B}" type="slidenum">
-              <a:rPr lang="sv-SE" smtClean="0"/>
+              <a:rPr lang="en-US" noProof="0" smtClean="0"/>
               <a:pPr/>
               <a:t>9</a:t>
             </a:fld>
-            <a:endParaRPr lang="sv-SE" dirty="0"/>
+            <a:endParaRPr lang="en-US" noProof="0" dirty="0"/>
+          </a:p>
+        </p:txBody>
+      </p:sp>
+      <p:sp>
+        <p:nvSpPr>
+          <p:cNvPr id="7" name="Titel 1">
+            <a:extLst>
+              <a:ext uri="{FF2B5EF4-FFF2-40B4-BE49-F238E27FC236}">
+                <a16:creationId xmlns:a16="http://schemas.microsoft.com/office/drawing/2014/main" id="{74732AB7-20B8-0B26-C287-BA34E62F4760}"/>
+              </a:ext>
+            </a:extLst>
+          </p:cNvPr>
+          <p:cNvSpPr>
+            <a:spLocks noGrp="1"/>
+          </p:cNvSpPr>
+          <p:nvPr>
+            <p:ph type="ctrTitle"/>
+          </p:nvPr>
+        </p:nvSpPr>
+        <p:spPr>
+          <a:xfrm>
+            <a:off x="685800" y="0"/>
+            <a:ext cx="7772400" cy="1102519"/>
+          </a:xfrm>
+        </p:spPr>
+        <p:txBody>
+          <a:bodyPr/>
+          <a:lstStyle/>
+          <a:p>
+            <a:pPr algn="ctr"/>
+            <a:r>
+              <a:rPr lang="en-US" sz="3200" noProof="0" dirty="0"/>
+              <a:t>Regression Model – Max. Speed (2)</a:t>
+            </a:r>
           </a:p>
         </p:txBody>
       </p:sp>
       <p:pic>
         <p:nvPicPr>
-          <p:cNvPr id="4" name="Picture 3">
-            <a:extLst>
-              <a:ext uri="{FF2B5EF4-FFF2-40B4-BE49-F238E27FC236}">
-                <a16:creationId xmlns:a16="http://schemas.microsoft.com/office/drawing/2014/main" id="{58E3A6FB-91B0-FE98-3D30-F079F18D22C4}"/>
+          <p:cNvPr id="3" name="Picture 2">
+            <a:extLst>
+              <a:ext uri="{FF2B5EF4-FFF2-40B4-BE49-F238E27FC236}">
+                <a16:creationId xmlns:a16="http://schemas.microsoft.com/office/drawing/2014/main" id="{3DC528E6-1E8C-F409-96BB-A4D2FDD7B84C}"/>
+              </a:ext>
+            </a:extLst>
+          </p:cNvPr>
+          <p:cNvPicPr>
+            <a:picLocks noChangeAspect="1"/>
+          </p:cNvPicPr>
+          <p:nvPr/>
+        </p:nvPicPr>
+        <p:blipFill>
+          <a:blip r:embed="rId2"/>
+          <a:srcRect/>
+          <a:stretch/>
+        </p:blipFill>
+        <p:spPr>
+          <a:xfrm>
+            <a:off x="604562" y="965265"/>
+            <a:ext cx="3652970" cy="1273733"/>
+          </a:xfrm>
+          <a:prstGeom prst="rect">
+            <a:avLst/>
+          </a:prstGeom>
+        </p:spPr>
+      </p:pic>
+      <p:pic>
+        <p:nvPicPr>
+          <p:cNvPr id="5" name="Picture 4">
+            <a:extLst>
+              <a:ext uri="{FF2B5EF4-FFF2-40B4-BE49-F238E27FC236}">
+                <a16:creationId xmlns:a16="http://schemas.microsoft.com/office/drawing/2014/main" id="{9D348B70-16BF-6601-F792-4BF49D51D1F5}"/>
               </a:ext>
             </a:extLst>
           </p:cNvPr>
@@ -9010,8 +9872,37 @@
         </p:blipFill>
         <p:spPr>
           <a:xfrm>
-            <a:off x="1143000" y="0"/>
-            <a:ext cx="6858000" cy="5143500"/>
+            <a:off x="602248" y="2238998"/>
+            <a:ext cx="3657600" cy="2438400"/>
+          </a:xfrm>
+          <a:prstGeom prst="rect">
+            <a:avLst/>
+          </a:prstGeom>
+        </p:spPr>
+      </p:pic>
+      <p:pic>
+        <p:nvPicPr>
+          <p:cNvPr id="6" name="Picture 5">
+            <a:extLst>
+              <a:ext uri="{FF2B5EF4-FFF2-40B4-BE49-F238E27FC236}">
+                <a16:creationId xmlns:a16="http://schemas.microsoft.com/office/drawing/2014/main" id="{E0E4DD9D-FF61-8658-EDE0-889B64782630}"/>
+              </a:ext>
+            </a:extLst>
+          </p:cNvPr>
+          <p:cNvPicPr>
+            <a:picLocks noChangeAspect="1"/>
+          </p:cNvPicPr>
+          <p:nvPr/>
+        </p:nvPicPr>
+        <p:blipFill>
+          <a:blip r:embed="rId4"/>
+          <a:srcRect/>
+          <a:stretch/>
+        </p:blipFill>
+        <p:spPr>
+          <a:xfrm>
+            <a:off x="4884153" y="1352550"/>
+            <a:ext cx="3657600" cy="2438400"/>
           </a:xfrm>
           <a:prstGeom prst="rect">
             <a:avLst/>
@@ -9021,7 +9912,7 @@
     </p:spTree>
     <p:extLst>
       <p:ext uri="{BB962C8B-B14F-4D97-AF65-F5344CB8AC3E}">
-        <p14:creationId xmlns:p14="http://schemas.microsoft.com/office/powerpoint/2010/main" val="11417239"/>
+        <p14:creationId xmlns:p14="http://schemas.microsoft.com/office/powerpoint/2010/main" val="1211256329"/>
       </p:ext>
     </p:extLst>
   </p:cSld>
@@ -9993,15 +10884,6 @@
 </file>
 
 <file path=customXml/item1.xml><?xml version="1.0" encoding="utf-8"?>
-<?mso-contentType ?>
-<FormTemplates xmlns="http://schemas.microsoft.com/sharepoint/v3/contenttype/forms">
-  <Display>DocumentLibraryForm</Display>
-  <Edit>DocumentLibraryForm</Edit>
-  <New>DocumentLibraryForm</New>
-</FormTemplates>
-</file>
-
-<file path=customXml/item2.xml><?xml version="1.0" encoding="utf-8"?>
 <ct:contentTypeSchema xmlns:ct="http://schemas.microsoft.com/office/2006/metadata/contentType" xmlns:ma="http://schemas.microsoft.com/office/2006/metadata/properties/metaAttributes" ct:_="" ma:_="" ma:contentTypeName="dokument" ma:contentTypeID="0x010100830AFD53EA4FAC4B93D1BAD879B4B205" ma:contentTypeVersion="20" ma:contentTypeDescription="Skapa ett nytt dokument." ma:contentTypeScope="" ma:versionID="d20458860b4e67c8a989bb88ba1189b9">
   <xsd:schema xmlns:xsd="http://www.w3.org/2001/XMLSchema" xmlns:xs="http://www.w3.org/2001/XMLSchema" xmlns:p="http://schemas.microsoft.com/office/2006/metadata/properties" xmlns:ns2="a27dfd0f-a6f2-4712-9137-d9a404cddc60" xmlns:ns3="661728cc-f8de-4546-bc23-5f5fdbb4708e" targetNamespace="http://schemas.microsoft.com/office/2006/metadata/properties" ma:root="true" ma:fieldsID="704e11bb582ec7a1851f532e774c0983" ns2:_="" ns3:_="">
     <xsd:import namespace="a27dfd0f-a6f2-4712-9137-d9a404cddc60"/>
@@ -10222,6 +11104,15 @@
 </ct:contentTypeSchema>
 </file>
 
+<file path=customXml/item2.xml><?xml version="1.0" encoding="utf-8"?>
+<?mso-contentType ?>
+<FormTemplates xmlns="http://schemas.microsoft.com/sharepoint/v3/contenttype/forms">
+  <Display>DocumentLibraryForm</Display>
+  <Edit>DocumentLibraryForm</Edit>
+  <New>DocumentLibraryForm</New>
+</FormTemplates>
+</file>
+
 <file path=customXml/item3.xml><?xml version="1.0" encoding="utf-8"?>
 <p:properties xmlns:p="http://schemas.microsoft.com/office/2006/metadata/properties" xmlns:xsi="http://www.w3.org/2001/XMLSchema-instance" xmlns:pc="http://schemas.microsoft.com/office/infopath/2007/PartnerControls">
   <documentManagement>
@@ -10235,14 +11126,6 @@
 </file>
 
 <file path=customXml/itemProps1.xml><?xml version="1.0" encoding="utf-8"?>
-<ds:datastoreItem xmlns:ds="http://schemas.openxmlformats.org/officeDocument/2006/customXml" ds:itemID="{D28E330F-FAEB-43BD-88E9-B921C1D5AE7B}">
-  <ds:schemaRefs>
-    <ds:schemaRef ds:uri="http://schemas.microsoft.com/sharepoint/v3/contenttype/forms"/>
-  </ds:schemaRefs>
-</ds:datastoreItem>
-</file>
-
-<file path=customXml/itemProps2.xml><?xml version="1.0" encoding="utf-8"?>
 <ds:datastoreItem xmlns:ds="http://schemas.openxmlformats.org/officeDocument/2006/customXml" ds:itemID="{4DA24E85-69A4-40E6-B457-5DEA4943BCC4}">
   <ds:schemaRefs>
     <ds:schemaRef ds:uri="http://schemas.microsoft.com/office/2006/metadata/contentType"/>
@@ -10261,6 +11144,14 @@
 </ds:datastoreItem>
 </file>
 
+<file path=customXml/itemProps2.xml><?xml version="1.0" encoding="utf-8"?>
+<ds:datastoreItem xmlns:ds="http://schemas.openxmlformats.org/officeDocument/2006/customXml" ds:itemID="{D28E330F-FAEB-43BD-88E9-B921C1D5AE7B}">
+  <ds:schemaRefs>
+    <ds:schemaRef ds:uri="http://schemas.microsoft.com/sharepoint/v3/contenttype/forms"/>
+  </ds:schemaRefs>
+</ds:datastoreItem>
+</file>
+
 <file path=customXml/itemProps3.xml><?xml version="1.0" encoding="utf-8"?>
 <ds:datastoreItem xmlns:ds="http://schemas.openxmlformats.org/officeDocument/2006/customXml" ds:itemID="{0CF91B3D-EC90-430A-AB1E-F0238E505E8F}">
   <ds:schemaRefs>
